--- a/docs/presentation/Sistem_text_to_SQL_Dodita_Alexandru.pptx
+++ b/docs/presentation/Sistem_text_to_SQL_Dodita_Alexandru.pptx
@@ -18,6 +18,8 @@
     <p:sldId id="266" r:id="rId18"/>
     <p:sldId id="267" r:id="rId19"/>
     <p:sldId id="268" r:id="rId20"/>
+    <p:sldId id="269" r:id="rId21"/>
+    <p:sldId id="270" r:id="rId22"/>
   </p:sldIdLst>
   <p:sldSz cx="12191695" cy="6858000" type="screen4x3"/>
   <p:notesSz cx="6858000" cy="9144000"/>
@@ -584,7 +586,7 @@
           <a:lstStyle/>
           <a:p>
             <a:r>
-              <a:t>Modelul local Qwen 35B MoE obține 93,2%, egal cu cel mai bun agent Claude din măsurători. Rulează pe o placă de consum cu 12 GiB. Experimentele arată și că densitatea este mai importantă decât dimensiunea fișierului: un model rar poate fi mai mare pe disc, dar mai rapid la inferență.</a:t>
+              <a:t>Rezultatul central este contraintuitiv. Trei modele cu apel unic ating 100%. Cel mai bun agent obține 95,5%, iar cel mai bun model local 93,2%. Accesul la unelte este fezabil, dar nu a depășit reperul simplu cu schema în prompt.</a:t>
             </a:r>
           </a:p>
         </p:txBody>
@@ -654,7 +656,7 @@
           <a:lstStyle/>
           <a:p>
             <a:r>
-              <a:t>Pe întrebările SQL bine precizate, modelele de vârf sunt aproape de plafon. Diferența apare când întrebarea pare validă, dar are mai multe interpretări. Toate modelele cu apel unic au ales o interpretare fără să întrebe. Agenții, având un proces deliberativ, au solicitat clarificări mai des.</a:t>
+              <a:t>Diferența de cost este mai mare decât diferența de acuratețe. Configurațiile agentice măsurate sunt între 9 și 63 de ori mai scumpe pentru o sută de întrebări. Cauza este bucla agentului: fiecare apel retrimite contextul acumulat.</a:t>
             </a:r>
           </a:p>
         </p:txBody>
@@ -724,7 +726,7 @@
           <a:lstStyle/>
           <a:p>
             <a:r>
-              <a:t>Pentru a evita concluziile dependente de întrebările formulate în proiect, am evaluat modelele și pe întregul BIRD-SQL dev. Aici scorurile scad puternic și setul rămâne discriminatoriu. Validarea externă confirmă că un rezultat perfect pe o bază curată nu înseamnă că problema text-to-SQL este rezolvată în general.</a:t>
+              <a:t>Modelul local Qwen 35B MoE obține 93,2%, egal cu cel mai bun agent Claude din măsurători. Rulează pe o placă de consum cu 12 GiB. Experimentele arată și că densitatea este mai importantă decât dimensiunea fișierului: un model rar poate fi mai mare pe disc, dar mai rapid la inferență.</a:t>
             </a:r>
           </a:p>
         </p:txBody>
@@ -794,6 +796,146 @@
           <a:lstStyle/>
           <a:p>
             <a:r>
+              <a:t>Pe întrebările SQL bine precizate, modelele de vârf sunt aproape de plafon. Diferența apare când întrebarea pare validă, dar are mai multe interpretări. Toate modelele cu apel unic au ales o interpretare fără să întrebe. Agenții, având un proces deliberativ, au solicitat clarificări mai des.</a:t>
+            </a:r>
+          </a:p>
+        </p:txBody>
+      </p:sp>
+      <p:sp>
+        <p:nvSpPr>
+          <p:cNvPr id="4" name="Slide Number Placeholder 3"/>
+          <p:cNvSpPr>
+            <a:spLocks noGrp="1"/>
+          </p:cNvSpPr>
+          <p:nvPr>
+            <p:ph type="sldNum" idx="5" sz="quarter"/>
+          </p:nvPr>
+        </p:nvSpPr>
+        <p:spPr/>
+      </p:sp>
+    </p:spTree>
+  </p:cSld>
+  <p:clrMapOvr>
+    <a:masterClrMapping/>
+  </p:clrMapOvr>
+</p:notes>
+</file>
+
+<file path=ppt/notesSlides/notesSlide14.xml><?xml version="1.0" encoding="utf-8"?>
+<p:notes xmlns:a="http://schemas.openxmlformats.org/drawingml/2006/main" xmlns:p="http://schemas.openxmlformats.org/presentationml/2006/main" xmlns:r="http://schemas.openxmlformats.org/officeDocument/2006/relationships">
+  <p:cSld>
+    <p:spTree>
+      <p:nvGrpSpPr>
+        <p:cNvPr id="1" name=""/>
+        <p:cNvGrpSpPr/>
+        <p:nvPr/>
+      </p:nvGrpSpPr>
+      <p:grpSpPr>
+        <a:xfrm>
+          <a:off x="0" y="0"/>
+          <a:ext cx="0" cy="0"/>
+          <a:chOff x="0" y="0"/>
+          <a:chExt cx="0" cy="0"/>
+        </a:xfrm>
+      </p:grpSpPr>
+      <p:sp>
+        <p:nvSpPr>
+          <p:cNvPr id="2" name="Slide Image Placeholder 1"/>
+          <p:cNvSpPr>
+            <a:spLocks noGrp="1"/>
+          </p:cNvSpPr>
+          <p:nvPr>
+            <p:ph type="sldImg" idx="2"/>
+          </p:nvPr>
+        </p:nvSpPr>
+        <p:spPr/>
+      </p:sp>
+      <p:sp>
+        <p:nvSpPr>
+          <p:cNvPr id="3" name="Notes Placeholder 2"/>
+          <p:cNvSpPr>
+            <a:spLocks noGrp="1"/>
+          </p:cNvSpPr>
+          <p:nvPr>
+            <p:ph type="body" idx="3" sz="quarter"/>
+          </p:nvPr>
+        </p:nvSpPr>
+        <p:spPr/>
+        <p:txBody>
+          <a:bodyPr/>
+          <a:lstStyle/>
+          <a:p>
+            <a:r>
+              <a:t>Pentru a evita concluziile dependente de întrebările formulate în proiect, am evaluat modelele și pe întregul BIRD-SQL dev. Aici scorurile scad puternic și setul rămâne discriminatoriu. Validarea externă confirmă că un rezultat perfect pe o bază curată nu înseamnă că problema text-to-SQL este rezolvată în general.</a:t>
+            </a:r>
+          </a:p>
+        </p:txBody>
+      </p:sp>
+      <p:sp>
+        <p:nvSpPr>
+          <p:cNvPr id="4" name="Slide Number Placeholder 3"/>
+          <p:cNvSpPr>
+            <a:spLocks noGrp="1"/>
+          </p:cNvSpPr>
+          <p:nvPr>
+            <p:ph type="sldNum" idx="5" sz="quarter"/>
+          </p:nvPr>
+        </p:nvSpPr>
+        <p:spPr/>
+      </p:sp>
+    </p:spTree>
+  </p:cSld>
+  <p:clrMapOvr>
+    <a:masterClrMapping/>
+  </p:clrMapOvr>
+</p:notes>
+</file>
+
+<file path=ppt/notesSlides/notesSlide15.xml><?xml version="1.0" encoding="utf-8"?>
+<p:notes xmlns:a="http://schemas.openxmlformats.org/drawingml/2006/main" xmlns:p="http://schemas.openxmlformats.org/presentationml/2006/main" xmlns:r="http://schemas.openxmlformats.org/officeDocument/2006/relationships">
+  <p:cSld>
+    <p:spTree>
+      <p:nvGrpSpPr>
+        <p:cNvPr id="1" name=""/>
+        <p:cNvGrpSpPr/>
+        <p:nvPr/>
+      </p:nvGrpSpPr>
+      <p:grpSpPr>
+        <a:xfrm>
+          <a:off x="0" y="0"/>
+          <a:ext cx="0" cy="0"/>
+          <a:chOff x="0" y="0"/>
+          <a:chExt cx="0" cy="0"/>
+        </a:xfrm>
+      </p:grpSpPr>
+      <p:sp>
+        <p:nvSpPr>
+          <p:cNvPr id="2" name="Slide Image Placeholder 1"/>
+          <p:cNvSpPr>
+            <a:spLocks noGrp="1"/>
+          </p:cNvSpPr>
+          <p:nvPr>
+            <p:ph type="sldImg" idx="2"/>
+          </p:nvPr>
+        </p:nvSpPr>
+        <p:spPr/>
+      </p:sp>
+      <p:sp>
+        <p:nvSpPr>
+          <p:cNvPr id="3" name="Notes Placeholder 2"/>
+          <p:cNvSpPr>
+            <a:spLocks noGrp="1"/>
+          </p:cNvSpPr>
+          <p:nvPr>
+            <p:ph type="body" idx="3" sz="quarter"/>
+          </p:nvPr>
+        </p:nvSpPr>
+        <p:spPr/>
+        <p:txBody>
+          <a:bodyPr/>
+          <a:lstStyle/>
+          <a:p>
+            <a:r>
               <a:t>În concluzie, proiectul demonstrează atât utilitatea practică a unei interfețe în limbaj natural, cât și necesitatea unei evaluări riguroase. Configurația agentică este fezabilă, însă nu este automat superioară. Modelele locale sunt deja competitive. Direcția cea mai valoroasă este interacțiunea: sistemul trebuie să poată clarifica intenția înainte de a produce un răspuns convingător, dar greșit.</a:t>
             </a:r>
           </a:p>
@@ -1144,7 +1286,7 @@
           <a:lstStyle/>
           <a:p>
             <a:r>
-              <a:t>Am comparat trei configurații. A primește schema completă și răspunde o singură dată. B nu primește schema, ci explorează baza prin unelte MCP. C este identică procedural cu A, dar rulează un model local. Această separare face rezultatele interpretabile.</a:t>
+              <a:t>Până în acest punct am descris o arhitectură care funcționează. Nu am arătat însă că este arhitectura potrivită. Partea a doua a lucrării tratează fiecare decizie ca pe o ipoteză de verificat: modul de generare a SQL-ului, costul fiecărei variante, datele pe care măsurarea rămâne credibilă și comportamentul în fața întrebărilor ambigue.</a:t>
             </a:r>
           </a:p>
         </p:txBody>
@@ -1214,7 +1356,7 @@
           <a:lstStyle/>
           <a:p>
             <a:r>
-              <a:t>Două interogări diferite textual pot fi ambele corecte. De aceea, interogarea prezisă și cea de referință sunt executate, apoi sunt comparate seturile de rezultate. Cadrul păstrează separat erorile modelului și erorile de referință și verifică amprenta setului de întrebări.</a:t>
+              <a:t>Am comparat trei configurații. A primește schema completă și răspunde o singură dată. B nu primește schema, ci explorează baza prin unelte MCP. C este identică procedural cu A, dar rulează un model local. Această separare face rezultatele interpretabile.</a:t>
             </a:r>
           </a:p>
         </p:txBody>
@@ -1284,7 +1426,7 @@
           <a:lstStyle/>
           <a:p>
             <a:r>
-              <a:t>Rezultatul central este contraintuitiv. Trei modele cu apel unic ating 100%. Cel mai bun agent obține 95,5%, iar cel mai bun model local 93,2%. Accesul la unelte este fezabil, dar nu a depășit reperul simplu cu schema în prompt.</a:t>
+              <a:t>Două interogări diferite textual pot fi ambele corecte. De aceea, interogarea prezisă și cea de referință sunt executate, apoi sunt comparate seturile de rezultate. Cadrul păstrează separat erorile modelului și erorile de referință și verifică amprenta setului de întrebări.</a:t>
             </a:r>
           </a:p>
         </p:txBody>
@@ -1354,7 +1496,7 @@
           <a:lstStyle/>
           <a:p>
             <a:r>
-              <a:t>Diferența de cost este mai mare decât diferența de acuratețe. Configurațiile agentice măsurate sunt între 9 și 63 de ori mai scumpe pentru o sută de întrebări. Cauza este bucla agentului: fiecare apel retrimite contextul acumulat.</a:t>
+              <a:t>Cele trei seturi nu sunt comparabile ca dificultate, iar diferența nu vine din volum. Primele două conțin întrebări pe care le-am formulat eu, peste scheme pe care le cunoșteam bine: dificultatea este sintactică, adică SQL complex, serii de zile consecutive sau medii ponderate. Pe acestea modelele bune ajung la sută la sută. BIRD schimbă natura dificultății: întrebarea este formulată de altcineva, uneori agramatical, coloanele au nume opace precum A11, iar semantica lor este livrată într-un dicționar ținut separat de schemă. Eșecurile nu sunt de construcție a interogării, ci de ancorare în date. Numărul mare de întrebări nu coboară scorul, ci restabilește puterea de discriminare: pe patruzeci și patru de întrebări, trei modele erau egale la sută la sută.</a:t>
             </a:r>
           </a:p>
         </p:txBody>
@@ -5218,7 +5360,7 @@
                 </a:solidFill>
                 <a:latin typeface="Aptos"/>
               </a:rPr>
-              <a:t>INFRASTRUCTURĂ LOCALĂ</a:t>
+              <a:t>REZULTATUL PRINCIPAL</a:t>
             </a:r>
           </a:p>
         </p:txBody>
@@ -5253,14 +5395,14 @@
                 </a:solidFill>
                 <a:latin typeface="Aptos"/>
               </a:rPr>
-              <a:t>Un model local poate fi competitiv</a:t>
+              <a:t>Mai multă autonomie nu a însemnat mai multă acuratețe</a:t>
             </a:r>
           </a:p>
         </p:txBody>
       </p:sp>
       <p:pic>
         <p:nvPicPr>
-          <p:cNvPr id="4" name="Picture 3" descr="fig_local.png"/>
+          <p:cNvPr id="4" name="Picture 3" descr="fig_accuracy_arms.png"/>
           <p:cNvPicPr>
             <a:picLocks noChangeAspect="1"/>
           </p:cNvPicPr>
@@ -5274,8 +5416,8 @@
         </p:blipFill>
         <p:spPr>
           <a:xfrm>
-            <a:off x="566928" y="1449029"/>
-            <a:ext cx="8001000" cy="4645741"/>
+            <a:off x="582841" y="1517904"/>
+            <a:ext cx="7621700" cy="4754880"/>
           </a:xfrm>
           <a:prstGeom prst="rect">
             <a:avLst/>
@@ -5290,20 +5432,20 @@
         </p:nvSpPr>
         <p:spPr>
           <a:xfrm>
-            <a:off x="8796528" y="1353312"/>
-            <a:ext cx="2651760" cy="4480560"/>
+            <a:off x="8485632" y="1517904"/>
+            <a:ext cx="3044952" cy="4480560"/>
           </a:xfrm>
           <a:prstGeom prst="roundRect">
             <a:avLst>
-              <a:gd name="adj" fmla="val 4827"/>
+              <a:gd name="adj" fmla="val 4204"/>
             </a:avLst>
           </a:prstGeom>
           <a:solidFill>
-            <a:srgbClr val="E8F5EE"/>
+            <a:srgbClr val="102A43"/>
           </a:solidFill>
           <a:ln w="12700">
             <a:solidFill>
-              <a:srgbClr val="E8F5EE"/>
+              <a:srgbClr val="102A43"/>
             </a:solidFill>
           </a:ln>
         </p:spPr>
@@ -5337,63 +5479,168 @@
         </p:nvSpPr>
         <p:spPr>
           <a:xfrm>
-            <a:off x="9070848" y="1755648"/>
-            <a:ext cx="2084831" cy="457200"/>
-          </a:xfrm>
-          <a:prstGeom prst="rect">
-            <a:avLst/>
-          </a:prstGeom>
-          <a:noFill/>
-        </p:spPr>
-        <p:txBody>
-          <a:bodyPr wrap="square" lIns="27432" rIns="27432" tIns="27432" bIns="27432" anchor="t">
-            <a:spAutoFit/>
-          </a:bodyPr>
-          <a:lstStyle/>
-          <a:p>
-            <a:pPr algn="ctr"/>
-            <a:r>
-              <a:rPr sz="2500" b="1" i="0">
+            <a:off x="8814816" y="1847088"/>
+            <a:ext cx="2331720" cy="502920"/>
+          </a:xfrm>
+          <a:prstGeom prst="rect">
+            <a:avLst/>
+          </a:prstGeom>
+          <a:noFill/>
+        </p:spPr>
+        <p:txBody>
+          <a:bodyPr wrap="square" lIns="27432" rIns="27432" tIns="27432" bIns="27432" anchor="t">
+            <a:spAutoFit/>
+          </a:bodyPr>
+          <a:lstStyle/>
+          <a:p>
+            <a:pPr algn="l"/>
+            <a:r>
+              <a:rPr sz="2600" b="1" i="0">
+                <a:solidFill>
+                  <a:srgbClr val="1F6FB4"/>
+                </a:solidFill>
+                <a:latin typeface="Aptos"/>
+              </a:rPr>
+              <a:t>100%</a:t>
+            </a:r>
+          </a:p>
+        </p:txBody>
+      </p:sp>
+      <p:sp>
+        <p:nvSpPr>
+          <p:cNvPr id="7" name="TextBox 6"/>
+          <p:cNvSpPr txBox="1"/>
+          <p:nvPr/>
+        </p:nvSpPr>
+        <p:spPr>
+          <a:xfrm>
+            <a:off x="8833104" y="2350008"/>
+            <a:ext cx="2231136" cy="228600"/>
+          </a:xfrm>
+          <a:prstGeom prst="rect">
+            <a:avLst/>
+          </a:prstGeom>
+          <a:noFill/>
+        </p:spPr>
+        <p:txBody>
+          <a:bodyPr wrap="square" lIns="27432" rIns="27432" tIns="27432" bIns="27432" anchor="t">
+            <a:spAutoFit/>
+          </a:bodyPr>
+          <a:lstStyle/>
+          <a:p>
+            <a:pPr algn="l"/>
+            <a:r>
+              <a:rPr sz="1150" b="0" i="0">
+                <a:solidFill>
+                  <a:srgbClr val="C8D7E4"/>
+                </a:solidFill>
+                <a:latin typeface="Aptos"/>
+              </a:rPr>
+              <a:t>cel mai bun apel unic</a:t>
+            </a:r>
+          </a:p>
+        </p:txBody>
+      </p:sp>
+      <p:sp>
+        <p:nvSpPr>
+          <p:cNvPr id="8" name="TextBox 7"/>
+          <p:cNvSpPr txBox="1"/>
+          <p:nvPr/>
+        </p:nvSpPr>
+        <p:spPr>
+          <a:xfrm>
+            <a:off x="8814816" y="2990088"/>
+            <a:ext cx="2331720" cy="502920"/>
+          </a:xfrm>
+          <a:prstGeom prst="rect">
+            <a:avLst/>
+          </a:prstGeom>
+          <a:noFill/>
+        </p:spPr>
+        <p:txBody>
+          <a:bodyPr wrap="square" lIns="27432" rIns="27432" tIns="27432" bIns="27432" anchor="t">
+            <a:spAutoFit/>
+          </a:bodyPr>
+          <a:lstStyle/>
+          <a:p>
+            <a:pPr algn="l"/>
+            <a:r>
+              <a:rPr sz="2600" b="1" i="0">
+                <a:solidFill>
+                  <a:srgbClr val="C1483A"/>
+                </a:solidFill>
+                <a:latin typeface="Aptos"/>
+              </a:rPr>
+              <a:t>95,5%</a:t>
+            </a:r>
+          </a:p>
+        </p:txBody>
+      </p:sp>
+      <p:sp>
+        <p:nvSpPr>
+          <p:cNvPr id="9" name="TextBox 8"/>
+          <p:cNvSpPr txBox="1"/>
+          <p:nvPr/>
+        </p:nvSpPr>
+        <p:spPr>
+          <a:xfrm>
+            <a:off x="8833104" y="3493008"/>
+            <a:ext cx="2231136" cy="228600"/>
+          </a:xfrm>
+          <a:prstGeom prst="rect">
+            <a:avLst/>
+          </a:prstGeom>
+          <a:noFill/>
+        </p:spPr>
+        <p:txBody>
+          <a:bodyPr wrap="square" lIns="27432" rIns="27432" tIns="27432" bIns="27432" anchor="t">
+            <a:spAutoFit/>
+          </a:bodyPr>
+          <a:lstStyle/>
+          <a:p>
+            <a:pPr algn="l"/>
+            <a:r>
+              <a:rPr sz="1150" b="0" i="0">
+                <a:solidFill>
+                  <a:srgbClr val="C8D7E4"/>
+                </a:solidFill>
+                <a:latin typeface="Aptos"/>
+              </a:rPr>
+              <a:t>cel mai bun agent</a:t>
+            </a:r>
+          </a:p>
+        </p:txBody>
+      </p:sp>
+      <p:sp>
+        <p:nvSpPr>
+          <p:cNvPr id="10" name="TextBox 9"/>
+          <p:cNvSpPr txBox="1"/>
+          <p:nvPr/>
+        </p:nvSpPr>
+        <p:spPr>
+          <a:xfrm>
+            <a:off x="8814816" y="4133087"/>
+            <a:ext cx="2331720" cy="502920"/>
+          </a:xfrm>
+          <a:prstGeom prst="rect">
+            <a:avLst/>
+          </a:prstGeom>
+          <a:noFill/>
+        </p:spPr>
+        <p:txBody>
+          <a:bodyPr wrap="square" lIns="27432" rIns="27432" tIns="27432" bIns="27432" anchor="t">
+            <a:spAutoFit/>
+          </a:bodyPr>
+          <a:lstStyle/>
+          <a:p>
+            <a:pPr algn="l"/>
+            <a:r>
+              <a:rPr sz="2600" b="1" i="0">
                 <a:solidFill>
                   <a:srgbClr val="2E8B57"/>
                 </a:solidFill>
                 <a:latin typeface="Aptos"/>
               </a:rPr>
-              <a:t>35B MoE</a:t>
-            </a:r>
-          </a:p>
-        </p:txBody>
-      </p:sp>
-      <p:sp>
-        <p:nvSpPr>
-          <p:cNvPr id="7" name="TextBox 6"/>
-          <p:cNvSpPr txBox="1"/>
-          <p:nvPr/>
-        </p:nvSpPr>
-        <p:spPr>
-          <a:xfrm>
-            <a:off x="9070848" y="2340864"/>
-            <a:ext cx="2084831" cy="457200"/>
-          </a:xfrm>
-          <a:prstGeom prst="rect">
-            <a:avLst/>
-          </a:prstGeom>
-          <a:noFill/>
-        </p:spPr>
-        <p:txBody>
-          <a:bodyPr wrap="square" lIns="27432" rIns="27432" tIns="27432" bIns="27432" anchor="t">
-            <a:spAutoFit/>
-          </a:bodyPr>
-          <a:lstStyle/>
-          <a:p>
-            <a:pPr algn="ctr"/>
-            <a:r>
-              <a:rPr sz="2500" b="1" i="0">
-                <a:solidFill>
-                  <a:srgbClr val="102A43"/>
-                </a:solidFill>
-                <a:latin typeface="Aptos"/>
-              </a:rPr>
               <a:t>93,2%</a:t>
             </a:r>
           </a:p>
@@ -5401,49 +5648,14 @@
       </p:sp>
       <p:sp>
         <p:nvSpPr>
-          <p:cNvPr id="8" name="TextBox 7"/>
-          <p:cNvSpPr txBox="1"/>
-          <p:nvPr/>
-        </p:nvSpPr>
-        <p:spPr>
-          <a:xfrm>
-            <a:off x="9070848" y="2962656"/>
-            <a:ext cx="2084831" cy="292608"/>
-          </a:xfrm>
-          <a:prstGeom prst="rect">
-            <a:avLst/>
-          </a:prstGeom>
-          <a:noFill/>
-        </p:spPr>
-        <p:txBody>
-          <a:bodyPr wrap="square" lIns="27432" rIns="27432" tIns="27432" bIns="27432" anchor="t">
-            <a:spAutoFit/>
-          </a:bodyPr>
-          <a:lstStyle/>
-          <a:p>
-            <a:pPr algn="ctr"/>
-            <a:r>
-              <a:rPr sz="1250" b="1" i="0">
-                <a:solidFill>
-                  <a:srgbClr val="647487"/>
-                </a:solidFill>
-                <a:latin typeface="Aptos"/>
-              </a:rPr>
-              <a:t>RTX 5070 · 12 GiB</a:t>
-            </a:r>
-          </a:p>
-        </p:txBody>
-      </p:sp>
-      <p:sp>
-        <p:nvSpPr>
-          <p:cNvPr id="9" name="TextBox 8"/>
-          <p:cNvSpPr txBox="1"/>
-          <p:nvPr/>
-        </p:nvSpPr>
-        <p:spPr>
-          <a:xfrm>
-            <a:off x="9125712" y="3703320"/>
-            <a:ext cx="228600" cy="228600"/>
+          <p:cNvPr id="11" name="TextBox 10"/>
+          <p:cNvSpPr txBox="1"/>
+          <p:nvPr/>
+        </p:nvSpPr>
+        <p:spPr>
+          <a:xfrm>
+            <a:off x="8833104" y="4636007"/>
+            <a:ext cx="2231136" cy="228600"/>
           </a:xfrm>
           <a:prstGeom prst="rect">
             <a:avLst/>
@@ -5458,118 +5670,48 @@
           <a:p>
             <a:pPr algn="l"/>
             <a:r>
+              <a:rPr sz="1150" b="0" i="0">
+                <a:solidFill>
+                  <a:srgbClr val="C8D7E4"/>
+                </a:solidFill>
+                <a:latin typeface="Aptos"/>
+              </a:rPr>
+              <a:t>cel mai bun model local</a:t>
+            </a:r>
+          </a:p>
+        </p:txBody>
+      </p:sp>
+      <p:sp>
+        <p:nvSpPr>
+          <p:cNvPr id="12" name="TextBox 11"/>
+          <p:cNvSpPr txBox="1"/>
+          <p:nvPr/>
+        </p:nvSpPr>
+        <p:spPr>
+          <a:xfrm>
+            <a:off x="8814816" y="5285232"/>
+            <a:ext cx="2267712" cy="493776"/>
+          </a:xfrm>
+          <a:prstGeom prst="rect">
+            <a:avLst/>
+          </a:prstGeom>
+          <a:noFill/>
+        </p:spPr>
+        <p:txBody>
+          <a:bodyPr wrap="square" lIns="27432" rIns="27432" tIns="27432" bIns="27432" anchor="t">
+            <a:spAutoFit/>
+          </a:bodyPr>
+          <a:lstStyle/>
+          <a:p>
+            <a:pPr algn="l"/>
+            <a:r>
               <a:rPr sz="1300" b="1" i="0">
                 <a:solidFill>
-                  <a:srgbClr val="2E8B57"/>
-                </a:solidFill>
-                <a:latin typeface="Aptos"/>
-              </a:rPr>
-              <a:t>✓</a:t>
-            </a:r>
-          </a:p>
-        </p:txBody>
-      </p:sp>
-      <p:sp>
-        <p:nvSpPr>
-          <p:cNvPr id="10" name="TextBox 9"/>
-          <p:cNvSpPr txBox="1"/>
-          <p:nvPr/>
-        </p:nvSpPr>
-        <p:spPr>
-          <a:xfrm>
-            <a:off x="9436608" y="3675887"/>
-            <a:ext cx="1554480" cy="310896"/>
-          </a:xfrm>
-          <a:prstGeom prst="rect">
-            <a:avLst/>
-          </a:prstGeom>
-          <a:noFill/>
-        </p:spPr>
-        <p:txBody>
-          <a:bodyPr wrap="square" lIns="27432" rIns="27432" tIns="27432" bIns="27432" anchor="t">
-            <a:spAutoFit/>
-          </a:bodyPr>
-          <a:lstStyle/>
-          <a:p>
-            <a:pPr algn="l"/>
-            <a:r>
-              <a:rPr sz="1150" b="1" i="0">
-                <a:solidFill>
-                  <a:srgbClr val="17212B"/>
-                </a:solidFill>
-                <a:latin typeface="Aptos"/>
-              </a:rPr>
-              <a:t>Datele rămân local</a:t>
-            </a:r>
-          </a:p>
-        </p:txBody>
-      </p:sp>
-      <p:sp>
-        <p:nvSpPr>
-          <p:cNvPr id="11" name="TextBox 10"/>
-          <p:cNvSpPr txBox="1"/>
-          <p:nvPr/>
-        </p:nvSpPr>
-        <p:spPr>
-          <a:xfrm>
-            <a:off x="9125712" y="4206240"/>
-            <a:ext cx="228600" cy="228600"/>
-          </a:xfrm>
-          <a:prstGeom prst="rect">
-            <a:avLst/>
-          </a:prstGeom>
-          <a:noFill/>
-        </p:spPr>
-        <p:txBody>
-          <a:bodyPr wrap="square" lIns="27432" rIns="27432" tIns="27432" bIns="27432" anchor="t">
-            <a:spAutoFit/>
-          </a:bodyPr>
-          <a:lstStyle/>
-          <a:p>
-            <a:pPr algn="l"/>
-            <a:r>
-              <a:rPr sz="1300" b="1" i="0">
-                <a:solidFill>
-                  <a:srgbClr val="2E8B57"/>
-                </a:solidFill>
-                <a:latin typeface="Aptos"/>
-              </a:rPr>
-              <a:t>✓</a:t>
-            </a:r>
-          </a:p>
-        </p:txBody>
-      </p:sp>
-      <p:sp>
-        <p:nvSpPr>
-          <p:cNvPr id="12" name="TextBox 11"/>
-          <p:cNvSpPr txBox="1"/>
-          <p:nvPr/>
-        </p:nvSpPr>
-        <p:spPr>
-          <a:xfrm>
-            <a:off x="9436608" y="4178807"/>
-            <a:ext cx="1554480" cy="310896"/>
-          </a:xfrm>
-          <a:prstGeom prst="rect">
-            <a:avLst/>
-          </a:prstGeom>
-          <a:noFill/>
-        </p:spPr>
-        <p:txBody>
-          <a:bodyPr wrap="square" lIns="27432" rIns="27432" tIns="27432" bIns="27432" anchor="t">
-            <a:spAutoFit/>
-          </a:bodyPr>
-          <a:lstStyle/>
-          <a:p>
-            <a:pPr algn="l"/>
-            <a:r>
-              <a:rPr sz="1150" b="1" i="0">
-                <a:solidFill>
-                  <a:srgbClr val="17212B"/>
-                </a:solidFill>
-                <a:latin typeface="Aptos"/>
-              </a:rPr>
-              <a:t>Fără tarif per token</a:t>
+                  <a:srgbClr val="FFFFFF"/>
+                </a:solidFill>
+                <a:latin typeface="Aptos"/>
+              </a:rPr>
+              <a:t>Toate primele patru poziții folosesc cea mai simplă configurație.</a:t>
             </a:r>
           </a:p>
         </p:txBody>
@@ -5577,76 +5719,6 @@
       <p:sp>
         <p:nvSpPr>
           <p:cNvPr id="13" name="TextBox 12"/>
-          <p:cNvSpPr txBox="1"/>
-          <p:nvPr/>
-        </p:nvSpPr>
-        <p:spPr>
-          <a:xfrm>
-            <a:off x="9125712" y="4709160"/>
-            <a:ext cx="228600" cy="228600"/>
-          </a:xfrm>
-          <a:prstGeom prst="rect">
-            <a:avLst/>
-          </a:prstGeom>
-          <a:noFill/>
-        </p:spPr>
-        <p:txBody>
-          <a:bodyPr wrap="square" lIns="27432" rIns="27432" tIns="27432" bIns="27432" anchor="t">
-            <a:spAutoFit/>
-          </a:bodyPr>
-          <a:lstStyle/>
-          <a:p>
-            <a:pPr algn="l"/>
-            <a:r>
-              <a:rPr sz="1300" b="1" i="0">
-                <a:solidFill>
-                  <a:srgbClr val="2E8B57"/>
-                </a:solidFill>
-                <a:latin typeface="Aptos"/>
-              </a:rPr>
-              <a:t>✓</a:t>
-            </a:r>
-          </a:p>
-        </p:txBody>
-      </p:sp>
-      <p:sp>
-        <p:nvSpPr>
-          <p:cNvPr id="14" name="TextBox 13"/>
-          <p:cNvSpPr txBox="1"/>
-          <p:nvPr/>
-        </p:nvSpPr>
-        <p:spPr>
-          <a:xfrm>
-            <a:off x="9436608" y="4681727"/>
-            <a:ext cx="1554480" cy="310896"/>
-          </a:xfrm>
-          <a:prstGeom prst="rect">
-            <a:avLst/>
-          </a:prstGeom>
-          <a:noFill/>
-        </p:spPr>
-        <p:txBody>
-          <a:bodyPr wrap="square" lIns="27432" rIns="27432" tIns="27432" bIns="27432" anchor="t">
-            <a:spAutoFit/>
-          </a:bodyPr>
-          <a:lstStyle/>
-          <a:p>
-            <a:pPr algn="l"/>
-            <a:r>
-              <a:rPr sz="1150" b="1" i="0">
-                <a:solidFill>
-                  <a:srgbClr val="17212B"/>
-                </a:solidFill>
-                <a:latin typeface="Aptos"/>
-              </a:rPr>
-              <a:t>Model rar: viteză mai bună</a:t>
-            </a:r>
-          </a:p>
-        </p:txBody>
-      </p:sp>
-      <p:sp>
-        <p:nvSpPr>
-          <p:cNvPr id="15" name="TextBox 14"/>
           <p:cNvSpPr txBox="1"/>
           <p:nvPr/>
         </p:nvSpPr>
@@ -5674,14 +5746,14 @@
                 </a:solidFill>
                 <a:latin typeface="Aptos"/>
               </a:rPr>
-              <a:t>Modele locale servite prin llama.cpp</a:t>
-            </a:r>
-          </a:p>
-        </p:txBody>
-      </p:sp>
-      <p:sp>
-        <p:nvSpPr>
-          <p:cNvPr id="16" name="TextBox 15"/>
+              <a:t>Acuratețe de execuție pe car_rental, 44 de întrebări punctate</a:t>
+            </a:r>
+          </a:p>
+        </p:txBody>
+      </p:sp>
+      <p:sp>
+        <p:nvSpPr>
+          <p:cNvPr id="14" name="TextBox 13"/>
           <p:cNvSpPr txBox="1"/>
           <p:nvPr/>
         </p:nvSpPr>
@@ -5770,7 +5842,7 @@
                 </a:solidFill>
                 <a:latin typeface="Aptos"/>
               </a:rPr>
-              <a:t>COMPORTAMENT</a:t>
+              <a:t>COST VS. ACURATEȚE</a:t>
             </a:r>
           </a:p>
         </p:txBody>
@@ -5805,26 +5877,212 @@
                 </a:solidFill>
                 <a:latin typeface="Aptos"/>
               </a:rPr>
-              <a:t>Adevărata limită: întrebările ambigue</a:t>
-            </a:r>
-          </a:p>
-        </p:txBody>
-      </p:sp>
-      <p:sp>
-        <p:nvSpPr>
-          <p:cNvPr id="4" name="Rounded Rectangle 3"/>
+              <a:t>Explorarea agentică are un cost structural</a:t>
+            </a:r>
+          </a:p>
+        </p:txBody>
+      </p:sp>
+      <p:pic>
+        <p:nvPicPr>
+          <p:cNvPr id="4" name="Picture 3" descr="fig_cost_accuracy.png"/>
+          <p:cNvPicPr>
+            <a:picLocks noChangeAspect="1"/>
+          </p:cNvPicPr>
+          <p:nvPr/>
+        </p:nvPicPr>
+        <p:blipFill>
+          <a:blip r:embed="rId2"/>
+          <a:stretch>
+            <a:fillRect/>
+          </a:stretch>
+        </p:blipFill>
+        <p:spPr>
+          <a:xfrm>
+            <a:off x="566928" y="1513388"/>
+            <a:ext cx="8046720" cy="4517023"/>
+          </a:xfrm>
+          <a:prstGeom prst="rect">
+            <a:avLst/>
+          </a:prstGeom>
+        </p:spPr>
+      </p:pic>
+      <p:sp>
+        <p:nvSpPr>
+          <p:cNvPr id="5" name="Rounded Rectangle 4"/>
           <p:cNvSpPr/>
           <p:nvPr/>
         </p:nvSpPr>
         <p:spPr>
           <a:xfrm>
-            <a:off x="658368" y="1335024"/>
-            <a:ext cx="3675887" cy="4526280"/>
+            <a:off x="8814816" y="1399032"/>
+            <a:ext cx="2615184" cy="1938528"/>
           </a:xfrm>
           <a:prstGeom prst="roundRect">
             <a:avLst>
-              <a:gd name="adj" fmla="val 3482"/>
+              <a:gd name="adj" fmla="val 6603"/>
             </a:avLst>
+          </a:prstGeom>
+          <a:solidFill>
+            <a:srgbClr val="FAECE9"/>
+          </a:solidFill>
+          <a:ln w="12700">
+            <a:solidFill>
+              <a:srgbClr val="FAECE9"/>
+            </a:solidFill>
+          </a:ln>
+        </p:spPr>
+        <p:style>
+          <a:lnRef idx="1">
+            <a:schemeClr val="accent1"/>
+          </a:lnRef>
+          <a:fillRef idx="3">
+            <a:schemeClr val="accent1"/>
+          </a:fillRef>
+          <a:effectRef idx="2">
+            <a:schemeClr val="accent1"/>
+          </a:effectRef>
+          <a:fontRef idx="minor">
+            <a:schemeClr val="lt1"/>
+          </a:fontRef>
+        </p:style>
+        <p:txBody>
+          <a:bodyPr rtlCol="0" anchor="ctr"/>
+          <a:lstStyle/>
+          <a:p>
+            <a:pPr algn="ctr"/>
+          </a:p>
+        </p:txBody>
+      </p:sp>
+      <p:sp>
+        <p:nvSpPr>
+          <p:cNvPr id="6" name="TextBox 5"/>
+          <p:cNvSpPr txBox="1"/>
+          <p:nvPr/>
+        </p:nvSpPr>
+        <p:spPr>
+          <a:xfrm>
+            <a:off x="8814816" y="1764792"/>
+            <a:ext cx="2615184" cy="576072"/>
+          </a:xfrm>
+          <a:prstGeom prst="rect">
+            <a:avLst/>
+          </a:prstGeom>
+          <a:noFill/>
+        </p:spPr>
+        <p:txBody>
+          <a:bodyPr wrap="square" lIns="27432" rIns="27432" tIns="27432" bIns="27432" anchor="t">
+            <a:spAutoFit/>
+          </a:bodyPr>
+          <a:lstStyle/>
+          <a:p>
+            <a:pPr algn="ctr"/>
+            <a:r>
+              <a:rPr sz="3100" b="1" i="0">
+                <a:solidFill>
+                  <a:srgbClr val="C1483A"/>
+                </a:solidFill>
+                <a:latin typeface="Aptos"/>
+              </a:rPr>
+              <a:t>9–63×</a:t>
+            </a:r>
+          </a:p>
+        </p:txBody>
+      </p:sp>
+      <p:sp>
+        <p:nvSpPr>
+          <p:cNvPr id="7" name="TextBox 6"/>
+          <p:cNvSpPr txBox="1"/>
+          <p:nvPr/>
+        </p:nvSpPr>
+        <p:spPr>
+          <a:xfrm>
+            <a:off x="9052560" y="2468880"/>
+            <a:ext cx="2139696" cy="329184"/>
+          </a:xfrm>
+          <a:prstGeom prst="rect">
+            <a:avLst/>
+          </a:prstGeom>
+          <a:noFill/>
+        </p:spPr>
+        <p:txBody>
+          <a:bodyPr wrap="square" lIns="27432" rIns="27432" tIns="27432" bIns="27432" anchor="t">
+            <a:spAutoFit/>
+          </a:bodyPr>
+          <a:lstStyle/>
+          <a:p>
+            <a:pPr algn="ctr"/>
+            <a:r>
+              <a:rPr sz="1200" b="1" i="0">
+                <a:solidFill>
+                  <a:srgbClr val="C1483A"/>
+                </a:solidFill>
+                <a:latin typeface="Aptos"/>
+              </a:rPr>
+              <a:t>mai scump / 100 întrebări</a:t>
+            </a:r>
+          </a:p>
+        </p:txBody>
+      </p:sp>
+      <p:sp>
+        <p:nvSpPr>
+          <p:cNvPr id="8" name="Rounded Rectangle 7"/>
+          <p:cNvSpPr/>
+          <p:nvPr/>
+        </p:nvSpPr>
+        <p:spPr>
+          <a:xfrm>
+            <a:off x="8814816" y="3703320"/>
+            <a:ext cx="2615184" cy="1773936"/>
+          </a:xfrm>
+          <a:prstGeom prst="roundRect">
+            <a:avLst>
+              <a:gd name="adj" fmla="val 7216"/>
+            </a:avLst>
+          </a:prstGeom>
+          <a:solidFill>
+            <a:srgbClr val="FFFFFF"/>
+          </a:solidFill>
+          <a:ln w="12700">
+            <a:solidFill>
+              <a:srgbClr val="D6DEE6"/>
+            </a:solidFill>
+          </a:ln>
+        </p:spPr>
+        <p:style>
+          <a:lnRef idx="1">
+            <a:schemeClr val="accent1"/>
+          </a:lnRef>
+          <a:fillRef idx="3">
+            <a:schemeClr val="accent1"/>
+          </a:fillRef>
+          <a:effectRef idx="2">
+            <a:schemeClr val="accent1"/>
+          </a:effectRef>
+          <a:fontRef idx="minor">
+            <a:schemeClr val="lt1"/>
+          </a:fontRef>
+        </p:style>
+        <p:txBody>
+          <a:bodyPr rtlCol="0" anchor="ctr"/>
+          <a:lstStyle/>
+          <a:p>
+            <a:pPr algn="ctr"/>
+          </a:p>
+        </p:txBody>
+      </p:sp>
+      <p:sp>
+        <p:nvSpPr>
+          <p:cNvPr id="9" name="Rectangle 8"/>
+          <p:cNvSpPr/>
+          <p:nvPr/>
+        </p:nvSpPr>
+        <p:spPr>
+          <a:xfrm>
+            <a:off x="8814816" y="3831335"/>
+            <a:ext cx="73152" cy="1517904"/>
+          </a:xfrm>
+          <a:prstGeom prst="rect">
+            <a:avLst/>
           </a:prstGeom>
           <a:solidFill>
             <a:srgbClr val="102A43"/>
@@ -5859,96 +6117,14 @@
       </p:sp>
       <p:sp>
         <p:nvSpPr>
-          <p:cNvPr id="5" name="Rounded Rectangle 4"/>
-          <p:cNvSpPr/>
-          <p:nvPr/>
-        </p:nvSpPr>
-        <p:spPr>
-          <a:xfrm>
-            <a:off x="1024128" y="1719072"/>
-            <a:ext cx="914400" cy="310896"/>
-          </a:xfrm>
-          <a:prstGeom prst="roundRect">
-            <a:avLst>
-              <a:gd name="adj" fmla="val 50000"/>
-            </a:avLst>
-          </a:prstGeom>
-          <a:solidFill>
-            <a:srgbClr val="274A66"/>
-          </a:solidFill>
-          <a:ln w="12700">
-            <a:solidFill>
-              <a:srgbClr val="274A66"/>
-            </a:solidFill>
-          </a:ln>
-        </p:spPr>
-        <p:style>
-          <a:lnRef idx="1">
-            <a:schemeClr val="accent1"/>
-          </a:lnRef>
-          <a:fillRef idx="3">
-            <a:schemeClr val="accent1"/>
-          </a:fillRef>
-          <a:effectRef idx="2">
-            <a:schemeClr val="accent1"/>
-          </a:effectRef>
-          <a:fontRef idx="minor">
-            <a:schemeClr val="lt1"/>
-          </a:fontRef>
-        </p:style>
-        <p:txBody>
-          <a:bodyPr rtlCol="0" anchor="ctr"/>
-          <a:lstStyle/>
-          <a:p>
-            <a:pPr algn="ctr"/>
-          </a:p>
-        </p:txBody>
-      </p:sp>
-      <p:sp>
-        <p:nvSpPr>
-          <p:cNvPr id="6" name="TextBox 5"/>
-          <p:cNvSpPr txBox="1"/>
-          <p:nvPr/>
-        </p:nvSpPr>
-        <p:spPr>
-          <a:xfrm>
-            <a:off x="1024128" y="1728216"/>
-            <a:ext cx="914400" cy="256032"/>
-          </a:xfrm>
-          <a:prstGeom prst="rect">
-            <a:avLst/>
-          </a:prstGeom>
-          <a:noFill/>
-        </p:spPr>
-        <p:txBody>
-          <a:bodyPr wrap="square" lIns="27432" rIns="27432" tIns="27432" bIns="27432" anchor="ctr">
-            <a:spAutoFit/>
-          </a:bodyPr>
-          <a:lstStyle/>
-          <a:p>
-            <a:pPr algn="ctr"/>
-            <a:r>
-              <a:rPr sz="1000" b="1" i="0">
-                <a:solidFill>
-                  <a:srgbClr val="A9D5F5"/>
-                </a:solidFill>
-                <a:latin typeface="Aptos"/>
-              </a:rPr>
-              <a:t>EXEMPLU</a:t>
-            </a:r>
-          </a:p>
-        </p:txBody>
-      </p:sp>
-      <p:sp>
-        <p:nvSpPr>
-          <p:cNvPr id="7" name="TextBox 6"/>
-          <p:cNvSpPr txBox="1"/>
-          <p:nvPr/>
-        </p:nvSpPr>
-        <p:spPr>
-          <a:xfrm>
-            <a:off x="1024128" y="2331720"/>
-            <a:ext cx="2907792" cy="868680"/>
+          <p:cNvPr id="10" name="TextBox 9"/>
+          <p:cNvSpPr txBox="1"/>
+          <p:nvPr/>
+        </p:nvSpPr>
+        <p:spPr>
+          <a:xfrm>
+            <a:off x="9134856" y="3904487"/>
+            <a:ext cx="2148840" cy="548640"/>
           </a:xfrm>
           <a:prstGeom prst="rect">
             <a:avLst/>
@@ -5963,27 +6139,27 @@
           <a:p>
             <a:pPr algn="l"/>
             <a:r>
-              <a:rPr sz="2400" b="1" i="0">
-                <a:solidFill>
-                  <a:srgbClr val="FFFFFF"/>
-                </a:solidFill>
-                <a:latin typeface="Aptos"/>
-              </a:rPr>
-              <a:t>„Care sunt cei mai buni clienți?”</a:t>
-            </a:r>
-          </a:p>
-        </p:txBody>
-      </p:sp>
-      <p:sp>
-        <p:nvSpPr>
-          <p:cNvPr id="8" name="TextBox 7"/>
-          <p:cNvSpPr txBox="1"/>
-          <p:nvPr/>
-        </p:nvSpPr>
-        <p:spPr>
-          <a:xfrm>
-            <a:off x="1024128" y="3474720"/>
-            <a:ext cx="2788920" cy="1170432"/>
+              <a:rPr sz="1800" b="1" i="0">
+                <a:solidFill>
+                  <a:srgbClr val="102A43"/>
+                </a:solidFill>
+                <a:latin typeface="Aptos"/>
+              </a:rPr>
+              <a:t>De ce?</a:t>
+            </a:r>
+          </a:p>
+        </p:txBody>
+      </p:sp>
+      <p:sp>
+        <p:nvSpPr>
+          <p:cNvPr id="11" name="TextBox 10"/>
+          <p:cNvSpPr txBox="1"/>
+          <p:nvPr/>
+        </p:nvSpPr>
+        <p:spPr>
+          <a:xfrm>
+            <a:off x="9134856" y="4507992"/>
+            <a:ext cx="2020824" cy="813815"/>
           </a:xfrm>
           <a:prstGeom prst="rect">
             <a:avLst/>
@@ -5998,29 +6174,27 @@
           <a:p>
             <a:pPr algn="l"/>
             <a:r>
-              <a:rPr sz="1500" b="0" i="0">
-                <a:solidFill>
-                  <a:srgbClr val="C8D7E4"/>
-                </a:solidFill>
-                <a:latin typeface="Aptos"/>
-              </a:rPr>
-              <a:t>după venit?
-după numărul de rezervări?
-după valoarea medie?</a:t>
-            </a:r>
-          </a:p>
-        </p:txBody>
-      </p:sp>
-      <p:sp>
-        <p:nvSpPr>
-          <p:cNvPr id="9" name="TextBox 8"/>
-          <p:cNvSpPr txBox="1"/>
-          <p:nvPr/>
-        </p:nvSpPr>
-        <p:spPr>
-          <a:xfrm>
-            <a:off x="1024128" y="5074920"/>
-            <a:ext cx="2788920" cy="438912"/>
+              <a:rPr sz="1250" b="0" i="0">
+                <a:solidFill>
+                  <a:srgbClr val="647487"/>
+                </a:solidFill>
+                <a:latin typeface="Aptos"/>
+              </a:rPr>
+              <a:t>La fiecare pas, agentul retrimite contextul acumulat și promptul propriu.</a:t>
+            </a:r>
+          </a:p>
+        </p:txBody>
+      </p:sp>
+      <p:sp>
+        <p:nvSpPr>
+          <p:cNvPr id="12" name="TextBox 11"/>
+          <p:cNvSpPr txBox="1"/>
+          <p:nvPr/>
+        </p:nvSpPr>
+        <p:spPr>
+          <a:xfrm>
+            <a:off x="621792" y="6519672"/>
+            <a:ext cx="9875520" cy="164592"/>
           </a:xfrm>
           <a:prstGeom prst="rect">
             <a:avLst/>
@@ -6035,173 +6209,20 @@
           <a:p>
             <a:pPr algn="l"/>
             <a:r>
-              <a:rPr sz="1350" b="1" i="0">
-                <a:solidFill>
-                  <a:srgbClr val="E1A83B"/>
-                </a:solidFill>
-                <a:latin typeface="Aptos"/>
-              </a:rPr>
-              <a:t>Un răspuns sigur începe cu o întrebare.</a:t>
-            </a:r>
-          </a:p>
-        </p:txBody>
-      </p:sp>
-      <p:sp>
-        <p:nvSpPr>
-          <p:cNvPr id="10" name="Rounded Rectangle 9"/>
-          <p:cNvSpPr/>
-          <p:nvPr/>
-        </p:nvSpPr>
-        <p:spPr>
-          <a:xfrm>
-            <a:off x="4617720" y="1408176"/>
-            <a:ext cx="6903720" cy="4206240"/>
-          </a:xfrm>
-          <a:prstGeom prst="roundRect">
-            <a:avLst>
-              <a:gd name="adj" fmla="val 3043"/>
-            </a:avLst>
-          </a:prstGeom>
-          <a:solidFill>
-            <a:srgbClr val="FFFFFF"/>
-          </a:solidFill>
-          <a:ln w="12700">
-            <a:solidFill>
-              <a:srgbClr val="D6DEE6"/>
-            </a:solidFill>
-          </a:ln>
-        </p:spPr>
-        <p:style>
-          <a:lnRef idx="1">
-            <a:schemeClr val="accent1"/>
-          </a:lnRef>
-          <a:fillRef idx="3">
-            <a:schemeClr val="accent1"/>
-          </a:fillRef>
-          <a:effectRef idx="2">
-            <a:schemeClr val="accent1"/>
-          </a:effectRef>
-          <a:fontRef idx="minor">
-            <a:schemeClr val="lt1"/>
-          </a:fontRef>
-        </p:style>
-        <p:txBody>
-          <a:bodyPr rtlCol="0" anchor="ctr"/>
-          <a:lstStyle/>
-          <a:p>
-            <a:pPr algn="ctr"/>
-          </a:p>
-        </p:txBody>
-      </p:sp>
-      <p:pic>
-        <p:nvPicPr>
-          <p:cNvPr id="11" name="Picture 10" descr="fig_ambiguity.png"/>
-          <p:cNvPicPr>
-            <a:picLocks noChangeAspect="1"/>
-          </p:cNvPicPr>
-          <p:nvPr/>
-        </p:nvPicPr>
-        <p:blipFill>
-          <a:blip r:embed="rId2"/>
-          <a:stretch>
-            <a:fillRect/>
-          </a:stretch>
-        </p:blipFill>
-        <p:spPr>
-          <a:xfrm>
-            <a:off x="4745736" y="2017879"/>
-            <a:ext cx="6647688" cy="2986833"/>
-          </a:xfrm>
-          <a:prstGeom prst="rect">
-            <a:avLst/>
-          </a:prstGeom>
-        </p:spPr>
-      </p:pic>
-      <p:sp>
-        <p:nvSpPr>
-          <p:cNvPr id="12" name="Rounded Rectangle 11"/>
-          <p:cNvSpPr/>
-          <p:nvPr/>
-        </p:nvSpPr>
-        <p:spPr>
-          <a:xfrm>
-            <a:off x="4937760" y="5577840"/>
-            <a:ext cx="6272784" cy="621792"/>
-          </a:xfrm>
-          <a:prstGeom prst="roundRect">
-            <a:avLst>
-              <a:gd name="adj" fmla="val 20588"/>
-            </a:avLst>
-          </a:prstGeom>
-          <a:solidFill>
-            <a:srgbClr val="FAECE9"/>
-          </a:solidFill>
-          <a:ln w="12700">
-            <a:solidFill>
-              <a:srgbClr val="FAECE9"/>
-            </a:solidFill>
-          </a:ln>
-        </p:spPr>
-        <p:style>
-          <a:lnRef idx="1">
-            <a:schemeClr val="accent1"/>
-          </a:lnRef>
-          <a:fillRef idx="3">
-            <a:schemeClr val="accent1"/>
-          </a:fillRef>
-          <a:effectRef idx="2">
-            <a:schemeClr val="accent1"/>
-          </a:effectRef>
-          <a:fontRef idx="minor">
-            <a:schemeClr val="lt1"/>
-          </a:fontRef>
-        </p:style>
-        <p:txBody>
-          <a:bodyPr rtlCol="0" anchor="ctr"/>
-          <a:lstStyle/>
-          <a:p>
-            <a:pPr algn="ctr"/>
+              <a:rPr sz="850" b="0" i="0">
+                <a:solidFill>
+                  <a:srgbClr val="647487"/>
+                </a:solidFill>
+                <a:latin typeface="Aptos"/>
+              </a:rPr>
+              <a:t>Costuri măsurate; axa costului este logaritmică</a:t>
+            </a:r>
           </a:p>
         </p:txBody>
       </p:sp>
       <p:sp>
         <p:nvSpPr>
           <p:cNvPr id="13" name="TextBox 12"/>
-          <p:cNvSpPr txBox="1"/>
-          <p:nvPr/>
-        </p:nvSpPr>
-        <p:spPr>
-          <a:xfrm>
-            <a:off x="5138928" y="5577840"/>
-            <a:ext cx="5870448" cy="621792"/>
-          </a:xfrm>
-          <a:prstGeom prst="rect">
-            <a:avLst/>
-          </a:prstGeom>
-          <a:noFill/>
-        </p:spPr>
-        <p:txBody>
-          <a:bodyPr wrap="square" lIns="27432" rIns="27432" tIns="27432" bIns="27432" anchor="ctr">
-            <a:spAutoFit/>
-          </a:bodyPr>
-          <a:lstStyle/>
-          <a:p>
-            <a:pPr algn="ctr"/>
-            <a:r>
-              <a:rPr sz="1300" b="1" i="0">
-                <a:solidFill>
-                  <a:srgbClr val="C1483A"/>
-                </a:solidFill>
-                <a:latin typeface="Aptos"/>
-              </a:rPr>
-              <a:t>Apelurile unice au preferat să ghicească; agenții au cerut mai des clarificări.</a:t>
-            </a:r>
-          </a:p>
-        </p:txBody>
-      </p:sp>
-      <p:sp>
-        <p:nvSpPr>
-          <p:cNvPr id="14" name="TextBox 13"/>
           <p:cNvSpPr txBox="1"/>
           <p:nvPr/>
         </p:nvSpPr>
@@ -6290,7 +6311,7 @@
                 </a:solidFill>
                 <a:latin typeface="Aptos"/>
               </a:rPr>
-              <a:t>GENERALIZARE</a:t>
+              <a:t>INFRASTRUCTURĂ LOCALĂ</a:t>
             </a:r>
           </a:p>
         </p:txBody>
@@ -6325,96 +6346,14 @@
                 </a:solidFill>
                 <a:latin typeface="Aptos"/>
               </a:rPr>
-              <a:t>Validare externă: BIRD-SQL</a:t>
-            </a:r>
-          </a:p>
-        </p:txBody>
-      </p:sp>
-      <p:sp>
-        <p:nvSpPr>
-          <p:cNvPr id="4" name="TextBox 3"/>
-          <p:cNvSpPr txBox="1"/>
-          <p:nvPr/>
-        </p:nvSpPr>
-        <p:spPr>
-          <a:xfrm>
-            <a:off x="658368" y="1225296"/>
-            <a:ext cx="7772400" cy="310896"/>
-          </a:xfrm>
-          <a:prstGeom prst="rect">
-            <a:avLst/>
-          </a:prstGeom>
-          <a:noFill/>
-        </p:spPr>
-        <p:txBody>
-          <a:bodyPr wrap="square" lIns="27432" rIns="27432" tIns="27432" bIns="27432" anchor="t">
-            <a:spAutoFit/>
-          </a:bodyPr>
-          <a:lstStyle/>
-          <a:p>
-            <a:pPr algn="l"/>
-            <a:r>
-              <a:rPr sz="1500" b="1" i="0">
-                <a:solidFill>
-                  <a:srgbClr val="647487"/>
-                </a:solidFill>
-                <a:latin typeface="Aptos"/>
-              </a:rPr>
-              <a:t>1.534 de întrebări · 11 baze de date · set elaborat independent</a:t>
-            </a:r>
-          </a:p>
-        </p:txBody>
-      </p:sp>
-      <p:sp>
-        <p:nvSpPr>
-          <p:cNvPr id="5" name="Rounded Rectangle 4"/>
-          <p:cNvSpPr/>
-          <p:nvPr/>
-        </p:nvSpPr>
-        <p:spPr>
-          <a:xfrm>
-            <a:off x="621792" y="1627632"/>
-            <a:ext cx="7059168" cy="4370832"/>
-          </a:xfrm>
-          <a:prstGeom prst="roundRect">
-            <a:avLst>
-              <a:gd name="adj" fmla="val 2928"/>
-            </a:avLst>
-          </a:prstGeom>
-          <a:solidFill>
-            <a:srgbClr val="FFFFFF"/>
-          </a:solidFill>
-          <a:ln w="12700">
-            <a:solidFill>
-              <a:srgbClr val="D6DEE6"/>
-            </a:solidFill>
-          </a:ln>
-        </p:spPr>
-        <p:style>
-          <a:lnRef idx="1">
-            <a:schemeClr val="accent1"/>
-          </a:lnRef>
-          <a:fillRef idx="3">
-            <a:schemeClr val="accent1"/>
-          </a:fillRef>
-          <a:effectRef idx="2">
-            <a:schemeClr val="accent1"/>
-          </a:effectRef>
-          <a:fontRef idx="minor">
-            <a:schemeClr val="lt1"/>
-          </a:fontRef>
-        </p:style>
-        <p:txBody>
-          <a:bodyPr rtlCol="0" anchor="ctr"/>
-          <a:lstStyle/>
-          <a:p>
-            <a:pPr algn="ctr"/>
+              <a:t>Un model local poate fi competitiv</a:t>
+            </a:r>
           </a:p>
         </p:txBody>
       </p:sp>
       <p:pic>
         <p:nvPicPr>
-          <p:cNvPr id="6" name="Picture 5" descr="fig_saturation.png"/>
+          <p:cNvPr id="4" name="Picture 3" descr="fig_local.png"/>
           <p:cNvPicPr>
             <a:picLocks noChangeAspect="1"/>
           </p:cNvPicPr>
@@ -6428,8 +6367,8 @@
         </p:blipFill>
         <p:spPr>
           <a:xfrm>
-            <a:off x="749808" y="2101829"/>
-            <a:ext cx="6803136" cy="3422436"/>
+            <a:off x="566928" y="1449029"/>
+            <a:ext cx="8001000" cy="4645741"/>
           </a:xfrm>
           <a:prstGeom prst="rect">
             <a:avLst/>
@@ -6438,26 +6377,26 @@
       </p:pic>
       <p:sp>
         <p:nvSpPr>
-          <p:cNvPr id="7" name="Rounded Rectangle 6"/>
+          <p:cNvPr id="5" name="Rounded Rectangle 4"/>
           <p:cNvSpPr/>
           <p:nvPr/>
         </p:nvSpPr>
         <p:spPr>
           <a:xfrm>
-            <a:off x="7973568" y="1627632"/>
-            <a:ext cx="3520440" cy="4370832"/>
+            <a:off x="8796528" y="1353312"/>
+            <a:ext cx="2651760" cy="4480560"/>
           </a:xfrm>
           <a:prstGeom prst="roundRect">
             <a:avLst>
-              <a:gd name="adj" fmla="val 3636"/>
+              <a:gd name="adj" fmla="val 4827"/>
             </a:avLst>
           </a:prstGeom>
           <a:solidFill>
-            <a:srgbClr val="FFFFFF"/>
+            <a:srgbClr val="E8F5EE"/>
           </a:solidFill>
           <a:ln w="12700">
             <a:solidFill>
-              <a:srgbClr val="D6DEE6"/>
+              <a:srgbClr val="E8F5EE"/>
             </a:solidFill>
           </a:ln>
         </p:spPr>
@@ -6485,14 +6424,119 @@
       </p:sp>
       <p:sp>
         <p:nvSpPr>
+          <p:cNvPr id="6" name="TextBox 5"/>
+          <p:cNvSpPr txBox="1"/>
+          <p:nvPr/>
+        </p:nvSpPr>
+        <p:spPr>
+          <a:xfrm>
+            <a:off x="9070848" y="1755648"/>
+            <a:ext cx="2084831" cy="457200"/>
+          </a:xfrm>
+          <a:prstGeom prst="rect">
+            <a:avLst/>
+          </a:prstGeom>
+          <a:noFill/>
+        </p:spPr>
+        <p:txBody>
+          <a:bodyPr wrap="square" lIns="27432" rIns="27432" tIns="27432" bIns="27432" anchor="t">
+            <a:spAutoFit/>
+          </a:bodyPr>
+          <a:lstStyle/>
+          <a:p>
+            <a:pPr algn="ctr"/>
+            <a:r>
+              <a:rPr sz="2500" b="1" i="0">
+                <a:solidFill>
+                  <a:srgbClr val="2E8B57"/>
+                </a:solidFill>
+                <a:latin typeface="Aptos"/>
+              </a:rPr>
+              <a:t>35B MoE</a:t>
+            </a:r>
+          </a:p>
+        </p:txBody>
+      </p:sp>
+      <p:sp>
+        <p:nvSpPr>
+          <p:cNvPr id="7" name="TextBox 6"/>
+          <p:cNvSpPr txBox="1"/>
+          <p:nvPr/>
+        </p:nvSpPr>
+        <p:spPr>
+          <a:xfrm>
+            <a:off x="9070848" y="2340864"/>
+            <a:ext cx="2084831" cy="457200"/>
+          </a:xfrm>
+          <a:prstGeom prst="rect">
+            <a:avLst/>
+          </a:prstGeom>
+          <a:noFill/>
+        </p:spPr>
+        <p:txBody>
+          <a:bodyPr wrap="square" lIns="27432" rIns="27432" tIns="27432" bIns="27432" anchor="t">
+            <a:spAutoFit/>
+          </a:bodyPr>
+          <a:lstStyle/>
+          <a:p>
+            <a:pPr algn="ctr"/>
+            <a:r>
+              <a:rPr sz="2500" b="1" i="0">
+                <a:solidFill>
+                  <a:srgbClr val="102A43"/>
+                </a:solidFill>
+                <a:latin typeface="Aptos"/>
+              </a:rPr>
+              <a:t>93,2%</a:t>
+            </a:r>
+          </a:p>
+        </p:txBody>
+      </p:sp>
+      <p:sp>
+        <p:nvSpPr>
           <p:cNvPr id="8" name="TextBox 7"/>
           <p:cNvSpPr txBox="1"/>
           <p:nvPr/>
         </p:nvSpPr>
         <p:spPr>
           <a:xfrm>
-            <a:off x="8321040" y="1975104"/>
-            <a:ext cx="2816352" cy="384048"/>
+            <a:off x="9070848" y="2962656"/>
+            <a:ext cx="2084831" cy="292608"/>
+          </a:xfrm>
+          <a:prstGeom prst="rect">
+            <a:avLst/>
+          </a:prstGeom>
+          <a:noFill/>
+        </p:spPr>
+        <p:txBody>
+          <a:bodyPr wrap="square" lIns="27432" rIns="27432" tIns="27432" bIns="27432" anchor="t">
+            <a:spAutoFit/>
+          </a:bodyPr>
+          <a:lstStyle/>
+          <a:p>
+            <a:pPr algn="ctr"/>
+            <a:r>
+              <a:rPr sz="1250" b="1" i="0">
+                <a:solidFill>
+                  <a:srgbClr val="647487"/>
+                </a:solidFill>
+                <a:latin typeface="Aptos"/>
+              </a:rPr>
+              <a:t>RTX 5070 · 12 GiB</a:t>
+            </a:r>
+          </a:p>
+        </p:txBody>
+      </p:sp>
+      <p:sp>
+        <p:nvSpPr>
+          <p:cNvPr id="9" name="TextBox 8"/>
+          <p:cNvSpPr txBox="1"/>
+          <p:nvPr/>
+        </p:nvSpPr>
+        <p:spPr>
+          <a:xfrm>
+            <a:off x="9125712" y="3703320"/>
+            <a:ext cx="228600" cy="228600"/>
           </a:xfrm>
           <a:prstGeom prst="rect">
             <a:avLst/>
@@ -6507,59 +6551,14 @@
           <a:p>
             <a:pPr algn="l"/>
             <a:r>
-              <a:rPr sz="1900" b="1" i="0">
-                <a:solidFill>
-                  <a:srgbClr val="102A43"/>
-                </a:solidFill>
-                <a:latin typeface="Aptos"/>
-              </a:rPr>
-              <a:t>Ce confirmă?</a:t>
-            </a:r>
-          </a:p>
-        </p:txBody>
-      </p:sp>
-      <p:sp>
-        <p:nvSpPr>
-          <p:cNvPr id="9" name="Oval 8"/>
-          <p:cNvSpPr/>
-          <p:nvPr/>
-        </p:nvSpPr>
-        <p:spPr>
-          <a:xfrm>
-            <a:off x="8321040" y="2633472"/>
-            <a:ext cx="182880" cy="182880"/>
-          </a:xfrm>
-          <a:prstGeom prst="ellipse">
-            <a:avLst/>
-          </a:prstGeom>
-          <a:solidFill>
-            <a:srgbClr val="1F6FB4"/>
-          </a:solidFill>
-          <a:ln w="12700">
-            <a:solidFill>
-              <a:srgbClr val="1F6FB4"/>
-            </a:solidFill>
-          </a:ln>
-        </p:spPr>
-        <p:style>
-          <a:lnRef idx="1">
-            <a:schemeClr val="accent1"/>
-          </a:lnRef>
-          <a:fillRef idx="3">
-            <a:schemeClr val="accent1"/>
-          </a:fillRef>
-          <a:effectRef idx="2">
-            <a:schemeClr val="accent1"/>
-          </a:effectRef>
-          <a:fontRef idx="minor">
-            <a:schemeClr val="lt1"/>
-          </a:fontRef>
-        </p:style>
-        <p:txBody>
-          <a:bodyPr rtlCol="0" anchor="ctr"/>
-          <a:lstStyle/>
-          <a:p>
-            <a:pPr algn="ctr"/>
+              <a:rPr sz="1300" b="1" i="0">
+                <a:solidFill>
+                  <a:srgbClr val="2E8B57"/>
+                </a:solidFill>
+                <a:latin typeface="Aptos"/>
+              </a:rPr>
+              <a:t>✓</a:t>
+            </a:r>
           </a:p>
         </p:txBody>
       </p:sp>
@@ -6571,8 +6570,8 @@
         </p:nvSpPr>
         <p:spPr>
           <a:xfrm>
-            <a:off x="8650224" y="2578608"/>
-            <a:ext cx="2359152" cy="246888"/>
+            <a:off x="9436608" y="3675887"/>
+            <a:ext cx="1554480" cy="310896"/>
           </a:xfrm>
           <a:prstGeom prst="rect">
             <a:avLst/>
@@ -6587,13 +6586,13 @@
           <a:p>
             <a:pPr algn="l"/>
             <a:r>
-              <a:rPr sz="1250" b="1" i="0">
-                <a:solidFill>
-                  <a:srgbClr val="102A43"/>
-                </a:solidFill>
-                <a:latin typeface="Aptos"/>
-              </a:rPr>
-              <a:t>Seturile proprii se saturează</a:t>
+              <a:rPr sz="1150" b="1" i="0">
+                <a:solidFill>
+                  <a:srgbClr val="17212B"/>
+                </a:solidFill>
+                <a:latin typeface="Aptos"/>
+              </a:rPr>
+              <a:t>Datele rămân local</a:t>
             </a:r>
           </a:p>
         </p:txBody>
@@ -6606,8 +6605,8 @@
         </p:nvSpPr>
         <p:spPr>
           <a:xfrm>
-            <a:off x="8650224" y="2889504"/>
-            <a:ext cx="2359152" cy="420624"/>
+            <a:off x="9125712" y="4206240"/>
+            <a:ext cx="228600" cy="228600"/>
           </a:xfrm>
           <a:prstGeom prst="rect">
             <a:avLst/>
@@ -6622,59 +6621,49 @@
           <a:p>
             <a:pPr algn="l"/>
             <a:r>
-              <a:rPr sz="1050" b="0" i="0">
-                <a:solidFill>
-                  <a:srgbClr val="647487"/>
-                </a:solidFill>
-                <a:latin typeface="Aptos"/>
-              </a:rPr>
-              <a:t>Modelele recente ajung la 100%.</a:t>
-            </a:r>
-          </a:p>
-        </p:txBody>
-      </p:sp>
-      <p:sp>
-        <p:nvSpPr>
-          <p:cNvPr id="12" name="Oval 11"/>
-          <p:cNvSpPr/>
-          <p:nvPr/>
-        </p:nvSpPr>
-        <p:spPr>
-          <a:xfrm>
-            <a:off x="8321040" y="3566160"/>
-            <a:ext cx="182880" cy="182880"/>
-          </a:xfrm>
-          <a:prstGeom prst="ellipse">
-            <a:avLst/>
-          </a:prstGeom>
-          <a:solidFill>
-            <a:srgbClr val="C1483A"/>
-          </a:solidFill>
-          <a:ln w="12700">
-            <a:solidFill>
-              <a:srgbClr val="C1483A"/>
-            </a:solidFill>
-          </a:ln>
-        </p:spPr>
-        <p:style>
-          <a:lnRef idx="1">
-            <a:schemeClr val="accent1"/>
-          </a:lnRef>
-          <a:fillRef idx="3">
-            <a:schemeClr val="accent1"/>
-          </a:fillRef>
-          <a:effectRef idx="2">
-            <a:schemeClr val="accent1"/>
-          </a:effectRef>
-          <a:fontRef idx="minor">
-            <a:schemeClr val="lt1"/>
-          </a:fontRef>
-        </p:style>
-        <p:txBody>
-          <a:bodyPr rtlCol="0" anchor="ctr"/>
-          <a:lstStyle/>
-          <a:p>
-            <a:pPr algn="ctr"/>
+              <a:rPr sz="1300" b="1" i="0">
+                <a:solidFill>
+                  <a:srgbClr val="2E8B57"/>
+                </a:solidFill>
+                <a:latin typeface="Aptos"/>
+              </a:rPr>
+              <a:t>✓</a:t>
+            </a:r>
+          </a:p>
+        </p:txBody>
+      </p:sp>
+      <p:sp>
+        <p:nvSpPr>
+          <p:cNvPr id="12" name="TextBox 11"/>
+          <p:cNvSpPr txBox="1"/>
+          <p:nvPr/>
+        </p:nvSpPr>
+        <p:spPr>
+          <a:xfrm>
+            <a:off x="9436608" y="4178807"/>
+            <a:ext cx="1554480" cy="310896"/>
+          </a:xfrm>
+          <a:prstGeom prst="rect">
+            <a:avLst/>
+          </a:prstGeom>
+          <a:noFill/>
+        </p:spPr>
+        <p:txBody>
+          <a:bodyPr wrap="square" lIns="27432" rIns="27432" tIns="27432" bIns="27432" anchor="t">
+            <a:spAutoFit/>
+          </a:bodyPr>
+          <a:lstStyle/>
+          <a:p>
+            <a:pPr algn="l"/>
+            <a:r>
+              <a:rPr sz="1150" b="1" i="0">
+                <a:solidFill>
+                  <a:srgbClr val="17212B"/>
+                </a:solidFill>
+                <a:latin typeface="Aptos"/>
+              </a:rPr>
+              <a:t>Fără tarif per token</a:t>
+            </a:r>
           </a:p>
         </p:txBody>
       </p:sp>
@@ -6686,8 +6675,8 @@
         </p:nvSpPr>
         <p:spPr>
           <a:xfrm>
-            <a:off x="8650224" y="3511296"/>
-            <a:ext cx="2359152" cy="246888"/>
+            <a:off x="9125712" y="4709160"/>
+            <a:ext cx="228600" cy="228600"/>
           </a:xfrm>
           <a:prstGeom prst="rect">
             <a:avLst/>
@@ -6702,13 +6691,13 @@
           <a:p>
             <a:pPr algn="l"/>
             <a:r>
-              <a:rPr sz="1250" b="1" i="0">
-                <a:solidFill>
-                  <a:srgbClr val="102A43"/>
-                </a:solidFill>
-                <a:latin typeface="Aptos"/>
-              </a:rPr>
-              <a:t>BIRD rămâne discriminatoriu</a:t>
+              <a:rPr sz="1300" b="1" i="0">
+                <a:solidFill>
+                  <a:srgbClr val="2E8B57"/>
+                </a:solidFill>
+                <a:latin typeface="Aptos"/>
+              </a:rPr>
+              <a:t>✓</a:t>
             </a:r>
           </a:p>
         </p:txBody>
@@ -6721,8 +6710,8 @@
         </p:nvSpPr>
         <p:spPr>
           <a:xfrm>
-            <a:off x="8650224" y="3822191"/>
-            <a:ext cx="2359152" cy="420624"/>
+            <a:off x="9436608" y="4681727"/>
+            <a:ext cx="1554480" cy="310896"/>
           </a:xfrm>
           <a:prstGeom prst="rect">
             <a:avLst/>
@@ -6737,135 +6726,20 @@
           <a:p>
             <a:pPr algn="l"/>
             <a:r>
-              <a:rPr sz="1050" b="0" i="0">
-                <a:solidFill>
-                  <a:srgbClr val="647487"/>
-                </a:solidFill>
-                <a:latin typeface="Aptos"/>
-              </a:rPr>
-              <a:t>Scorurile scad la 55,7–63,6%.</a:t>
-            </a:r>
-          </a:p>
-        </p:txBody>
-      </p:sp>
-      <p:sp>
-        <p:nvSpPr>
-          <p:cNvPr id="15" name="Oval 14"/>
-          <p:cNvSpPr/>
-          <p:nvPr/>
-        </p:nvSpPr>
-        <p:spPr>
-          <a:xfrm>
-            <a:off x="8321040" y="4498848"/>
-            <a:ext cx="182880" cy="182880"/>
-          </a:xfrm>
-          <a:prstGeom prst="ellipse">
-            <a:avLst/>
-          </a:prstGeom>
-          <a:solidFill>
-            <a:srgbClr val="2E8B57"/>
-          </a:solidFill>
-          <a:ln w="12700">
-            <a:solidFill>
-              <a:srgbClr val="2E8B57"/>
-            </a:solidFill>
-          </a:ln>
-        </p:spPr>
-        <p:style>
-          <a:lnRef idx="1">
-            <a:schemeClr val="accent1"/>
-          </a:lnRef>
-          <a:fillRef idx="3">
-            <a:schemeClr val="accent1"/>
-          </a:fillRef>
-          <a:effectRef idx="2">
-            <a:schemeClr val="accent1"/>
-          </a:effectRef>
-          <a:fontRef idx="minor">
-            <a:schemeClr val="lt1"/>
-          </a:fontRef>
-        </p:style>
-        <p:txBody>
-          <a:bodyPr rtlCol="0" anchor="ctr"/>
-          <a:lstStyle/>
-          <a:p>
-            <a:pPr algn="ctr"/>
-          </a:p>
-        </p:txBody>
-      </p:sp>
-      <p:sp>
-        <p:nvSpPr>
-          <p:cNvPr id="16" name="TextBox 15"/>
-          <p:cNvSpPr txBox="1"/>
-          <p:nvPr/>
-        </p:nvSpPr>
-        <p:spPr>
-          <a:xfrm>
-            <a:off x="8650224" y="4443984"/>
-            <a:ext cx="2359152" cy="246888"/>
-          </a:xfrm>
-          <a:prstGeom prst="rect">
-            <a:avLst/>
-          </a:prstGeom>
-          <a:noFill/>
-        </p:spPr>
-        <p:txBody>
-          <a:bodyPr wrap="square" lIns="27432" rIns="27432" tIns="27432" bIns="27432" anchor="t">
-            <a:spAutoFit/>
-          </a:bodyPr>
-          <a:lstStyle/>
-          <a:p>
-            <a:pPr algn="l"/>
-            <a:r>
-              <a:rPr sz="1250" b="1" i="0">
-                <a:solidFill>
-                  <a:srgbClr val="102A43"/>
-                </a:solidFill>
-                <a:latin typeface="Aptos"/>
-              </a:rPr>
-              <a:t>Ordinea modelelor se poate schimba</a:t>
-            </a:r>
-          </a:p>
-        </p:txBody>
-      </p:sp>
-      <p:sp>
-        <p:nvSpPr>
-          <p:cNvPr id="17" name="TextBox 16"/>
-          <p:cNvSpPr txBox="1"/>
-          <p:nvPr/>
-        </p:nvSpPr>
-        <p:spPr>
-          <a:xfrm>
-            <a:off x="8650224" y="4754880"/>
-            <a:ext cx="2359152" cy="420624"/>
-          </a:xfrm>
-          <a:prstGeom prst="rect">
-            <a:avLst/>
-          </a:prstGeom>
-          <a:noFill/>
-        </p:spPr>
-        <p:txBody>
-          <a:bodyPr wrap="square" lIns="27432" rIns="27432" tIns="27432" bIns="27432" anchor="t">
-            <a:spAutoFit/>
-          </a:bodyPr>
-          <a:lstStyle/>
-          <a:p>
-            <a:pPr algn="l"/>
-            <a:r>
-              <a:rPr sz="1050" b="0" i="0">
-                <a:solidFill>
-                  <a:srgbClr val="647487"/>
-                </a:solidFill>
-                <a:latin typeface="Aptos"/>
-              </a:rPr>
-              <a:t>Capacitatea declarată nu garantează primul loc.</a:t>
-            </a:r>
-          </a:p>
-        </p:txBody>
-      </p:sp>
-      <p:sp>
-        <p:nvSpPr>
-          <p:cNvPr id="18" name="TextBox 17"/>
+              <a:rPr sz="1150" b="1" i="0">
+                <a:solidFill>
+                  <a:srgbClr val="17212B"/>
+                </a:solidFill>
+                <a:latin typeface="Aptos"/>
+              </a:rPr>
+              <a:t>Model rar: viteză mai bună</a:t>
+            </a:r>
+          </a:p>
+        </p:txBody>
+      </p:sp>
+      <p:sp>
+        <p:nvSpPr>
+          <p:cNvPr id="15" name="TextBox 14"/>
           <p:cNvSpPr txBox="1"/>
           <p:nvPr/>
         </p:nvSpPr>
@@ -6893,14 +6767,14 @@
                 </a:solidFill>
                 <a:latin typeface="Aptos"/>
               </a:rPr>
-              <a:t>BIRD-SQL dev, evaluare pe întregul set</a:t>
-            </a:r>
-          </a:p>
-        </p:txBody>
-      </p:sp>
-      <p:sp>
-        <p:nvSpPr>
-          <p:cNvPr id="19" name="TextBox 18"/>
+              <a:t>Modele locale servite prin llama.cpp</a:t>
+            </a:r>
+          </a:p>
+        </p:txBody>
+      </p:sp>
+      <p:sp>
+        <p:nvSpPr>
+          <p:cNvPr id="16" name="TextBox 15"/>
           <p:cNvSpPr txBox="1"/>
           <p:nvPr/>
         </p:nvSpPr>
@@ -6942,6 +6816,1225 @@
 </file>
 
 <file path=ppt/slides/slide13.xml><?xml version="1.0" encoding="utf-8"?>
+<p:sld xmlns:a="http://schemas.openxmlformats.org/drawingml/2006/main" xmlns:p="http://schemas.openxmlformats.org/presentationml/2006/main" xmlns:r="http://schemas.openxmlformats.org/officeDocument/2006/relationships">
+  <p:cSld>
+    <p:bg>
+      <p:bgPr>
+        <a:solidFill>
+          <a:srgbClr val="F7F5EF"/>
+        </a:solidFill>
+        <a:effectLst/>
+      </p:bgPr>
+    </p:bg>
+    <p:spTree>
+      <p:nvGrpSpPr>
+        <p:cNvPr id="1" name=""/>
+        <p:cNvGrpSpPr/>
+        <p:nvPr/>
+      </p:nvGrpSpPr>
+      <p:grpSpPr/>
+      <p:sp>
+        <p:nvSpPr>
+          <p:cNvPr id="2" name="TextBox 1"/>
+          <p:cNvSpPr txBox="1"/>
+          <p:nvPr/>
+        </p:nvSpPr>
+        <p:spPr>
+          <a:xfrm>
+            <a:off x="621792" y="347472"/>
+            <a:ext cx="4572000" cy="219456"/>
+          </a:xfrm>
+          <a:prstGeom prst="rect">
+            <a:avLst/>
+          </a:prstGeom>
+          <a:noFill/>
+        </p:spPr>
+        <p:txBody>
+          <a:bodyPr wrap="square" lIns="27432" rIns="27432" tIns="27432" bIns="27432" anchor="t">
+            <a:spAutoFit/>
+          </a:bodyPr>
+          <a:lstStyle/>
+          <a:p>
+            <a:pPr algn="l"/>
+            <a:r>
+              <a:rPr sz="1000" b="1" i="0">
+                <a:solidFill>
+                  <a:srgbClr val="1F6FB4"/>
+                </a:solidFill>
+                <a:latin typeface="Aptos"/>
+              </a:rPr>
+              <a:t>COMPORTAMENT</a:t>
+            </a:r>
+          </a:p>
+        </p:txBody>
+      </p:sp>
+      <p:sp>
+        <p:nvSpPr>
+          <p:cNvPr id="3" name="TextBox 2"/>
+          <p:cNvSpPr txBox="1"/>
+          <p:nvPr/>
+        </p:nvSpPr>
+        <p:spPr>
+          <a:xfrm>
+            <a:off x="621792" y="640080"/>
+            <a:ext cx="10789920" cy="868680"/>
+          </a:xfrm>
+          <a:prstGeom prst="rect">
+            <a:avLst/>
+          </a:prstGeom>
+          <a:noFill/>
+        </p:spPr>
+        <p:txBody>
+          <a:bodyPr wrap="square" lIns="27432" rIns="27432" tIns="27432" bIns="27432" anchor="t">
+            <a:spAutoFit/>
+          </a:bodyPr>
+          <a:lstStyle/>
+          <a:p>
+            <a:pPr algn="l"/>
+            <a:r>
+              <a:rPr sz="3000" b="1" i="0">
+                <a:solidFill>
+                  <a:srgbClr val="102A43"/>
+                </a:solidFill>
+                <a:latin typeface="Aptos"/>
+              </a:rPr>
+              <a:t>Adevărata limită: întrebările ambigue</a:t>
+            </a:r>
+          </a:p>
+        </p:txBody>
+      </p:sp>
+      <p:sp>
+        <p:nvSpPr>
+          <p:cNvPr id="4" name="Rounded Rectangle 3"/>
+          <p:cNvSpPr/>
+          <p:nvPr/>
+        </p:nvSpPr>
+        <p:spPr>
+          <a:xfrm>
+            <a:off x="658368" y="1335024"/>
+            <a:ext cx="3675887" cy="4526280"/>
+          </a:xfrm>
+          <a:prstGeom prst="roundRect">
+            <a:avLst>
+              <a:gd name="adj" fmla="val 3482"/>
+            </a:avLst>
+          </a:prstGeom>
+          <a:solidFill>
+            <a:srgbClr val="102A43"/>
+          </a:solidFill>
+          <a:ln w="12700">
+            <a:solidFill>
+              <a:srgbClr val="102A43"/>
+            </a:solidFill>
+          </a:ln>
+        </p:spPr>
+        <p:style>
+          <a:lnRef idx="1">
+            <a:schemeClr val="accent1"/>
+          </a:lnRef>
+          <a:fillRef idx="3">
+            <a:schemeClr val="accent1"/>
+          </a:fillRef>
+          <a:effectRef idx="2">
+            <a:schemeClr val="accent1"/>
+          </a:effectRef>
+          <a:fontRef idx="minor">
+            <a:schemeClr val="lt1"/>
+          </a:fontRef>
+        </p:style>
+        <p:txBody>
+          <a:bodyPr rtlCol="0" anchor="ctr"/>
+          <a:lstStyle/>
+          <a:p>
+            <a:pPr algn="ctr"/>
+          </a:p>
+        </p:txBody>
+      </p:sp>
+      <p:sp>
+        <p:nvSpPr>
+          <p:cNvPr id="5" name="Rounded Rectangle 4"/>
+          <p:cNvSpPr/>
+          <p:nvPr/>
+        </p:nvSpPr>
+        <p:spPr>
+          <a:xfrm>
+            <a:off x="1024128" y="1719072"/>
+            <a:ext cx="914400" cy="310896"/>
+          </a:xfrm>
+          <a:prstGeom prst="roundRect">
+            <a:avLst>
+              <a:gd name="adj" fmla="val 50000"/>
+            </a:avLst>
+          </a:prstGeom>
+          <a:solidFill>
+            <a:srgbClr val="274A66"/>
+          </a:solidFill>
+          <a:ln w="12700">
+            <a:solidFill>
+              <a:srgbClr val="274A66"/>
+            </a:solidFill>
+          </a:ln>
+        </p:spPr>
+        <p:style>
+          <a:lnRef idx="1">
+            <a:schemeClr val="accent1"/>
+          </a:lnRef>
+          <a:fillRef idx="3">
+            <a:schemeClr val="accent1"/>
+          </a:fillRef>
+          <a:effectRef idx="2">
+            <a:schemeClr val="accent1"/>
+          </a:effectRef>
+          <a:fontRef idx="minor">
+            <a:schemeClr val="lt1"/>
+          </a:fontRef>
+        </p:style>
+        <p:txBody>
+          <a:bodyPr rtlCol="0" anchor="ctr"/>
+          <a:lstStyle/>
+          <a:p>
+            <a:pPr algn="ctr"/>
+          </a:p>
+        </p:txBody>
+      </p:sp>
+      <p:sp>
+        <p:nvSpPr>
+          <p:cNvPr id="6" name="TextBox 5"/>
+          <p:cNvSpPr txBox="1"/>
+          <p:nvPr/>
+        </p:nvSpPr>
+        <p:spPr>
+          <a:xfrm>
+            <a:off x="1024128" y="1728216"/>
+            <a:ext cx="914400" cy="256032"/>
+          </a:xfrm>
+          <a:prstGeom prst="rect">
+            <a:avLst/>
+          </a:prstGeom>
+          <a:noFill/>
+        </p:spPr>
+        <p:txBody>
+          <a:bodyPr wrap="square" lIns="27432" rIns="27432" tIns="27432" bIns="27432" anchor="ctr">
+            <a:spAutoFit/>
+          </a:bodyPr>
+          <a:lstStyle/>
+          <a:p>
+            <a:pPr algn="ctr"/>
+            <a:r>
+              <a:rPr sz="1000" b="1" i="0">
+                <a:solidFill>
+                  <a:srgbClr val="A9D5F5"/>
+                </a:solidFill>
+                <a:latin typeface="Aptos"/>
+              </a:rPr>
+              <a:t>EXEMPLU</a:t>
+            </a:r>
+          </a:p>
+        </p:txBody>
+      </p:sp>
+      <p:sp>
+        <p:nvSpPr>
+          <p:cNvPr id="7" name="TextBox 6"/>
+          <p:cNvSpPr txBox="1"/>
+          <p:nvPr/>
+        </p:nvSpPr>
+        <p:spPr>
+          <a:xfrm>
+            <a:off x="1024128" y="2331720"/>
+            <a:ext cx="2907792" cy="868680"/>
+          </a:xfrm>
+          <a:prstGeom prst="rect">
+            <a:avLst/>
+          </a:prstGeom>
+          <a:noFill/>
+        </p:spPr>
+        <p:txBody>
+          <a:bodyPr wrap="square" lIns="27432" rIns="27432" tIns="27432" bIns="27432" anchor="t">
+            <a:spAutoFit/>
+          </a:bodyPr>
+          <a:lstStyle/>
+          <a:p>
+            <a:pPr algn="l"/>
+            <a:r>
+              <a:rPr sz="2400" b="1" i="0">
+                <a:solidFill>
+                  <a:srgbClr val="FFFFFF"/>
+                </a:solidFill>
+                <a:latin typeface="Aptos"/>
+              </a:rPr>
+              <a:t>„Care sunt cei mai buni clienți?”</a:t>
+            </a:r>
+          </a:p>
+        </p:txBody>
+      </p:sp>
+      <p:sp>
+        <p:nvSpPr>
+          <p:cNvPr id="8" name="TextBox 7"/>
+          <p:cNvSpPr txBox="1"/>
+          <p:nvPr/>
+        </p:nvSpPr>
+        <p:spPr>
+          <a:xfrm>
+            <a:off x="1024128" y="3474720"/>
+            <a:ext cx="2788920" cy="1170432"/>
+          </a:xfrm>
+          <a:prstGeom prst="rect">
+            <a:avLst/>
+          </a:prstGeom>
+          <a:noFill/>
+        </p:spPr>
+        <p:txBody>
+          <a:bodyPr wrap="square" lIns="27432" rIns="27432" tIns="27432" bIns="27432" anchor="t">
+            <a:spAutoFit/>
+          </a:bodyPr>
+          <a:lstStyle/>
+          <a:p>
+            <a:pPr algn="l"/>
+            <a:r>
+              <a:rPr sz="1500" b="0" i="0">
+                <a:solidFill>
+                  <a:srgbClr val="C8D7E4"/>
+                </a:solidFill>
+                <a:latin typeface="Aptos"/>
+              </a:rPr>
+              <a:t>după venit?
+după numărul de rezervări?
+după valoarea medie?</a:t>
+            </a:r>
+          </a:p>
+        </p:txBody>
+      </p:sp>
+      <p:sp>
+        <p:nvSpPr>
+          <p:cNvPr id="9" name="TextBox 8"/>
+          <p:cNvSpPr txBox="1"/>
+          <p:nvPr/>
+        </p:nvSpPr>
+        <p:spPr>
+          <a:xfrm>
+            <a:off x="1024128" y="5074920"/>
+            <a:ext cx="2788920" cy="438912"/>
+          </a:xfrm>
+          <a:prstGeom prst="rect">
+            <a:avLst/>
+          </a:prstGeom>
+          <a:noFill/>
+        </p:spPr>
+        <p:txBody>
+          <a:bodyPr wrap="square" lIns="27432" rIns="27432" tIns="27432" bIns="27432" anchor="t">
+            <a:spAutoFit/>
+          </a:bodyPr>
+          <a:lstStyle/>
+          <a:p>
+            <a:pPr algn="l"/>
+            <a:r>
+              <a:rPr sz="1350" b="1" i="0">
+                <a:solidFill>
+                  <a:srgbClr val="E1A83B"/>
+                </a:solidFill>
+                <a:latin typeface="Aptos"/>
+              </a:rPr>
+              <a:t>Un răspuns sigur începe cu o întrebare.</a:t>
+            </a:r>
+          </a:p>
+        </p:txBody>
+      </p:sp>
+      <p:sp>
+        <p:nvSpPr>
+          <p:cNvPr id="10" name="Rounded Rectangle 9"/>
+          <p:cNvSpPr/>
+          <p:nvPr/>
+        </p:nvSpPr>
+        <p:spPr>
+          <a:xfrm>
+            <a:off x="4617720" y="1408176"/>
+            <a:ext cx="6903720" cy="4206240"/>
+          </a:xfrm>
+          <a:prstGeom prst="roundRect">
+            <a:avLst>
+              <a:gd name="adj" fmla="val 3043"/>
+            </a:avLst>
+          </a:prstGeom>
+          <a:solidFill>
+            <a:srgbClr val="FFFFFF"/>
+          </a:solidFill>
+          <a:ln w="12700">
+            <a:solidFill>
+              <a:srgbClr val="D6DEE6"/>
+            </a:solidFill>
+          </a:ln>
+        </p:spPr>
+        <p:style>
+          <a:lnRef idx="1">
+            <a:schemeClr val="accent1"/>
+          </a:lnRef>
+          <a:fillRef idx="3">
+            <a:schemeClr val="accent1"/>
+          </a:fillRef>
+          <a:effectRef idx="2">
+            <a:schemeClr val="accent1"/>
+          </a:effectRef>
+          <a:fontRef idx="minor">
+            <a:schemeClr val="lt1"/>
+          </a:fontRef>
+        </p:style>
+        <p:txBody>
+          <a:bodyPr rtlCol="0" anchor="ctr"/>
+          <a:lstStyle/>
+          <a:p>
+            <a:pPr algn="ctr"/>
+          </a:p>
+        </p:txBody>
+      </p:sp>
+      <p:pic>
+        <p:nvPicPr>
+          <p:cNvPr id="11" name="Picture 10" descr="fig_ambiguity.png"/>
+          <p:cNvPicPr>
+            <a:picLocks noChangeAspect="1"/>
+          </p:cNvPicPr>
+          <p:nvPr/>
+        </p:nvPicPr>
+        <p:blipFill>
+          <a:blip r:embed="rId2"/>
+          <a:stretch>
+            <a:fillRect/>
+          </a:stretch>
+        </p:blipFill>
+        <p:spPr>
+          <a:xfrm>
+            <a:off x="4745736" y="2017879"/>
+            <a:ext cx="6647688" cy="2986833"/>
+          </a:xfrm>
+          <a:prstGeom prst="rect">
+            <a:avLst/>
+          </a:prstGeom>
+        </p:spPr>
+      </p:pic>
+      <p:sp>
+        <p:nvSpPr>
+          <p:cNvPr id="12" name="Rounded Rectangle 11"/>
+          <p:cNvSpPr/>
+          <p:nvPr/>
+        </p:nvSpPr>
+        <p:spPr>
+          <a:xfrm>
+            <a:off x="4937760" y="5577840"/>
+            <a:ext cx="6272784" cy="621792"/>
+          </a:xfrm>
+          <a:prstGeom prst="roundRect">
+            <a:avLst>
+              <a:gd name="adj" fmla="val 20588"/>
+            </a:avLst>
+          </a:prstGeom>
+          <a:solidFill>
+            <a:srgbClr val="FAECE9"/>
+          </a:solidFill>
+          <a:ln w="12700">
+            <a:solidFill>
+              <a:srgbClr val="FAECE9"/>
+            </a:solidFill>
+          </a:ln>
+        </p:spPr>
+        <p:style>
+          <a:lnRef idx="1">
+            <a:schemeClr val="accent1"/>
+          </a:lnRef>
+          <a:fillRef idx="3">
+            <a:schemeClr val="accent1"/>
+          </a:fillRef>
+          <a:effectRef idx="2">
+            <a:schemeClr val="accent1"/>
+          </a:effectRef>
+          <a:fontRef idx="minor">
+            <a:schemeClr val="lt1"/>
+          </a:fontRef>
+        </p:style>
+        <p:txBody>
+          <a:bodyPr rtlCol="0" anchor="ctr"/>
+          <a:lstStyle/>
+          <a:p>
+            <a:pPr algn="ctr"/>
+          </a:p>
+        </p:txBody>
+      </p:sp>
+      <p:sp>
+        <p:nvSpPr>
+          <p:cNvPr id="13" name="TextBox 12"/>
+          <p:cNvSpPr txBox="1"/>
+          <p:nvPr/>
+        </p:nvSpPr>
+        <p:spPr>
+          <a:xfrm>
+            <a:off x="5138928" y="5577840"/>
+            <a:ext cx="5870448" cy="621792"/>
+          </a:xfrm>
+          <a:prstGeom prst="rect">
+            <a:avLst/>
+          </a:prstGeom>
+          <a:noFill/>
+        </p:spPr>
+        <p:txBody>
+          <a:bodyPr wrap="square" lIns="27432" rIns="27432" tIns="27432" bIns="27432" anchor="ctr">
+            <a:spAutoFit/>
+          </a:bodyPr>
+          <a:lstStyle/>
+          <a:p>
+            <a:pPr algn="ctr"/>
+            <a:r>
+              <a:rPr sz="1300" b="1" i="0">
+                <a:solidFill>
+                  <a:srgbClr val="C1483A"/>
+                </a:solidFill>
+                <a:latin typeface="Aptos"/>
+              </a:rPr>
+              <a:t>Apelurile unice au preferat să ghicească; agenții au cerut mai des clarificări.</a:t>
+            </a:r>
+          </a:p>
+        </p:txBody>
+      </p:sp>
+      <p:sp>
+        <p:nvSpPr>
+          <p:cNvPr id="14" name="TextBox 13"/>
+          <p:cNvSpPr txBox="1"/>
+          <p:nvPr/>
+        </p:nvSpPr>
+        <p:spPr>
+          <a:xfrm>
+            <a:off x="11201400" y="6473952"/>
+            <a:ext cx="365760" cy="201168"/>
+          </a:xfrm>
+          <a:prstGeom prst="rect">
+            <a:avLst/>
+          </a:prstGeom>
+          <a:noFill/>
+        </p:spPr>
+        <p:txBody>
+          <a:bodyPr wrap="square" lIns="27432" rIns="27432" tIns="27432" bIns="27432" anchor="t">
+            <a:spAutoFit/>
+          </a:bodyPr>
+          <a:lstStyle/>
+          <a:p>
+            <a:pPr algn="r"/>
+            <a:r>
+              <a:rPr sz="900" b="1" i="0">
+                <a:solidFill>
+                  <a:srgbClr val="647487"/>
+                </a:solidFill>
+                <a:latin typeface="Aptos"/>
+              </a:rPr>
+              <a:t>13</a:t>
+            </a:r>
+          </a:p>
+        </p:txBody>
+      </p:sp>
+    </p:spTree>
+  </p:cSld>
+  <p:clrMapOvr>
+    <a:masterClrMapping/>
+  </p:clrMapOvr>
+</p:sld>
+</file>
+
+<file path=ppt/slides/slide14.xml><?xml version="1.0" encoding="utf-8"?>
+<p:sld xmlns:a="http://schemas.openxmlformats.org/drawingml/2006/main" xmlns:p="http://schemas.openxmlformats.org/presentationml/2006/main" xmlns:r="http://schemas.openxmlformats.org/officeDocument/2006/relationships">
+  <p:cSld>
+    <p:bg>
+      <p:bgPr>
+        <a:solidFill>
+          <a:srgbClr val="F7F5EF"/>
+        </a:solidFill>
+        <a:effectLst/>
+      </p:bgPr>
+    </p:bg>
+    <p:spTree>
+      <p:nvGrpSpPr>
+        <p:cNvPr id="1" name=""/>
+        <p:cNvGrpSpPr/>
+        <p:nvPr/>
+      </p:nvGrpSpPr>
+      <p:grpSpPr/>
+      <p:sp>
+        <p:nvSpPr>
+          <p:cNvPr id="2" name="TextBox 1"/>
+          <p:cNvSpPr txBox="1"/>
+          <p:nvPr/>
+        </p:nvSpPr>
+        <p:spPr>
+          <a:xfrm>
+            <a:off x="621792" y="347472"/>
+            <a:ext cx="4572000" cy="219456"/>
+          </a:xfrm>
+          <a:prstGeom prst="rect">
+            <a:avLst/>
+          </a:prstGeom>
+          <a:noFill/>
+        </p:spPr>
+        <p:txBody>
+          <a:bodyPr wrap="square" lIns="27432" rIns="27432" tIns="27432" bIns="27432" anchor="t">
+            <a:spAutoFit/>
+          </a:bodyPr>
+          <a:lstStyle/>
+          <a:p>
+            <a:pPr algn="l"/>
+            <a:r>
+              <a:rPr sz="1000" b="1" i="0">
+                <a:solidFill>
+                  <a:srgbClr val="1F6FB4"/>
+                </a:solidFill>
+                <a:latin typeface="Aptos"/>
+              </a:rPr>
+              <a:t>GENERALIZARE</a:t>
+            </a:r>
+          </a:p>
+        </p:txBody>
+      </p:sp>
+      <p:sp>
+        <p:nvSpPr>
+          <p:cNvPr id="3" name="TextBox 2"/>
+          <p:cNvSpPr txBox="1"/>
+          <p:nvPr/>
+        </p:nvSpPr>
+        <p:spPr>
+          <a:xfrm>
+            <a:off x="621792" y="640080"/>
+            <a:ext cx="10789920" cy="868680"/>
+          </a:xfrm>
+          <a:prstGeom prst="rect">
+            <a:avLst/>
+          </a:prstGeom>
+          <a:noFill/>
+        </p:spPr>
+        <p:txBody>
+          <a:bodyPr wrap="square" lIns="27432" rIns="27432" tIns="27432" bIns="27432" anchor="t">
+            <a:spAutoFit/>
+          </a:bodyPr>
+          <a:lstStyle/>
+          <a:p>
+            <a:pPr algn="l"/>
+            <a:r>
+              <a:rPr sz="3000" b="1" i="0">
+                <a:solidFill>
+                  <a:srgbClr val="102A43"/>
+                </a:solidFill>
+                <a:latin typeface="Aptos"/>
+              </a:rPr>
+              <a:t>Validare externă: BIRD-SQL</a:t>
+            </a:r>
+          </a:p>
+        </p:txBody>
+      </p:sp>
+      <p:sp>
+        <p:nvSpPr>
+          <p:cNvPr id="4" name="TextBox 3"/>
+          <p:cNvSpPr txBox="1"/>
+          <p:nvPr/>
+        </p:nvSpPr>
+        <p:spPr>
+          <a:xfrm>
+            <a:off x="658368" y="1225296"/>
+            <a:ext cx="7772400" cy="310896"/>
+          </a:xfrm>
+          <a:prstGeom prst="rect">
+            <a:avLst/>
+          </a:prstGeom>
+          <a:noFill/>
+        </p:spPr>
+        <p:txBody>
+          <a:bodyPr wrap="square" lIns="27432" rIns="27432" tIns="27432" bIns="27432" anchor="t">
+            <a:spAutoFit/>
+          </a:bodyPr>
+          <a:lstStyle/>
+          <a:p>
+            <a:pPr algn="l"/>
+            <a:r>
+              <a:rPr sz="1500" b="1" i="0">
+                <a:solidFill>
+                  <a:srgbClr val="647487"/>
+                </a:solidFill>
+                <a:latin typeface="Aptos"/>
+              </a:rPr>
+              <a:t>1.534 de întrebări · 11 baze de date · set elaborat independent</a:t>
+            </a:r>
+          </a:p>
+        </p:txBody>
+      </p:sp>
+      <p:sp>
+        <p:nvSpPr>
+          <p:cNvPr id="5" name="Rounded Rectangle 4"/>
+          <p:cNvSpPr/>
+          <p:nvPr/>
+        </p:nvSpPr>
+        <p:spPr>
+          <a:xfrm>
+            <a:off x="621792" y="1627632"/>
+            <a:ext cx="7059168" cy="4370832"/>
+          </a:xfrm>
+          <a:prstGeom prst="roundRect">
+            <a:avLst>
+              <a:gd name="adj" fmla="val 2928"/>
+            </a:avLst>
+          </a:prstGeom>
+          <a:solidFill>
+            <a:srgbClr val="FFFFFF"/>
+          </a:solidFill>
+          <a:ln w="12700">
+            <a:solidFill>
+              <a:srgbClr val="D6DEE6"/>
+            </a:solidFill>
+          </a:ln>
+        </p:spPr>
+        <p:style>
+          <a:lnRef idx="1">
+            <a:schemeClr val="accent1"/>
+          </a:lnRef>
+          <a:fillRef idx="3">
+            <a:schemeClr val="accent1"/>
+          </a:fillRef>
+          <a:effectRef idx="2">
+            <a:schemeClr val="accent1"/>
+          </a:effectRef>
+          <a:fontRef idx="minor">
+            <a:schemeClr val="lt1"/>
+          </a:fontRef>
+        </p:style>
+        <p:txBody>
+          <a:bodyPr rtlCol="0" anchor="ctr"/>
+          <a:lstStyle/>
+          <a:p>
+            <a:pPr algn="ctr"/>
+          </a:p>
+        </p:txBody>
+      </p:sp>
+      <p:pic>
+        <p:nvPicPr>
+          <p:cNvPr id="6" name="Picture 5" descr="fig_saturation.png"/>
+          <p:cNvPicPr>
+            <a:picLocks noChangeAspect="1"/>
+          </p:cNvPicPr>
+          <p:nvPr/>
+        </p:nvPicPr>
+        <p:blipFill>
+          <a:blip r:embed="rId2"/>
+          <a:stretch>
+            <a:fillRect/>
+          </a:stretch>
+        </p:blipFill>
+        <p:spPr>
+          <a:xfrm>
+            <a:off x="749808" y="2101829"/>
+            <a:ext cx="6803136" cy="3422436"/>
+          </a:xfrm>
+          <a:prstGeom prst="rect">
+            <a:avLst/>
+          </a:prstGeom>
+        </p:spPr>
+      </p:pic>
+      <p:sp>
+        <p:nvSpPr>
+          <p:cNvPr id="7" name="Rounded Rectangle 6"/>
+          <p:cNvSpPr/>
+          <p:nvPr/>
+        </p:nvSpPr>
+        <p:spPr>
+          <a:xfrm>
+            <a:off x="7973568" y="1627632"/>
+            <a:ext cx="3520440" cy="4370832"/>
+          </a:xfrm>
+          <a:prstGeom prst="roundRect">
+            <a:avLst>
+              <a:gd name="adj" fmla="val 3636"/>
+            </a:avLst>
+          </a:prstGeom>
+          <a:solidFill>
+            <a:srgbClr val="FFFFFF"/>
+          </a:solidFill>
+          <a:ln w="12700">
+            <a:solidFill>
+              <a:srgbClr val="D6DEE6"/>
+            </a:solidFill>
+          </a:ln>
+        </p:spPr>
+        <p:style>
+          <a:lnRef idx="1">
+            <a:schemeClr val="accent1"/>
+          </a:lnRef>
+          <a:fillRef idx="3">
+            <a:schemeClr val="accent1"/>
+          </a:fillRef>
+          <a:effectRef idx="2">
+            <a:schemeClr val="accent1"/>
+          </a:effectRef>
+          <a:fontRef idx="minor">
+            <a:schemeClr val="lt1"/>
+          </a:fontRef>
+        </p:style>
+        <p:txBody>
+          <a:bodyPr rtlCol="0" anchor="ctr"/>
+          <a:lstStyle/>
+          <a:p>
+            <a:pPr algn="ctr"/>
+          </a:p>
+        </p:txBody>
+      </p:sp>
+      <p:sp>
+        <p:nvSpPr>
+          <p:cNvPr id="8" name="TextBox 7"/>
+          <p:cNvSpPr txBox="1"/>
+          <p:nvPr/>
+        </p:nvSpPr>
+        <p:spPr>
+          <a:xfrm>
+            <a:off x="8321040" y="1975104"/>
+            <a:ext cx="2816352" cy="384048"/>
+          </a:xfrm>
+          <a:prstGeom prst="rect">
+            <a:avLst/>
+          </a:prstGeom>
+          <a:noFill/>
+        </p:spPr>
+        <p:txBody>
+          <a:bodyPr wrap="square" lIns="27432" rIns="27432" tIns="27432" bIns="27432" anchor="t">
+            <a:spAutoFit/>
+          </a:bodyPr>
+          <a:lstStyle/>
+          <a:p>
+            <a:pPr algn="l"/>
+            <a:r>
+              <a:rPr sz="1900" b="1" i="0">
+                <a:solidFill>
+                  <a:srgbClr val="102A43"/>
+                </a:solidFill>
+                <a:latin typeface="Aptos"/>
+              </a:rPr>
+              <a:t>Ce confirmă?</a:t>
+            </a:r>
+          </a:p>
+        </p:txBody>
+      </p:sp>
+      <p:sp>
+        <p:nvSpPr>
+          <p:cNvPr id="9" name="Oval 8"/>
+          <p:cNvSpPr/>
+          <p:nvPr/>
+        </p:nvSpPr>
+        <p:spPr>
+          <a:xfrm>
+            <a:off x="8321040" y="2633472"/>
+            <a:ext cx="182880" cy="182880"/>
+          </a:xfrm>
+          <a:prstGeom prst="ellipse">
+            <a:avLst/>
+          </a:prstGeom>
+          <a:solidFill>
+            <a:srgbClr val="1F6FB4"/>
+          </a:solidFill>
+          <a:ln w="12700">
+            <a:solidFill>
+              <a:srgbClr val="1F6FB4"/>
+            </a:solidFill>
+          </a:ln>
+        </p:spPr>
+        <p:style>
+          <a:lnRef idx="1">
+            <a:schemeClr val="accent1"/>
+          </a:lnRef>
+          <a:fillRef idx="3">
+            <a:schemeClr val="accent1"/>
+          </a:fillRef>
+          <a:effectRef idx="2">
+            <a:schemeClr val="accent1"/>
+          </a:effectRef>
+          <a:fontRef idx="minor">
+            <a:schemeClr val="lt1"/>
+          </a:fontRef>
+        </p:style>
+        <p:txBody>
+          <a:bodyPr rtlCol="0" anchor="ctr"/>
+          <a:lstStyle/>
+          <a:p>
+            <a:pPr algn="ctr"/>
+          </a:p>
+        </p:txBody>
+      </p:sp>
+      <p:sp>
+        <p:nvSpPr>
+          <p:cNvPr id="10" name="TextBox 9"/>
+          <p:cNvSpPr txBox="1"/>
+          <p:nvPr/>
+        </p:nvSpPr>
+        <p:spPr>
+          <a:xfrm>
+            <a:off x="8650224" y="2578608"/>
+            <a:ext cx="2359152" cy="246888"/>
+          </a:xfrm>
+          <a:prstGeom prst="rect">
+            <a:avLst/>
+          </a:prstGeom>
+          <a:noFill/>
+        </p:spPr>
+        <p:txBody>
+          <a:bodyPr wrap="square" lIns="27432" rIns="27432" tIns="27432" bIns="27432" anchor="t">
+            <a:spAutoFit/>
+          </a:bodyPr>
+          <a:lstStyle/>
+          <a:p>
+            <a:pPr algn="l"/>
+            <a:r>
+              <a:rPr sz="1250" b="1" i="0">
+                <a:solidFill>
+                  <a:srgbClr val="102A43"/>
+                </a:solidFill>
+                <a:latin typeface="Aptos"/>
+              </a:rPr>
+              <a:t>Seturile proprii se saturează</a:t>
+            </a:r>
+          </a:p>
+        </p:txBody>
+      </p:sp>
+      <p:sp>
+        <p:nvSpPr>
+          <p:cNvPr id="11" name="TextBox 10"/>
+          <p:cNvSpPr txBox="1"/>
+          <p:nvPr/>
+        </p:nvSpPr>
+        <p:spPr>
+          <a:xfrm>
+            <a:off x="8650224" y="2889504"/>
+            <a:ext cx="2359152" cy="420624"/>
+          </a:xfrm>
+          <a:prstGeom prst="rect">
+            <a:avLst/>
+          </a:prstGeom>
+          <a:noFill/>
+        </p:spPr>
+        <p:txBody>
+          <a:bodyPr wrap="square" lIns="27432" rIns="27432" tIns="27432" bIns="27432" anchor="t">
+            <a:spAutoFit/>
+          </a:bodyPr>
+          <a:lstStyle/>
+          <a:p>
+            <a:pPr algn="l"/>
+            <a:r>
+              <a:rPr sz="1050" b="0" i="0">
+                <a:solidFill>
+                  <a:srgbClr val="647487"/>
+                </a:solidFill>
+                <a:latin typeface="Aptos"/>
+              </a:rPr>
+              <a:t>Modelele recente ajung la 100%.</a:t>
+            </a:r>
+          </a:p>
+        </p:txBody>
+      </p:sp>
+      <p:sp>
+        <p:nvSpPr>
+          <p:cNvPr id="12" name="Oval 11"/>
+          <p:cNvSpPr/>
+          <p:nvPr/>
+        </p:nvSpPr>
+        <p:spPr>
+          <a:xfrm>
+            <a:off x="8321040" y="3566160"/>
+            <a:ext cx="182880" cy="182880"/>
+          </a:xfrm>
+          <a:prstGeom prst="ellipse">
+            <a:avLst/>
+          </a:prstGeom>
+          <a:solidFill>
+            <a:srgbClr val="C1483A"/>
+          </a:solidFill>
+          <a:ln w="12700">
+            <a:solidFill>
+              <a:srgbClr val="C1483A"/>
+            </a:solidFill>
+          </a:ln>
+        </p:spPr>
+        <p:style>
+          <a:lnRef idx="1">
+            <a:schemeClr val="accent1"/>
+          </a:lnRef>
+          <a:fillRef idx="3">
+            <a:schemeClr val="accent1"/>
+          </a:fillRef>
+          <a:effectRef idx="2">
+            <a:schemeClr val="accent1"/>
+          </a:effectRef>
+          <a:fontRef idx="minor">
+            <a:schemeClr val="lt1"/>
+          </a:fontRef>
+        </p:style>
+        <p:txBody>
+          <a:bodyPr rtlCol="0" anchor="ctr"/>
+          <a:lstStyle/>
+          <a:p>
+            <a:pPr algn="ctr"/>
+          </a:p>
+        </p:txBody>
+      </p:sp>
+      <p:sp>
+        <p:nvSpPr>
+          <p:cNvPr id="13" name="TextBox 12"/>
+          <p:cNvSpPr txBox="1"/>
+          <p:nvPr/>
+        </p:nvSpPr>
+        <p:spPr>
+          <a:xfrm>
+            <a:off x="8650224" y="3511296"/>
+            <a:ext cx="2359152" cy="246888"/>
+          </a:xfrm>
+          <a:prstGeom prst="rect">
+            <a:avLst/>
+          </a:prstGeom>
+          <a:noFill/>
+        </p:spPr>
+        <p:txBody>
+          <a:bodyPr wrap="square" lIns="27432" rIns="27432" tIns="27432" bIns="27432" anchor="t">
+            <a:spAutoFit/>
+          </a:bodyPr>
+          <a:lstStyle/>
+          <a:p>
+            <a:pPr algn="l"/>
+            <a:r>
+              <a:rPr sz="1250" b="1" i="0">
+                <a:solidFill>
+                  <a:srgbClr val="102A43"/>
+                </a:solidFill>
+                <a:latin typeface="Aptos"/>
+              </a:rPr>
+              <a:t>BIRD rămâne discriminatoriu</a:t>
+            </a:r>
+          </a:p>
+        </p:txBody>
+      </p:sp>
+      <p:sp>
+        <p:nvSpPr>
+          <p:cNvPr id="14" name="TextBox 13"/>
+          <p:cNvSpPr txBox="1"/>
+          <p:nvPr/>
+        </p:nvSpPr>
+        <p:spPr>
+          <a:xfrm>
+            <a:off x="8650224" y="3822191"/>
+            <a:ext cx="2359152" cy="420624"/>
+          </a:xfrm>
+          <a:prstGeom prst="rect">
+            <a:avLst/>
+          </a:prstGeom>
+          <a:noFill/>
+        </p:spPr>
+        <p:txBody>
+          <a:bodyPr wrap="square" lIns="27432" rIns="27432" tIns="27432" bIns="27432" anchor="t">
+            <a:spAutoFit/>
+          </a:bodyPr>
+          <a:lstStyle/>
+          <a:p>
+            <a:pPr algn="l"/>
+            <a:r>
+              <a:rPr sz="1050" b="0" i="0">
+                <a:solidFill>
+                  <a:srgbClr val="647487"/>
+                </a:solidFill>
+                <a:latin typeface="Aptos"/>
+              </a:rPr>
+              <a:t>Scorurile scad la 55,7–63,6%.</a:t>
+            </a:r>
+          </a:p>
+        </p:txBody>
+      </p:sp>
+      <p:sp>
+        <p:nvSpPr>
+          <p:cNvPr id="15" name="Oval 14"/>
+          <p:cNvSpPr/>
+          <p:nvPr/>
+        </p:nvSpPr>
+        <p:spPr>
+          <a:xfrm>
+            <a:off x="8321040" y="4498848"/>
+            <a:ext cx="182880" cy="182880"/>
+          </a:xfrm>
+          <a:prstGeom prst="ellipse">
+            <a:avLst/>
+          </a:prstGeom>
+          <a:solidFill>
+            <a:srgbClr val="2E8B57"/>
+          </a:solidFill>
+          <a:ln w="12700">
+            <a:solidFill>
+              <a:srgbClr val="2E8B57"/>
+            </a:solidFill>
+          </a:ln>
+        </p:spPr>
+        <p:style>
+          <a:lnRef idx="1">
+            <a:schemeClr val="accent1"/>
+          </a:lnRef>
+          <a:fillRef idx="3">
+            <a:schemeClr val="accent1"/>
+          </a:fillRef>
+          <a:effectRef idx="2">
+            <a:schemeClr val="accent1"/>
+          </a:effectRef>
+          <a:fontRef idx="minor">
+            <a:schemeClr val="lt1"/>
+          </a:fontRef>
+        </p:style>
+        <p:txBody>
+          <a:bodyPr rtlCol="0" anchor="ctr"/>
+          <a:lstStyle/>
+          <a:p>
+            <a:pPr algn="ctr"/>
+          </a:p>
+        </p:txBody>
+      </p:sp>
+      <p:sp>
+        <p:nvSpPr>
+          <p:cNvPr id="16" name="TextBox 15"/>
+          <p:cNvSpPr txBox="1"/>
+          <p:nvPr/>
+        </p:nvSpPr>
+        <p:spPr>
+          <a:xfrm>
+            <a:off x="8650224" y="4443984"/>
+            <a:ext cx="2359152" cy="246888"/>
+          </a:xfrm>
+          <a:prstGeom prst="rect">
+            <a:avLst/>
+          </a:prstGeom>
+          <a:noFill/>
+        </p:spPr>
+        <p:txBody>
+          <a:bodyPr wrap="square" lIns="27432" rIns="27432" tIns="27432" bIns="27432" anchor="t">
+            <a:spAutoFit/>
+          </a:bodyPr>
+          <a:lstStyle/>
+          <a:p>
+            <a:pPr algn="l"/>
+            <a:r>
+              <a:rPr sz="1250" b="1" i="0">
+                <a:solidFill>
+                  <a:srgbClr val="102A43"/>
+                </a:solidFill>
+                <a:latin typeface="Aptos"/>
+              </a:rPr>
+              <a:t>Ordinea modelelor se poate schimba</a:t>
+            </a:r>
+          </a:p>
+        </p:txBody>
+      </p:sp>
+      <p:sp>
+        <p:nvSpPr>
+          <p:cNvPr id="17" name="TextBox 16"/>
+          <p:cNvSpPr txBox="1"/>
+          <p:nvPr/>
+        </p:nvSpPr>
+        <p:spPr>
+          <a:xfrm>
+            <a:off x="8650224" y="4754880"/>
+            <a:ext cx="2359152" cy="420624"/>
+          </a:xfrm>
+          <a:prstGeom prst="rect">
+            <a:avLst/>
+          </a:prstGeom>
+          <a:noFill/>
+        </p:spPr>
+        <p:txBody>
+          <a:bodyPr wrap="square" lIns="27432" rIns="27432" tIns="27432" bIns="27432" anchor="t">
+            <a:spAutoFit/>
+          </a:bodyPr>
+          <a:lstStyle/>
+          <a:p>
+            <a:pPr algn="l"/>
+            <a:r>
+              <a:rPr sz="1050" b="0" i="0">
+                <a:solidFill>
+                  <a:srgbClr val="647487"/>
+                </a:solidFill>
+                <a:latin typeface="Aptos"/>
+              </a:rPr>
+              <a:t>Capacitatea declarată nu garantează primul loc.</a:t>
+            </a:r>
+          </a:p>
+        </p:txBody>
+      </p:sp>
+      <p:sp>
+        <p:nvSpPr>
+          <p:cNvPr id="18" name="TextBox 17"/>
+          <p:cNvSpPr txBox="1"/>
+          <p:nvPr/>
+        </p:nvSpPr>
+        <p:spPr>
+          <a:xfrm>
+            <a:off x="621792" y="6519672"/>
+            <a:ext cx="9875520" cy="164592"/>
+          </a:xfrm>
+          <a:prstGeom prst="rect">
+            <a:avLst/>
+          </a:prstGeom>
+          <a:noFill/>
+        </p:spPr>
+        <p:txBody>
+          <a:bodyPr wrap="square" lIns="27432" rIns="27432" tIns="27432" bIns="27432" anchor="t">
+            <a:spAutoFit/>
+          </a:bodyPr>
+          <a:lstStyle/>
+          <a:p>
+            <a:pPr algn="l"/>
+            <a:r>
+              <a:rPr sz="850" b="0" i="0">
+                <a:solidFill>
+                  <a:srgbClr val="647487"/>
+                </a:solidFill>
+                <a:latin typeface="Aptos"/>
+              </a:rPr>
+              <a:t>BIRD-SQL dev, evaluare pe întregul set</a:t>
+            </a:r>
+          </a:p>
+        </p:txBody>
+      </p:sp>
+      <p:sp>
+        <p:nvSpPr>
+          <p:cNvPr id="19" name="TextBox 18"/>
+          <p:cNvSpPr txBox="1"/>
+          <p:nvPr/>
+        </p:nvSpPr>
+        <p:spPr>
+          <a:xfrm>
+            <a:off x="11201400" y="6473952"/>
+            <a:ext cx="365760" cy="201168"/>
+          </a:xfrm>
+          <a:prstGeom prst="rect">
+            <a:avLst/>
+          </a:prstGeom>
+          <a:noFill/>
+        </p:spPr>
+        <p:txBody>
+          <a:bodyPr wrap="square" lIns="27432" rIns="27432" tIns="27432" bIns="27432" anchor="t">
+            <a:spAutoFit/>
+          </a:bodyPr>
+          <a:lstStyle/>
+          <a:p>
+            <a:pPr algn="r"/>
+            <a:r>
+              <a:rPr sz="900" b="1" i="0">
+                <a:solidFill>
+                  <a:srgbClr val="647487"/>
+                </a:solidFill>
+                <a:latin typeface="Aptos"/>
+              </a:rPr>
+              <a:t>14</a:t>
+            </a:r>
+          </a:p>
+        </p:txBody>
+      </p:sp>
+    </p:spTree>
+  </p:cSld>
+  <p:clrMapOvr>
+    <a:masterClrMapping/>
+  </p:clrMapOvr>
+</p:sld>
+</file>
+
+<file path=ppt/slides/slide15.xml><?xml version="1.0" encoding="utf-8"?>
 <p:sld xmlns:a="http://schemas.openxmlformats.org/drawingml/2006/main" xmlns:p="http://schemas.openxmlformats.org/presentationml/2006/main" xmlns:r="http://schemas.openxmlformats.org/officeDocument/2006/relationships">
   <p:cSld>
     <p:bg>
@@ -7749,7 +8842,7 @@
                 </a:solidFill>
                 <a:latin typeface="Aptos"/>
               </a:rPr>
-              <a:t>13</a:t>
+              <a:t>15</a:t>
             </a:r>
           </a:p>
         </p:txBody>
@@ -11013,7 +12106,7 @@
     <p:bg>
       <p:bgPr>
         <a:solidFill>
-          <a:srgbClr val="F7F5EF"/>
+          <a:srgbClr val="102A43"/>
         </a:solidFill>
         <a:effectLst/>
       </p:bgPr>
@@ -11051,11 +12144,11 @@
             <a:r>
               <a:rPr sz="1000" b="1" i="0">
                 <a:solidFill>
-                  <a:srgbClr val="1F6FB4"/>
-                </a:solidFill>
-                <a:latin typeface="Aptos"/>
-              </a:rPr>
-              <a:t>ÎNTREBAREA DE CERCETARE</a:t>
+                  <a:srgbClr val="E1A83B"/>
+                </a:solidFill>
+                <a:latin typeface="Aptos"/>
+              </a:rPr>
+              <a:t>PARTEA A DOUA</a:t>
             </a:r>
           </a:p>
         </p:txBody>
@@ -11086,11 +12179,12 @@
             <a:r>
               <a:rPr sz="3000" b="1" i="0">
                 <a:solidFill>
-                  <a:srgbClr val="102A43"/>
-                </a:solidFill>
-                <a:latin typeface="Aptos"/>
-              </a:rPr>
-              <a:t>Trei moduri de a genera SQL</a:t>
+                  <a:srgbClr val="FFFFFF"/>
+                </a:solidFill>
+                <a:latin typeface="Aptos"/>
+              </a:rPr>
+              <a:t>Sistemul funcționează.
+Dar este construit cum trebuie?</a:t>
             </a:r>
           </a:p>
         </p:txBody>
@@ -11103,8 +12197,8 @@
         </p:nvSpPr>
         <p:spPr>
           <a:xfrm>
-            <a:off x="658368" y="1261872"/>
-            <a:ext cx="8869680" cy="475488"/>
+            <a:off x="658368" y="2157984"/>
+            <a:ext cx="4846320" cy="1005840"/>
           </a:xfrm>
           <a:prstGeom prst="rect">
             <a:avLst/>
@@ -11119,13 +12213,13 @@
           <a:p>
             <a:pPr algn="l"/>
             <a:r>
-              <a:rPr sz="2300" b="1" i="0">
-                <a:solidFill>
-                  <a:srgbClr val="102A43"/>
-                </a:solidFill>
-                <a:latin typeface="Aptos"/>
-              </a:rPr>
-              <a:t>Ajută autonomia agentului sau doar adaugă complexitate?</a:t>
+              <a:rPr sz="1600" b="0" i="0">
+                <a:solidFill>
+                  <a:srgbClr val="B8CAD8"/>
+                </a:solidFill>
+                <a:latin typeface="Aptos"/>
+              </a:rPr>
+              <a:t>Tot ce am arătat până aici este o alegere de proiectare, nu un rezultat măsurat. Restul lucrării verifică fiecare alegere pe rând.</a:t>
             </a:r>
           </a:p>
         </p:txBody>
@@ -11138,20 +12232,20 @@
         </p:nvSpPr>
         <p:spPr>
           <a:xfrm>
-            <a:off x="713232" y="2011680"/>
-            <a:ext cx="3346704" cy="3127248"/>
+            <a:off x="658368" y="3310128"/>
+            <a:ext cx="4937760" cy="658368"/>
           </a:xfrm>
           <a:prstGeom prst="roundRect">
             <a:avLst>
-              <a:gd name="adj" fmla="val 4093"/>
+              <a:gd name="adj" fmla="val 19444"/>
             </a:avLst>
           </a:prstGeom>
           <a:solidFill>
-            <a:srgbClr val="FFFFFF"/>
+            <a:srgbClr val="173F5F"/>
           </a:solidFill>
           <a:ln w="12700">
             <a:solidFill>
-              <a:srgbClr val="D6DEE6"/>
+              <a:srgbClr val="35556F"/>
             </a:solidFill>
           </a:ln>
         </p:spPr>
@@ -11179,24 +12273,61 @@
       </p:sp>
       <p:sp>
         <p:nvSpPr>
-          <p:cNvPr id="6" name="Oval 5"/>
+          <p:cNvPr id="6" name="TextBox 5"/>
+          <p:cNvSpPr txBox="1"/>
+          <p:nvPr/>
+        </p:nvSpPr>
+        <p:spPr>
+          <a:xfrm>
+            <a:off x="932688" y="3310128"/>
+            <a:ext cx="4480560" cy="658368"/>
+          </a:xfrm>
+          <a:prstGeom prst="rect">
+            <a:avLst/>
+          </a:prstGeom>
+          <a:noFill/>
+        </p:spPr>
+        <p:txBody>
+          <a:bodyPr wrap="square" lIns="27432" rIns="27432" tIns="27432" bIns="27432" anchor="ctr">
+            <a:spAutoFit/>
+          </a:bodyPr>
+          <a:lstStyle/>
+          <a:p>
+            <a:pPr algn="l"/>
+            <a:r>
+              <a:rPr sz="1400" b="1" i="0">
+                <a:solidFill>
+                  <a:srgbClr val="E1A83B"/>
+                </a:solidFill>
+                <a:latin typeface="Aptos"/>
+              </a:rPr>
+              <a:t>Capitolul 4 — evaluarea experimentală</a:t>
+            </a:r>
+          </a:p>
+        </p:txBody>
+      </p:sp>
+      <p:sp>
+        <p:nvSpPr>
+          <p:cNvPr id="7" name="Rounded Rectangle 6"/>
           <p:cNvSpPr/>
           <p:nvPr/>
         </p:nvSpPr>
         <p:spPr>
           <a:xfrm>
-            <a:off x="987552" y="2276856"/>
-            <a:ext cx="640080" cy="640080"/>
-          </a:xfrm>
-          <a:prstGeom prst="ellipse">
-            <a:avLst/>
+            <a:off x="6172200" y="1481328"/>
+            <a:ext cx="5358384" cy="932688"/>
+          </a:xfrm>
+          <a:prstGeom prst="roundRect">
+            <a:avLst>
+              <a:gd name="adj" fmla="val 13725"/>
+            </a:avLst>
           </a:prstGeom>
           <a:solidFill>
-            <a:srgbClr val="1F6FB4"/>
+            <a:srgbClr val="173F5F"/>
           </a:solidFill>
           <a:ln w="12700">
             <a:solidFill>
-              <a:srgbClr val="1F6FB4"/>
+              <a:srgbClr val="35556F"/>
             </a:solidFill>
           </a:ln>
         </p:spPr>
@@ -11224,14 +12355,14 @@
       </p:sp>
       <p:sp>
         <p:nvSpPr>
-          <p:cNvPr id="7" name="TextBox 6"/>
-          <p:cNvSpPr txBox="1"/>
-          <p:nvPr/>
-        </p:nvSpPr>
-        <p:spPr>
-          <a:xfrm>
-            <a:off x="987552" y="2276856"/>
-            <a:ext cx="640080" cy="640080"/>
+          <p:cNvPr id="8" name="TextBox 7"/>
+          <p:cNvSpPr txBox="1"/>
+          <p:nvPr/>
+        </p:nvSpPr>
+        <p:spPr>
+          <a:xfrm>
+            <a:off x="6492240" y="1481328"/>
+            <a:ext cx="502920" cy="932688"/>
           </a:xfrm>
           <a:prstGeom prst="rect">
             <a:avLst/>
@@ -11244,41 +12375,76 @@
           </a:bodyPr>
           <a:lstStyle/>
           <a:p>
-            <a:pPr algn="ctr"/>
-            <a:r>
-              <a:rPr sz="2200" b="1" i="0">
+            <a:pPr algn="l"/>
+            <a:r>
+              <a:rPr sz="1500" b="1" i="0">
+                <a:solidFill>
+                  <a:srgbClr val="1F6FB4"/>
+                </a:solidFill>
+                <a:latin typeface="Aptos"/>
+              </a:rPr>
+              <a:t>01</a:t>
+            </a:r>
+          </a:p>
+        </p:txBody>
+      </p:sp>
+      <p:sp>
+        <p:nvSpPr>
+          <p:cNvPr id="9" name="TextBox 8"/>
+          <p:cNvSpPr txBox="1"/>
+          <p:nvPr/>
+        </p:nvSpPr>
+        <p:spPr>
+          <a:xfrm>
+            <a:off x="7059168" y="1481328"/>
+            <a:ext cx="4206240" cy="932688"/>
+          </a:xfrm>
+          <a:prstGeom prst="rect">
+            <a:avLst/>
+          </a:prstGeom>
+          <a:noFill/>
+        </p:spPr>
+        <p:txBody>
+          <a:bodyPr wrap="square" lIns="27432" rIns="27432" tIns="27432" bIns="27432" anchor="ctr">
+            <a:spAutoFit/>
+          </a:bodyPr>
+          <a:lstStyle/>
+          <a:p>
+            <a:pPr algn="l"/>
+            <a:r>
+              <a:rPr sz="1600" b="1" i="0">
                 <a:solidFill>
                   <a:srgbClr val="FFFFFF"/>
                 </a:solidFill>
                 <a:latin typeface="Aptos"/>
               </a:rPr>
-              <a:t>A</a:t>
-            </a:r>
-          </a:p>
-        </p:txBody>
-      </p:sp>
-      <p:sp>
-        <p:nvSpPr>
-          <p:cNvPr id="8" name="Rounded Rectangle 7"/>
+              <a:t>Cum ar trebui generat SQL-ul?</a:t>
+            </a:r>
+          </a:p>
+        </p:txBody>
+      </p:sp>
+      <p:sp>
+        <p:nvSpPr>
+          <p:cNvPr id="10" name="Rounded Rectangle 9"/>
           <p:cNvSpPr/>
           <p:nvPr/>
         </p:nvSpPr>
         <p:spPr>
           <a:xfrm>
-            <a:off x="1764792" y="2377440"/>
-            <a:ext cx="1755648" cy="310896"/>
+            <a:off x="6172200" y="2651760"/>
+            <a:ext cx="5358384" cy="932688"/>
           </a:xfrm>
           <a:prstGeom prst="roundRect">
             <a:avLst>
-              <a:gd name="adj" fmla="val 50000"/>
+              <a:gd name="adj" fmla="val 13725"/>
             </a:avLst>
           </a:prstGeom>
           <a:solidFill>
-            <a:srgbClr val="E8F2FA"/>
+            <a:srgbClr val="173F5F"/>
           </a:solidFill>
           <a:ln w="12700">
             <a:solidFill>
-              <a:srgbClr val="E8F2FA"/>
+              <a:srgbClr val="35556F"/>
             </a:solidFill>
           </a:ln>
         </p:spPr>
@@ -11306,14 +12472,14 @@
       </p:sp>
       <p:sp>
         <p:nvSpPr>
-          <p:cNvPr id="9" name="TextBox 8"/>
-          <p:cNvSpPr txBox="1"/>
-          <p:nvPr/>
-        </p:nvSpPr>
-        <p:spPr>
-          <a:xfrm>
-            <a:off x="1764792" y="2386584"/>
-            <a:ext cx="1755648" cy="256032"/>
+          <p:cNvPr id="11" name="TextBox 10"/>
+          <p:cNvSpPr txBox="1"/>
+          <p:nvPr/>
+        </p:nvSpPr>
+        <p:spPr>
+          <a:xfrm>
+            <a:off x="6492240" y="2651760"/>
+            <a:ext cx="502920" cy="932688"/>
           </a:xfrm>
           <a:prstGeom prst="rect">
             <a:avLst/>
@@ -11326,121 +12492,50 @@
           </a:bodyPr>
           <a:lstStyle/>
           <a:p>
-            <a:pPr algn="ctr"/>
-            <a:r>
-              <a:rPr sz="1000" b="1" i="0">
-                <a:solidFill>
-                  <a:srgbClr val="1F6FB4"/>
-                </a:solidFill>
-                <a:latin typeface="Aptos"/>
-              </a:rPr>
-              <a:t>REPER CLOUD</a:t>
-            </a:r>
-          </a:p>
-        </p:txBody>
-      </p:sp>
-      <p:sp>
-        <p:nvSpPr>
-          <p:cNvPr id="10" name="TextBox 9"/>
-          <p:cNvSpPr txBox="1"/>
-          <p:nvPr/>
-        </p:nvSpPr>
-        <p:spPr>
-          <a:xfrm>
-            <a:off x="1024128" y="3182112"/>
-            <a:ext cx="2697480" cy="384048"/>
-          </a:xfrm>
-          <a:prstGeom prst="rect">
-            <a:avLst/>
-          </a:prstGeom>
-          <a:noFill/>
-        </p:spPr>
-        <p:txBody>
-          <a:bodyPr wrap="square" lIns="27432" rIns="27432" tIns="27432" bIns="27432" anchor="t">
-            <a:spAutoFit/>
-          </a:bodyPr>
-          <a:lstStyle/>
-          <a:p>
             <a:pPr algn="l"/>
             <a:r>
-              <a:rPr sz="2000" b="1" i="0">
-                <a:solidFill>
-                  <a:srgbClr val="102A43"/>
-                </a:solidFill>
-                <a:latin typeface="Aptos"/>
-              </a:rPr>
-              <a:t>Apel unic</a:t>
-            </a:r>
-          </a:p>
-        </p:txBody>
-      </p:sp>
-      <p:sp>
-        <p:nvSpPr>
-          <p:cNvPr id="11" name="TextBox 10"/>
-          <p:cNvSpPr txBox="1"/>
-          <p:nvPr/>
-        </p:nvSpPr>
-        <p:spPr>
-          <a:xfrm>
-            <a:off x="1024128" y="3749039"/>
-            <a:ext cx="2697480" cy="713232"/>
-          </a:xfrm>
-          <a:prstGeom prst="rect">
-            <a:avLst/>
-          </a:prstGeom>
-          <a:noFill/>
-        </p:spPr>
-        <p:txBody>
-          <a:bodyPr wrap="square" lIns="27432" rIns="27432" tIns="27432" bIns="27432" anchor="t">
+              <a:rPr sz="1500" b="1" i="0">
+                <a:solidFill>
+                  <a:srgbClr val="C1483A"/>
+                </a:solidFill>
+                <a:latin typeface="Aptos"/>
+              </a:rPr>
+              <a:t>02</a:t>
+            </a:r>
+          </a:p>
+        </p:txBody>
+      </p:sp>
+      <p:sp>
+        <p:nvSpPr>
+          <p:cNvPr id="12" name="TextBox 11"/>
+          <p:cNvSpPr txBox="1"/>
+          <p:nvPr/>
+        </p:nvSpPr>
+        <p:spPr>
+          <a:xfrm>
+            <a:off x="7059168" y="2651760"/>
+            <a:ext cx="4206240" cy="932688"/>
+          </a:xfrm>
+          <a:prstGeom prst="rect">
+            <a:avLst/>
+          </a:prstGeom>
+          <a:noFill/>
+        </p:spPr>
+        <p:txBody>
+          <a:bodyPr wrap="square" lIns="27432" rIns="27432" tIns="27432" bIns="27432" anchor="ctr">
             <a:spAutoFit/>
           </a:bodyPr>
           <a:lstStyle/>
           <a:p>
             <a:pPr algn="l"/>
             <a:r>
-              <a:rPr sz="1400" b="0" i="0">
-                <a:solidFill>
-                  <a:srgbClr val="647487"/>
-                </a:solidFill>
-                <a:latin typeface="Aptos"/>
-              </a:rPr>
-              <a:t>Schema completă în prompt
-Un singur răspuns</a:t>
-            </a:r>
-          </a:p>
-        </p:txBody>
-      </p:sp>
-      <p:sp>
-        <p:nvSpPr>
-          <p:cNvPr id="12" name="TextBox 11"/>
-          <p:cNvSpPr txBox="1"/>
-          <p:nvPr/>
-        </p:nvSpPr>
-        <p:spPr>
-          <a:xfrm>
-            <a:off x="1024128" y="4663440"/>
-            <a:ext cx="2697480" cy="274320"/>
-          </a:xfrm>
-          <a:prstGeom prst="rect">
-            <a:avLst/>
-          </a:prstGeom>
-          <a:noFill/>
-        </p:spPr>
-        <p:txBody>
-          <a:bodyPr wrap="square" lIns="27432" rIns="27432" tIns="27432" bIns="27432" anchor="t">
-            <a:spAutoFit/>
-          </a:bodyPr>
-          <a:lstStyle/>
-          <a:p>
-            <a:pPr algn="l"/>
-            <a:r>
-              <a:rPr sz="1300" b="1" i="0">
-                <a:solidFill>
-                  <a:srgbClr val="1F6FB4"/>
-                </a:solidFill>
-                <a:latin typeface="Aptos"/>
-              </a:rPr>
-              <a:t>→ SQL</a:t>
+              <a:rPr sz="1600" b="1" i="0">
+                <a:solidFill>
+                  <a:srgbClr val="FFFFFF"/>
+                </a:solidFill>
+                <a:latin typeface="Aptos"/>
+              </a:rPr>
+              <a:t>Cât costă fiecare variantă?</a:t>
             </a:r>
           </a:p>
         </p:txBody>
@@ -11453,20 +12548,20 @@
         </p:nvSpPr>
         <p:spPr>
           <a:xfrm>
-            <a:off x="4535424" y="2011680"/>
-            <a:ext cx="3346704" cy="3127248"/>
+            <a:off x="6172200" y="3822191"/>
+            <a:ext cx="5358384" cy="932688"/>
           </a:xfrm>
           <a:prstGeom prst="roundRect">
             <a:avLst>
-              <a:gd name="adj" fmla="val 4093"/>
+              <a:gd name="adj" fmla="val 13725"/>
             </a:avLst>
           </a:prstGeom>
           <a:solidFill>
-            <a:srgbClr val="FFFFFF"/>
+            <a:srgbClr val="173F5F"/>
           </a:solidFill>
           <a:ln w="12700">
             <a:solidFill>
-              <a:srgbClr val="D6DEE6"/>
+              <a:srgbClr val="35556F"/>
             </a:solidFill>
           </a:ln>
         </p:spPr>
@@ -11494,24 +12589,96 @@
       </p:sp>
       <p:sp>
         <p:nvSpPr>
-          <p:cNvPr id="14" name="Oval 13"/>
+          <p:cNvPr id="14" name="TextBox 13"/>
+          <p:cNvSpPr txBox="1"/>
+          <p:nvPr/>
+        </p:nvSpPr>
+        <p:spPr>
+          <a:xfrm>
+            <a:off x="6492240" y="3822191"/>
+            <a:ext cx="502920" cy="932688"/>
+          </a:xfrm>
+          <a:prstGeom prst="rect">
+            <a:avLst/>
+          </a:prstGeom>
+          <a:noFill/>
+        </p:spPr>
+        <p:txBody>
+          <a:bodyPr wrap="square" lIns="27432" rIns="27432" tIns="27432" bIns="27432" anchor="ctr">
+            <a:spAutoFit/>
+          </a:bodyPr>
+          <a:lstStyle/>
+          <a:p>
+            <a:pPr algn="l"/>
+            <a:r>
+              <a:rPr sz="1500" b="1" i="0">
+                <a:solidFill>
+                  <a:srgbClr val="2E8B57"/>
+                </a:solidFill>
+                <a:latin typeface="Aptos"/>
+              </a:rPr>
+              <a:t>03</a:t>
+            </a:r>
+          </a:p>
+        </p:txBody>
+      </p:sp>
+      <p:sp>
+        <p:nvSpPr>
+          <p:cNvPr id="15" name="TextBox 14"/>
+          <p:cNvSpPr txBox="1"/>
+          <p:nvPr/>
+        </p:nvSpPr>
+        <p:spPr>
+          <a:xfrm>
+            <a:off x="7059168" y="3822191"/>
+            <a:ext cx="4206240" cy="932688"/>
+          </a:xfrm>
+          <a:prstGeom prst="rect">
+            <a:avLst/>
+          </a:prstGeom>
+          <a:noFill/>
+        </p:spPr>
+        <p:txBody>
+          <a:bodyPr wrap="square" lIns="27432" rIns="27432" tIns="27432" bIns="27432" anchor="ctr">
+            <a:spAutoFit/>
+          </a:bodyPr>
+          <a:lstStyle/>
+          <a:p>
+            <a:pPr algn="l"/>
+            <a:r>
+              <a:rPr sz="1600" b="1" i="0">
+                <a:solidFill>
+                  <a:srgbClr val="FFFFFF"/>
+                </a:solidFill>
+                <a:latin typeface="Aptos"/>
+              </a:rPr>
+              <a:t>Pe ce date se poate măsura credibil?</a:t>
+            </a:r>
+          </a:p>
+        </p:txBody>
+      </p:sp>
+      <p:sp>
+        <p:nvSpPr>
+          <p:cNvPr id="16" name="Rounded Rectangle 15"/>
           <p:cNvSpPr/>
           <p:nvPr/>
         </p:nvSpPr>
         <p:spPr>
           <a:xfrm>
-            <a:off x="4809744" y="2276856"/>
-            <a:ext cx="640080" cy="640080"/>
-          </a:xfrm>
-          <a:prstGeom prst="ellipse">
-            <a:avLst/>
+            <a:off x="6172200" y="4992624"/>
+            <a:ext cx="5358384" cy="932688"/>
+          </a:xfrm>
+          <a:prstGeom prst="roundRect">
+            <a:avLst>
+              <a:gd name="adj" fmla="val 13725"/>
+            </a:avLst>
           </a:prstGeom>
           <a:solidFill>
-            <a:srgbClr val="C1483A"/>
+            <a:srgbClr val="173F5F"/>
           </a:solidFill>
           <a:ln w="12700">
             <a:solidFill>
-              <a:srgbClr val="C1483A"/>
+              <a:srgbClr val="35556F"/>
             </a:solidFill>
           </a:ln>
         </p:spPr>
@@ -11539,14 +12706,14 @@
       </p:sp>
       <p:sp>
         <p:nvSpPr>
-          <p:cNvPr id="15" name="TextBox 14"/>
-          <p:cNvSpPr txBox="1"/>
-          <p:nvPr/>
-        </p:nvSpPr>
-        <p:spPr>
-          <a:xfrm>
-            <a:off x="4809744" y="2276856"/>
-            <a:ext cx="640080" cy="640080"/>
+          <p:cNvPr id="17" name="TextBox 16"/>
+          <p:cNvSpPr txBox="1"/>
+          <p:nvPr/>
+        </p:nvSpPr>
+        <p:spPr>
+          <a:xfrm>
+            <a:off x="6492240" y="4992624"/>
+            <a:ext cx="502920" cy="932688"/>
           </a:xfrm>
           <a:prstGeom prst="rect">
             <a:avLst/>
@@ -11559,132 +12726,50 @@
           </a:bodyPr>
           <a:lstStyle/>
           <a:p>
-            <a:pPr algn="ctr"/>
-            <a:r>
-              <a:rPr sz="2200" b="1" i="0">
+            <a:pPr algn="l"/>
+            <a:r>
+              <a:rPr sz="1500" b="1" i="0">
+                <a:solidFill>
+                  <a:srgbClr val="E1A83B"/>
+                </a:solidFill>
+                <a:latin typeface="Aptos"/>
+              </a:rPr>
+              <a:t>04</a:t>
+            </a:r>
+          </a:p>
+        </p:txBody>
+      </p:sp>
+      <p:sp>
+        <p:nvSpPr>
+          <p:cNvPr id="18" name="TextBox 17"/>
+          <p:cNvSpPr txBox="1"/>
+          <p:nvPr/>
+        </p:nvSpPr>
+        <p:spPr>
+          <a:xfrm>
+            <a:off x="7059168" y="4992624"/>
+            <a:ext cx="4206240" cy="932688"/>
+          </a:xfrm>
+          <a:prstGeom prst="rect">
+            <a:avLst/>
+          </a:prstGeom>
+          <a:noFill/>
+        </p:spPr>
+        <p:txBody>
+          <a:bodyPr wrap="square" lIns="27432" rIns="27432" tIns="27432" bIns="27432" anchor="ctr">
+            <a:spAutoFit/>
+          </a:bodyPr>
+          <a:lstStyle/>
+          <a:p>
+            <a:pPr algn="l"/>
+            <a:r>
+              <a:rPr sz="1600" b="1" i="0">
                 <a:solidFill>
                   <a:srgbClr val="FFFFFF"/>
                 </a:solidFill>
                 <a:latin typeface="Aptos"/>
               </a:rPr>
-              <a:t>B</a:t>
-            </a:r>
-          </a:p>
-        </p:txBody>
-      </p:sp>
-      <p:sp>
-        <p:nvSpPr>
-          <p:cNvPr id="16" name="Rounded Rectangle 15"/>
-          <p:cNvSpPr/>
-          <p:nvPr/>
-        </p:nvSpPr>
-        <p:spPr>
-          <a:xfrm>
-            <a:off x="5586983" y="2377440"/>
-            <a:ext cx="1755648" cy="310896"/>
-          </a:xfrm>
-          <a:prstGeom prst="roundRect">
-            <a:avLst>
-              <a:gd name="adj" fmla="val 50000"/>
-            </a:avLst>
-          </a:prstGeom>
-          <a:solidFill>
-            <a:srgbClr val="FAECE9"/>
-          </a:solidFill>
-          <a:ln w="12700">
-            <a:solidFill>
-              <a:srgbClr val="FAECE9"/>
-            </a:solidFill>
-          </a:ln>
-        </p:spPr>
-        <p:style>
-          <a:lnRef idx="1">
-            <a:schemeClr val="accent1"/>
-          </a:lnRef>
-          <a:fillRef idx="3">
-            <a:schemeClr val="accent1"/>
-          </a:fillRef>
-          <a:effectRef idx="2">
-            <a:schemeClr val="accent1"/>
-          </a:effectRef>
-          <a:fontRef idx="minor">
-            <a:schemeClr val="lt1"/>
-          </a:fontRef>
-        </p:style>
-        <p:txBody>
-          <a:bodyPr rtlCol="0" anchor="ctr"/>
-          <a:lstStyle/>
-          <a:p>
-            <a:pPr algn="ctr"/>
-          </a:p>
-        </p:txBody>
-      </p:sp>
-      <p:sp>
-        <p:nvSpPr>
-          <p:cNvPr id="17" name="TextBox 16"/>
-          <p:cNvSpPr txBox="1"/>
-          <p:nvPr/>
-        </p:nvSpPr>
-        <p:spPr>
-          <a:xfrm>
-            <a:off x="5586983" y="2386584"/>
-            <a:ext cx="1755648" cy="256032"/>
-          </a:xfrm>
-          <a:prstGeom prst="rect">
-            <a:avLst/>
-          </a:prstGeom>
-          <a:noFill/>
-        </p:spPr>
-        <p:txBody>
-          <a:bodyPr wrap="square" lIns="27432" rIns="27432" tIns="27432" bIns="27432" anchor="ctr">
-            <a:spAutoFit/>
-          </a:bodyPr>
-          <a:lstStyle/>
-          <a:p>
-            <a:pPr algn="ctr"/>
-            <a:r>
-              <a:rPr sz="1000" b="1" i="0">
-                <a:solidFill>
-                  <a:srgbClr val="C1483A"/>
-                </a:solidFill>
-                <a:latin typeface="Aptos"/>
-              </a:rPr>
-              <a:t>CONFIGURAȚIA STUDIATĂ</a:t>
-            </a:r>
-          </a:p>
-        </p:txBody>
-      </p:sp>
-      <p:sp>
-        <p:nvSpPr>
-          <p:cNvPr id="18" name="TextBox 17"/>
-          <p:cNvSpPr txBox="1"/>
-          <p:nvPr/>
-        </p:nvSpPr>
-        <p:spPr>
-          <a:xfrm>
-            <a:off x="4846320" y="3182112"/>
-            <a:ext cx="2697480" cy="384048"/>
-          </a:xfrm>
-          <a:prstGeom prst="rect">
-            <a:avLst/>
-          </a:prstGeom>
-          <a:noFill/>
-        </p:spPr>
-        <p:txBody>
-          <a:bodyPr wrap="square" lIns="27432" rIns="27432" tIns="27432" bIns="27432" anchor="t">
-            <a:spAutoFit/>
-          </a:bodyPr>
-          <a:lstStyle/>
-          <a:p>
-            <a:pPr algn="l"/>
-            <a:r>
-              <a:rPr sz="2000" b="1" i="0">
-                <a:solidFill>
-                  <a:srgbClr val="102A43"/>
-                </a:solidFill>
-                <a:latin typeface="Aptos"/>
-              </a:rPr>
-              <a:t>Agent MCP</a:t>
+              <a:t>Ce face sistemul când întrebarea e ambiguă?</a:t>
             </a:r>
           </a:p>
         </p:txBody>
@@ -11692,427 +12777,6 @@
       <p:sp>
         <p:nvSpPr>
           <p:cNvPr id="19" name="TextBox 18"/>
-          <p:cNvSpPr txBox="1"/>
-          <p:nvPr/>
-        </p:nvSpPr>
-        <p:spPr>
-          <a:xfrm>
-            <a:off x="4846320" y="3749039"/>
-            <a:ext cx="2697480" cy="713232"/>
-          </a:xfrm>
-          <a:prstGeom prst="rect">
-            <a:avLst/>
-          </a:prstGeom>
-          <a:noFill/>
-        </p:spPr>
-        <p:txBody>
-          <a:bodyPr wrap="square" lIns="27432" rIns="27432" tIns="27432" bIns="27432" anchor="t">
-            <a:spAutoFit/>
-          </a:bodyPr>
-          <a:lstStyle/>
-          <a:p>
-            <a:pPr algn="l"/>
-            <a:r>
-              <a:rPr sz="1400" b="0" i="0">
-                <a:solidFill>
-                  <a:srgbClr val="647487"/>
-                </a:solidFill>
-                <a:latin typeface="Aptos"/>
-              </a:rPr>
-              <a:t>Fără schemă inițială
-Explorare prin unelte</a:t>
-            </a:r>
-          </a:p>
-        </p:txBody>
-      </p:sp>
-      <p:sp>
-        <p:nvSpPr>
-          <p:cNvPr id="20" name="TextBox 19"/>
-          <p:cNvSpPr txBox="1"/>
-          <p:nvPr/>
-        </p:nvSpPr>
-        <p:spPr>
-          <a:xfrm>
-            <a:off x="4846320" y="4663440"/>
-            <a:ext cx="2697480" cy="274320"/>
-          </a:xfrm>
-          <a:prstGeom prst="rect">
-            <a:avLst/>
-          </a:prstGeom>
-          <a:noFill/>
-        </p:spPr>
-        <p:txBody>
-          <a:bodyPr wrap="square" lIns="27432" rIns="27432" tIns="27432" bIns="27432" anchor="t">
-            <a:spAutoFit/>
-          </a:bodyPr>
-          <a:lstStyle/>
-          <a:p>
-            <a:pPr algn="l"/>
-            <a:r>
-              <a:rPr sz="1300" b="1" i="0">
-                <a:solidFill>
-                  <a:srgbClr val="C1483A"/>
-                </a:solidFill>
-                <a:latin typeface="Aptos"/>
-              </a:rPr>
-              <a:t>→ SQL</a:t>
-            </a:r>
-          </a:p>
-        </p:txBody>
-      </p:sp>
-      <p:sp>
-        <p:nvSpPr>
-          <p:cNvPr id="21" name="Rounded Rectangle 20"/>
-          <p:cNvSpPr/>
-          <p:nvPr/>
-        </p:nvSpPr>
-        <p:spPr>
-          <a:xfrm>
-            <a:off x="8357615" y="2011680"/>
-            <a:ext cx="3346704" cy="3127248"/>
-          </a:xfrm>
-          <a:prstGeom prst="roundRect">
-            <a:avLst>
-              <a:gd name="adj" fmla="val 4093"/>
-            </a:avLst>
-          </a:prstGeom>
-          <a:solidFill>
-            <a:srgbClr val="FFFFFF"/>
-          </a:solidFill>
-          <a:ln w="12700">
-            <a:solidFill>
-              <a:srgbClr val="D6DEE6"/>
-            </a:solidFill>
-          </a:ln>
-        </p:spPr>
-        <p:style>
-          <a:lnRef idx="1">
-            <a:schemeClr val="accent1"/>
-          </a:lnRef>
-          <a:fillRef idx="3">
-            <a:schemeClr val="accent1"/>
-          </a:fillRef>
-          <a:effectRef idx="2">
-            <a:schemeClr val="accent1"/>
-          </a:effectRef>
-          <a:fontRef idx="minor">
-            <a:schemeClr val="lt1"/>
-          </a:fontRef>
-        </p:style>
-        <p:txBody>
-          <a:bodyPr rtlCol="0" anchor="ctr"/>
-          <a:lstStyle/>
-          <a:p>
-            <a:pPr algn="ctr"/>
-          </a:p>
-        </p:txBody>
-      </p:sp>
-      <p:sp>
-        <p:nvSpPr>
-          <p:cNvPr id="22" name="Oval 21"/>
-          <p:cNvSpPr/>
-          <p:nvPr/>
-        </p:nvSpPr>
-        <p:spPr>
-          <a:xfrm>
-            <a:off x="8631936" y="2276856"/>
-            <a:ext cx="640080" cy="640080"/>
-          </a:xfrm>
-          <a:prstGeom prst="ellipse">
-            <a:avLst/>
-          </a:prstGeom>
-          <a:solidFill>
-            <a:srgbClr val="2E8B57"/>
-          </a:solidFill>
-          <a:ln w="12700">
-            <a:solidFill>
-              <a:srgbClr val="2E8B57"/>
-            </a:solidFill>
-          </a:ln>
-        </p:spPr>
-        <p:style>
-          <a:lnRef idx="1">
-            <a:schemeClr val="accent1"/>
-          </a:lnRef>
-          <a:fillRef idx="3">
-            <a:schemeClr val="accent1"/>
-          </a:fillRef>
-          <a:effectRef idx="2">
-            <a:schemeClr val="accent1"/>
-          </a:effectRef>
-          <a:fontRef idx="minor">
-            <a:schemeClr val="lt1"/>
-          </a:fontRef>
-        </p:style>
-        <p:txBody>
-          <a:bodyPr rtlCol="0" anchor="ctr"/>
-          <a:lstStyle/>
-          <a:p>
-            <a:pPr algn="ctr"/>
-          </a:p>
-        </p:txBody>
-      </p:sp>
-      <p:sp>
-        <p:nvSpPr>
-          <p:cNvPr id="23" name="TextBox 22"/>
-          <p:cNvSpPr txBox="1"/>
-          <p:nvPr/>
-        </p:nvSpPr>
-        <p:spPr>
-          <a:xfrm>
-            <a:off x="8631936" y="2276856"/>
-            <a:ext cx="640080" cy="640080"/>
-          </a:xfrm>
-          <a:prstGeom prst="rect">
-            <a:avLst/>
-          </a:prstGeom>
-          <a:noFill/>
-        </p:spPr>
-        <p:txBody>
-          <a:bodyPr wrap="square" lIns="27432" rIns="27432" tIns="27432" bIns="27432" anchor="ctr">
-            <a:spAutoFit/>
-          </a:bodyPr>
-          <a:lstStyle/>
-          <a:p>
-            <a:pPr algn="ctr"/>
-            <a:r>
-              <a:rPr sz="2200" b="1" i="0">
-                <a:solidFill>
-                  <a:srgbClr val="FFFFFF"/>
-                </a:solidFill>
-                <a:latin typeface="Aptos"/>
-              </a:rPr>
-              <a:t>C</a:t>
-            </a:r>
-          </a:p>
-        </p:txBody>
-      </p:sp>
-      <p:sp>
-        <p:nvSpPr>
-          <p:cNvPr id="24" name="Rounded Rectangle 23"/>
-          <p:cNvSpPr/>
-          <p:nvPr/>
-        </p:nvSpPr>
-        <p:spPr>
-          <a:xfrm>
-            <a:off x="9409176" y="2377440"/>
-            <a:ext cx="1755648" cy="310896"/>
-          </a:xfrm>
-          <a:prstGeom prst="roundRect">
-            <a:avLst>
-              <a:gd name="adj" fmla="val 50000"/>
-            </a:avLst>
-          </a:prstGeom>
-          <a:solidFill>
-            <a:srgbClr val="E8F5EE"/>
-          </a:solidFill>
-          <a:ln w="12700">
-            <a:solidFill>
-              <a:srgbClr val="E8F5EE"/>
-            </a:solidFill>
-          </a:ln>
-        </p:spPr>
-        <p:style>
-          <a:lnRef idx="1">
-            <a:schemeClr val="accent1"/>
-          </a:lnRef>
-          <a:fillRef idx="3">
-            <a:schemeClr val="accent1"/>
-          </a:fillRef>
-          <a:effectRef idx="2">
-            <a:schemeClr val="accent1"/>
-          </a:effectRef>
-          <a:fontRef idx="minor">
-            <a:schemeClr val="lt1"/>
-          </a:fontRef>
-        </p:style>
-        <p:txBody>
-          <a:bodyPr rtlCol="0" anchor="ctr"/>
-          <a:lstStyle/>
-          <a:p>
-            <a:pPr algn="ctr"/>
-          </a:p>
-        </p:txBody>
-      </p:sp>
-      <p:sp>
-        <p:nvSpPr>
-          <p:cNvPr id="25" name="TextBox 24"/>
-          <p:cNvSpPr txBox="1"/>
-          <p:nvPr/>
-        </p:nvSpPr>
-        <p:spPr>
-          <a:xfrm>
-            <a:off x="9409176" y="2386584"/>
-            <a:ext cx="1755648" cy="256032"/>
-          </a:xfrm>
-          <a:prstGeom prst="rect">
-            <a:avLst/>
-          </a:prstGeom>
-          <a:noFill/>
-        </p:spPr>
-        <p:txBody>
-          <a:bodyPr wrap="square" lIns="27432" rIns="27432" tIns="27432" bIns="27432" anchor="ctr">
-            <a:spAutoFit/>
-          </a:bodyPr>
-          <a:lstStyle/>
-          <a:p>
-            <a:pPr algn="ctr"/>
-            <a:r>
-              <a:rPr sz="1000" b="1" i="0">
-                <a:solidFill>
-                  <a:srgbClr val="2E8B57"/>
-                </a:solidFill>
-                <a:latin typeface="Aptos"/>
-              </a:rPr>
-              <a:t>REPER LOCAL</a:t>
-            </a:r>
-          </a:p>
-        </p:txBody>
-      </p:sp>
-      <p:sp>
-        <p:nvSpPr>
-          <p:cNvPr id="26" name="TextBox 25"/>
-          <p:cNvSpPr txBox="1"/>
-          <p:nvPr/>
-        </p:nvSpPr>
-        <p:spPr>
-          <a:xfrm>
-            <a:off x="8668511" y="3182112"/>
-            <a:ext cx="2697480" cy="384048"/>
-          </a:xfrm>
-          <a:prstGeom prst="rect">
-            <a:avLst/>
-          </a:prstGeom>
-          <a:noFill/>
-        </p:spPr>
-        <p:txBody>
-          <a:bodyPr wrap="square" lIns="27432" rIns="27432" tIns="27432" bIns="27432" anchor="t">
-            <a:spAutoFit/>
-          </a:bodyPr>
-          <a:lstStyle/>
-          <a:p>
-            <a:pPr algn="l"/>
-            <a:r>
-              <a:rPr sz="2000" b="1" i="0">
-                <a:solidFill>
-                  <a:srgbClr val="102A43"/>
-                </a:solidFill>
-                <a:latin typeface="Aptos"/>
-              </a:rPr>
-              <a:t>Model local</a:t>
-            </a:r>
-          </a:p>
-        </p:txBody>
-      </p:sp>
-      <p:sp>
-        <p:nvSpPr>
-          <p:cNvPr id="27" name="TextBox 26"/>
-          <p:cNvSpPr txBox="1"/>
-          <p:nvPr/>
-        </p:nvSpPr>
-        <p:spPr>
-          <a:xfrm>
-            <a:off x="8668511" y="3749039"/>
-            <a:ext cx="2697480" cy="713232"/>
-          </a:xfrm>
-          <a:prstGeom prst="rect">
-            <a:avLst/>
-          </a:prstGeom>
-          <a:noFill/>
-        </p:spPr>
-        <p:txBody>
-          <a:bodyPr wrap="square" lIns="27432" rIns="27432" tIns="27432" bIns="27432" anchor="t">
-            <a:spAutoFit/>
-          </a:bodyPr>
-          <a:lstStyle/>
-          <a:p>
-            <a:pPr algn="l"/>
-            <a:r>
-              <a:rPr sz="1400" b="0" i="0">
-                <a:solidFill>
-                  <a:srgbClr val="647487"/>
-                </a:solidFill>
-                <a:latin typeface="Aptos"/>
-              </a:rPr>
-              <a:t>Același prompt ca A
-Rulare pe GPU personal</a:t>
-            </a:r>
-          </a:p>
-        </p:txBody>
-      </p:sp>
-      <p:sp>
-        <p:nvSpPr>
-          <p:cNvPr id="28" name="TextBox 27"/>
-          <p:cNvSpPr txBox="1"/>
-          <p:nvPr/>
-        </p:nvSpPr>
-        <p:spPr>
-          <a:xfrm>
-            <a:off x="8668511" y="4663440"/>
-            <a:ext cx="2697480" cy="274320"/>
-          </a:xfrm>
-          <a:prstGeom prst="rect">
-            <a:avLst/>
-          </a:prstGeom>
-          <a:noFill/>
-        </p:spPr>
-        <p:txBody>
-          <a:bodyPr wrap="square" lIns="27432" rIns="27432" tIns="27432" bIns="27432" anchor="t">
-            <a:spAutoFit/>
-          </a:bodyPr>
-          <a:lstStyle/>
-          <a:p>
-            <a:pPr algn="l"/>
-            <a:r>
-              <a:rPr sz="1300" b="1" i="0">
-                <a:solidFill>
-                  <a:srgbClr val="2E8B57"/>
-                </a:solidFill>
-                <a:latin typeface="Aptos"/>
-              </a:rPr>
-              <a:t>→ SQL</a:t>
-            </a:r>
-          </a:p>
-        </p:txBody>
-      </p:sp>
-      <p:sp>
-        <p:nvSpPr>
-          <p:cNvPr id="29" name="TextBox 28"/>
-          <p:cNvSpPr txBox="1"/>
-          <p:nvPr/>
-        </p:nvSpPr>
-        <p:spPr>
-          <a:xfrm>
-            <a:off x="2084831" y="5715000"/>
-            <a:ext cx="8010144" cy="347472"/>
-          </a:xfrm>
-          <a:prstGeom prst="rect">
-            <a:avLst/>
-          </a:prstGeom>
-          <a:noFill/>
-        </p:spPr>
-        <p:txBody>
-          <a:bodyPr wrap="square" lIns="27432" rIns="27432" tIns="27432" bIns="27432" anchor="t">
-            <a:spAutoFit/>
-          </a:bodyPr>
-          <a:lstStyle/>
-          <a:p>
-            <a:pPr algn="ctr"/>
-            <a:r>
-              <a:rPr sz="1700" b="1" i="0">
-                <a:solidFill>
-                  <a:srgbClr val="102A43"/>
-                </a:solidFill>
-                <a:latin typeface="Aptos"/>
-              </a:rPr>
-              <a:t>Între configurațiile comparate se modifică o singură variabilă.</a:t>
-            </a:r>
-          </a:p>
-        </p:txBody>
-      </p:sp>
-      <p:sp>
-        <p:nvSpPr>
-          <p:cNvPr id="30" name="TextBox 29"/>
           <p:cNvSpPr txBox="1"/>
           <p:nvPr/>
         </p:nvSpPr>
@@ -12136,7 +12800,7 @@
             <a:r>
               <a:rPr sz="900" b="1" i="0">
                 <a:solidFill>
-                  <a:srgbClr val="647487"/>
+                  <a:srgbClr val="A8B6C4"/>
                 </a:solidFill>
                 <a:latin typeface="Aptos"/>
               </a:rPr>
@@ -12201,7 +12865,7 @@
                 </a:solidFill>
                 <a:latin typeface="Aptos"/>
               </a:rPr>
-              <a:t>METODĂ</a:t>
+              <a:t>ÎNTREBAREA DE CERCETARE</a:t>
             </a:r>
           </a:p>
         </p:txBody>
@@ -12236,25 +12900,60 @@
                 </a:solidFill>
                 <a:latin typeface="Aptos"/>
               </a:rPr>
-              <a:t>Corectitudinea se măsoară prin execuție</a:t>
-            </a:r>
-          </a:p>
-        </p:txBody>
-      </p:sp>
-      <p:sp>
-        <p:nvSpPr>
-          <p:cNvPr id="4" name="Rounded Rectangle 3"/>
+              <a:t>Trei moduri de a genera SQL</a:t>
+            </a:r>
+          </a:p>
+        </p:txBody>
+      </p:sp>
+      <p:sp>
+        <p:nvSpPr>
+          <p:cNvPr id="4" name="TextBox 3"/>
+          <p:cNvSpPr txBox="1"/>
+          <p:nvPr/>
+        </p:nvSpPr>
+        <p:spPr>
+          <a:xfrm>
+            <a:off x="658368" y="1261872"/>
+            <a:ext cx="8869680" cy="475488"/>
+          </a:xfrm>
+          <a:prstGeom prst="rect">
+            <a:avLst/>
+          </a:prstGeom>
+          <a:noFill/>
+        </p:spPr>
+        <p:txBody>
+          <a:bodyPr wrap="square" lIns="27432" rIns="27432" tIns="27432" bIns="27432" anchor="t">
+            <a:spAutoFit/>
+          </a:bodyPr>
+          <a:lstStyle/>
+          <a:p>
+            <a:pPr algn="l"/>
+            <a:r>
+              <a:rPr sz="2300" b="1" i="0">
+                <a:solidFill>
+                  <a:srgbClr val="102A43"/>
+                </a:solidFill>
+                <a:latin typeface="Aptos"/>
+              </a:rPr>
+              <a:t>Ajută autonomia agentului sau doar adaugă complexitate?</a:t>
+            </a:r>
+          </a:p>
+        </p:txBody>
+      </p:sp>
+      <p:sp>
+        <p:nvSpPr>
+          <p:cNvPr id="5" name="Rounded Rectangle 4"/>
           <p:cNvSpPr/>
           <p:nvPr/>
         </p:nvSpPr>
         <p:spPr>
           <a:xfrm>
-            <a:off x="640080" y="1280160"/>
-            <a:ext cx="6949440" cy="4526280"/>
+            <a:off x="713232" y="2011680"/>
+            <a:ext cx="3346704" cy="3127248"/>
           </a:xfrm>
           <a:prstGeom prst="roundRect">
             <a:avLst>
-              <a:gd name="adj" fmla="val 2828"/>
+              <a:gd name="adj" fmla="val 4093"/>
             </a:avLst>
           </a:prstGeom>
           <a:solidFill>
@@ -12288,44 +12987,288 @@
           </a:p>
         </p:txBody>
       </p:sp>
-      <p:pic>
-        <p:nvPicPr>
-          <p:cNvPr id="5" name="Picture 4" descr="fig_harness.png"/>
-          <p:cNvPicPr>
-            <a:picLocks noChangeAspect="1"/>
-          </p:cNvPicPr>
-          <p:nvPr/>
-        </p:nvPicPr>
-        <p:blipFill>
-          <a:blip r:embed="rId2"/>
-          <a:stretch>
-            <a:fillRect/>
-          </a:stretch>
-        </p:blipFill>
-        <p:spPr>
-          <a:xfrm>
-            <a:off x="1098566" y="1408176"/>
-            <a:ext cx="6032467" cy="4270248"/>
-          </a:xfrm>
-          <a:prstGeom prst="rect">
-            <a:avLst/>
-          </a:prstGeom>
-        </p:spPr>
-      </p:pic>
-      <p:sp>
-        <p:nvSpPr>
-          <p:cNvPr id="6" name="Rounded Rectangle 5"/>
+      <p:sp>
+        <p:nvSpPr>
+          <p:cNvPr id="6" name="Oval 5"/>
           <p:cNvSpPr/>
           <p:nvPr/>
         </p:nvSpPr>
         <p:spPr>
           <a:xfrm>
-            <a:off x="7918704" y="1426464"/>
-            <a:ext cx="1508760" cy="1188720"/>
+            <a:off x="987552" y="2276856"/>
+            <a:ext cx="640080" cy="640080"/>
+          </a:xfrm>
+          <a:prstGeom prst="ellipse">
+            <a:avLst/>
+          </a:prstGeom>
+          <a:solidFill>
+            <a:srgbClr val="1F6FB4"/>
+          </a:solidFill>
+          <a:ln w="12700">
+            <a:solidFill>
+              <a:srgbClr val="1F6FB4"/>
+            </a:solidFill>
+          </a:ln>
+        </p:spPr>
+        <p:style>
+          <a:lnRef idx="1">
+            <a:schemeClr val="accent1"/>
+          </a:lnRef>
+          <a:fillRef idx="3">
+            <a:schemeClr val="accent1"/>
+          </a:fillRef>
+          <a:effectRef idx="2">
+            <a:schemeClr val="accent1"/>
+          </a:effectRef>
+          <a:fontRef idx="minor">
+            <a:schemeClr val="lt1"/>
+          </a:fontRef>
+        </p:style>
+        <p:txBody>
+          <a:bodyPr rtlCol="0" anchor="ctr"/>
+          <a:lstStyle/>
+          <a:p>
+            <a:pPr algn="ctr"/>
+          </a:p>
+        </p:txBody>
+      </p:sp>
+      <p:sp>
+        <p:nvSpPr>
+          <p:cNvPr id="7" name="TextBox 6"/>
+          <p:cNvSpPr txBox="1"/>
+          <p:nvPr/>
+        </p:nvSpPr>
+        <p:spPr>
+          <a:xfrm>
+            <a:off x="987552" y="2276856"/>
+            <a:ext cx="640080" cy="640080"/>
+          </a:xfrm>
+          <a:prstGeom prst="rect">
+            <a:avLst/>
+          </a:prstGeom>
+          <a:noFill/>
+        </p:spPr>
+        <p:txBody>
+          <a:bodyPr wrap="square" lIns="27432" rIns="27432" tIns="27432" bIns="27432" anchor="ctr">
+            <a:spAutoFit/>
+          </a:bodyPr>
+          <a:lstStyle/>
+          <a:p>
+            <a:pPr algn="ctr"/>
+            <a:r>
+              <a:rPr sz="2200" b="1" i="0">
+                <a:solidFill>
+                  <a:srgbClr val="FFFFFF"/>
+                </a:solidFill>
+                <a:latin typeface="Aptos"/>
+              </a:rPr>
+              <a:t>A</a:t>
+            </a:r>
+          </a:p>
+        </p:txBody>
+      </p:sp>
+      <p:sp>
+        <p:nvSpPr>
+          <p:cNvPr id="8" name="Rounded Rectangle 7"/>
+          <p:cNvSpPr/>
+          <p:nvPr/>
+        </p:nvSpPr>
+        <p:spPr>
+          <a:xfrm>
+            <a:off x="1764792" y="2377440"/>
+            <a:ext cx="1755648" cy="310896"/>
           </a:xfrm>
           <a:prstGeom prst="roundRect">
             <a:avLst>
-              <a:gd name="adj" fmla="val 10769"/>
+              <a:gd name="adj" fmla="val 50000"/>
+            </a:avLst>
+          </a:prstGeom>
+          <a:solidFill>
+            <a:srgbClr val="E8F2FA"/>
+          </a:solidFill>
+          <a:ln w="12700">
+            <a:solidFill>
+              <a:srgbClr val="E8F2FA"/>
+            </a:solidFill>
+          </a:ln>
+        </p:spPr>
+        <p:style>
+          <a:lnRef idx="1">
+            <a:schemeClr val="accent1"/>
+          </a:lnRef>
+          <a:fillRef idx="3">
+            <a:schemeClr val="accent1"/>
+          </a:fillRef>
+          <a:effectRef idx="2">
+            <a:schemeClr val="accent1"/>
+          </a:effectRef>
+          <a:fontRef idx="minor">
+            <a:schemeClr val="lt1"/>
+          </a:fontRef>
+        </p:style>
+        <p:txBody>
+          <a:bodyPr rtlCol="0" anchor="ctr"/>
+          <a:lstStyle/>
+          <a:p>
+            <a:pPr algn="ctr"/>
+          </a:p>
+        </p:txBody>
+      </p:sp>
+      <p:sp>
+        <p:nvSpPr>
+          <p:cNvPr id="9" name="TextBox 8"/>
+          <p:cNvSpPr txBox="1"/>
+          <p:nvPr/>
+        </p:nvSpPr>
+        <p:spPr>
+          <a:xfrm>
+            <a:off x="1764792" y="2386584"/>
+            <a:ext cx="1755648" cy="256032"/>
+          </a:xfrm>
+          <a:prstGeom prst="rect">
+            <a:avLst/>
+          </a:prstGeom>
+          <a:noFill/>
+        </p:spPr>
+        <p:txBody>
+          <a:bodyPr wrap="square" lIns="27432" rIns="27432" tIns="27432" bIns="27432" anchor="ctr">
+            <a:spAutoFit/>
+          </a:bodyPr>
+          <a:lstStyle/>
+          <a:p>
+            <a:pPr algn="ctr"/>
+            <a:r>
+              <a:rPr sz="1000" b="1" i="0">
+                <a:solidFill>
+                  <a:srgbClr val="1F6FB4"/>
+                </a:solidFill>
+                <a:latin typeface="Aptos"/>
+              </a:rPr>
+              <a:t>REPER CLOUD</a:t>
+            </a:r>
+          </a:p>
+        </p:txBody>
+      </p:sp>
+      <p:sp>
+        <p:nvSpPr>
+          <p:cNvPr id="10" name="TextBox 9"/>
+          <p:cNvSpPr txBox="1"/>
+          <p:nvPr/>
+        </p:nvSpPr>
+        <p:spPr>
+          <a:xfrm>
+            <a:off x="1024128" y="3182112"/>
+            <a:ext cx="2697480" cy="384048"/>
+          </a:xfrm>
+          <a:prstGeom prst="rect">
+            <a:avLst/>
+          </a:prstGeom>
+          <a:noFill/>
+        </p:spPr>
+        <p:txBody>
+          <a:bodyPr wrap="square" lIns="27432" rIns="27432" tIns="27432" bIns="27432" anchor="t">
+            <a:spAutoFit/>
+          </a:bodyPr>
+          <a:lstStyle/>
+          <a:p>
+            <a:pPr algn="l"/>
+            <a:r>
+              <a:rPr sz="2000" b="1" i="0">
+                <a:solidFill>
+                  <a:srgbClr val="102A43"/>
+                </a:solidFill>
+                <a:latin typeface="Aptos"/>
+              </a:rPr>
+              <a:t>Apel unic</a:t>
+            </a:r>
+          </a:p>
+        </p:txBody>
+      </p:sp>
+      <p:sp>
+        <p:nvSpPr>
+          <p:cNvPr id="11" name="TextBox 10"/>
+          <p:cNvSpPr txBox="1"/>
+          <p:nvPr/>
+        </p:nvSpPr>
+        <p:spPr>
+          <a:xfrm>
+            <a:off x="1024128" y="3749039"/>
+            <a:ext cx="2697480" cy="713232"/>
+          </a:xfrm>
+          <a:prstGeom prst="rect">
+            <a:avLst/>
+          </a:prstGeom>
+          <a:noFill/>
+        </p:spPr>
+        <p:txBody>
+          <a:bodyPr wrap="square" lIns="27432" rIns="27432" tIns="27432" bIns="27432" anchor="t">
+            <a:spAutoFit/>
+          </a:bodyPr>
+          <a:lstStyle/>
+          <a:p>
+            <a:pPr algn="l"/>
+            <a:r>
+              <a:rPr sz="1400" b="0" i="0">
+                <a:solidFill>
+                  <a:srgbClr val="647487"/>
+                </a:solidFill>
+                <a:latin typeface="Aptos"/>
+              </a:rPr>
+              <a:t>Schema completă în prompt
+Un singur răspuns</a:t>
+            </a:r>
+          </a:p>
+        </p:txBody>
+      </p:sp>
+      <p:sp>
+        <p:nvSpPr>
+          <p:cNvPr id="12" name="TextBox 11"/>
+          <p:cNvSpPr txBox="1"/>
+          <p:nvPr/>
+        </p:nvSpPr>
+        <p:spPr>
+          <a:xfrm>
+            <a:off x="1024128" y="4663440"/>
+            <a:ext cx="2697480" cy="274320"/>
+          </a:xfrm>
+          <a:prstGeom prst="rect">
+            <a:avLst/>
+          </a:prstGeom>
+          <a:noFill/>
+        </p:spPr>
+        <p:txBody>
+          <a:bodyPr wrap="square" lIns="27432" rIns="27432" tIns="27432" bIns="27432" anchor="t">
+            <a:spAutoFit/>
+          </a:bodyPr>
+          <a:lstStyle/>
+          <a:p>
+            <a:pPr algn="l"/>
+            <a:r>
+              <a:rPr sz="1300" b="1" i="0">
+                <a:solidFill>
+                  <a:srgbClr val="1F6FB4"/>
+                </a:solidFill>
+                <a:latin typeface="Aptos"/>
+              </a:rPr>
+              <a:t>→ SQL</a:t>
+            </a:r>
+          </a:p>
+        </p:txBody>
+      </p:sp>
+      <p:sp>
+        <p:nvSpPr>
+          <p:cNvPr id="13" name="Rounded Rectangle 12"/>
+          <p:cNvSpPr/>
+          <p:nvPr/>
+        </p:nvSpPr>
+        <p:spPr>
+          <a:xfrm>
+            <a:off x="4535424" y="2011680"/>
+            <a:ext cx="3346704" cy="3127248"/>
+          </a:xfrm>
+          <a:prstGeom prst="roundRect">
+            <a:avLst>
+              <a:gd name="adj" fmla="val 4093"/>
             </a:avLst>
           </a:prstGeom>
           <a:solidFill>
@@ -12361,88 +13304,286 @@
       </p:sp>
       <p:sp>
         <p:nvSpPr>
-          <p:cNvPr id="7" name="TextBox 6"/>
-          <p:cNvSpPr txBox="1"/>
-          <p:nvPr/>
-        </p:nvSpPr>
-        <p:spPr>
-          <a:xfrm>
-            <a:off x="7918704" y="1600200"/>
-            <a:ext cx="1508760" cy="457200"/>
-          </a:xfrm>
-          <a:prstGeom prst="rect">
-            <a:avLst/>
-          </a:prstGeom>
-          <a:noFill/>
-        </p:spPr>
-        <p:txBody>
-          <a:bodyPr wrap="square" lIns="27432" rIns="27432" tIns="27432" bIns="27432" anchor="t">
-            <a:spAutoFit/>
-          </a:bodyPr>
+          <p:cNvPr id="14" name="Oval 13"/>
+          <p:cNvSpPr/>
+          <p:nvPr/>
+        </p:nvSpPr>
+        <p:spPr>
+          <a:xfrm>
+            <a:off x="4809744" y="2276856"/>
+            <a:ext cx="640080" cy="640080"/>
+          </a:xfrm>
+          <a:prstGeom prst="ellipse">
+            <a:avLst/>
+          </a:prstGeom>
+          <a:solidFill>
+            <a:srgbClr val="C1483A"/>
+          </a:solidFill>
+          <a:ln w="12700">
+            <a:solidFill>
+              <a:srgbClr val="C1483A"/>
+            </a:solidFill>
+          </a:ln>
+        </p:spPr>
+        <p:style>
+          <a:lnRef idx="1">
+            <a:schemeClr val="accent1"/>
+          </a:lnRef>
+          <a:fillRef idx="3">
+            <a:schemeClr val="accent1"/>
+          </a:fillRef>
+          <a:effectRef idx="2">
+            <a:schemeClr val="accent1"/>
+          </a:effectRef>
+          <a:fontRef idx="minor">
+            <a:schemeClr val="lt1"/>
+          </a:fontRef>
+        </p:style>
+        <p:txBody>
+          <a:bodyPr rtlCol="0" anchor="ctr"/>
           <a:lstStyle/>
           <a:p>
             <a:pPr algn="ctr"/>
-            <a:r>
-              <a:rPr sz="2500" b="1" i="0">
-                <a:solidFill>
-                  <a:srgbClr val="102A43"/>
-                </a:solidFill>
-                <a:latin typeface="Aptos"/>
-              </a:rPr>
-              <a:t>18</a:t>
-            </a:r>
-          </a:p>
-        </p:txBody>
-      </p:sp>
-      <p:sp>
-        <p:nvSpPr>
-          <p:cNvPr id="8" name="TextBox 7"/>
-          <p:cNvSpPr txBox="1"/>
-          <p:nvPr/>
-        </p:nvSpPr>
-        <p:spPr>
-          <a:xfrm>
-            <a:off x="8028431" y="2139696"/>
-            <a:ext cx="1289304" cy="265176"/>
-          </a:xfrm>
-          <a:prstGeom prst="rect">
-            <a:avLst/>
-          </a:prstGeom>
-          <a:noFill/>
-        </p:spPr>
-        <p:txBody>
-          <a:bodyPr wrap="square" lIns="27432" rIns="27432" tIns="27432" bIns="27432" anchor="t">
+          </a:p>
+        </p:txBody>
+      </p:sp>
+      <p:sp>
+        <p:nvSpPr>
+          <p:cNvPr id="15" name="TextBox 14"/>
+          <p:cNvSpPr txBox="1"/>
+          <p:nvPr/>
+        </p:nvSpPr>
+        <p:spPr>
+          <a:xfrm>
+            <a:off x="4809744" y="2276856"/>
+            <a:ext cx="640080" cy="640080"/>
+          </a:xfrm>
+          <a:prstGeom prst="rect">
+            <a:avLst/>
+          </a:prstGeom>
+          <a:noFill/>
+        </p:spPr>
+        <p:txBody>
+          <a:bodyPr wrap="square" lIns="27432" rIns="27432" tIns="27432" bIns="27432" anchor="ctr">
             <a:spAutoFit/>
           </a:bodyPr>
           <a:lstStyle/>
           <a:p>
             <a:pPr algn="ctr"/>
             <a:r>
-              <a:rPr sz="1050" b="1" i="0">
-                <a:solidFill>
-                  <a:srgbClr val="647487"/>
-                </a:solidFill>
-                <a:latin typeface="Aptos"/>
-              </a:rPr>
-              <a:t>sisteme</a:t>
-            </a:r>
-          </a:p>
-        </p:txBody>
-      </p:sp>
-      <p:sp>
-        <p:nvSpPr>
-          <p:cNvPr id="9" name="Rounded Rectangle 8"/>
+              <a:rPr sz="2200" b="1" i="0">
+                <a:solidFill>
+                  <a:srgbClr val="FFFFFF"/>
+                </a:solidFill>
+                <a:latin typeface="Aptos"/>
+              </a:rPr>
+              <a:t>B</a:t>
+            </a:r>
+          </a:p>
+        </p:txBody>
+      </p:sp>
+      <p:sp>
+        <p:nvSpPr>
+          <p:cNvPr id="16" name="Rounded Rectangle 15"/>
           <p:cNvSpPr/>
           <p:nvPr/>
         </p:nvSpPr>
         <p:spPr>
           <a:xfrm>
-            <a:off x="9674352" y="1426464"/>
-            <a:ext cx="1508760" cy="1188720"/>
+            <a:off x="5586983" y="2377440"/>
+            <a:ext cx="1755648" cy="310896"/>
           </a:xfrm>
           <a:prstGeom prst="roundRect">
             <a:avLst>
-              <a:gd name="adj" fmla="val 10769"/>
+              <a:gd name="adj" fmla="val 50000"/>
+            </a:avLst>
+          </a:prstGeom>
+          <a:solidFill>
+            <a:srgbClr val="FAECE9"/>
+          </a:solidFill>
+          <a:ln w="12700">
+            <a:solidFill>
+              <a:srgbClr val="FAECE9"/>
+            </a:solidFill>
+          </a:ln>
+        </p:spPr>
+        <p:style>
+          <a:lnRef idx="1">
+            <a:schemeClr val="accent1"/>
+          </a:lnRef>
+          <a:fillRef idx="3">
+            <a:schemeClr val="accent1"/>
+          </a:fillRef>
+          <a:effectRef idx="2">
+            <a:schemeClr val="accent1"/>
+          </a:effectRef>
+          <a:fontRef idx="minor">
+            <a:schemeClr val="lt1"/>
+          </a:fontRef>
+        </p:style>
+        <p:txBody>
+          <a:bodyPr rtlCol="0" anchor="ctr"/>
+          <a:lstStyle/>
+          <a:p>
+            <a:pPr algn="ctr"/>
+          </a:p>
+        </p:txBody>
+      </p:sp>
+      <p:sp>
+        <p:nvSpPr>
+          <p:cNvPr id="17" name="TextBox 16"/>
+          <p:cNvSpPr txBox="1"/>
+          <p:nvPr/>
+        </p:nvSpPr>
+        <p:spPr>
+          <a:xfrm>
+            <a:off x="5586983" y="2386584"/>
+            <a:ext cx="1755648" cy="256032"/>
+          </a:xfrm>
+          <a:prstGeom prst="rect">
+            <a:avLst/>
+          </a:prstGeom>
+          <a:noFill/>
+        </p:spPr>
+        <p:txBody>
+          <a:bodyPr wrap="square" lIns="27432" rIns="27432" tIns="27432" bIns="27432" anchor="ctr">
+            <a:spAutoFit/>
+          </a:bodyPr>
+          <a:lstStyle/>
+          <a:p>
+            <a:pPr algn="ctr"/>
+            <a:r>
+              <a:rPr sz="1000" b="1" i="0">
+                <a:solidFill>
+                  <a:srgbClr val="C1483A"/>
+                </a:solidFill>
+                <a:latin typeface="Aptos"/>
+              </a:rPr>
+              <a:t>CONFIGURAȚIA STUDIATĂ</a:t>
+            </a:r>
+          </a:p>
+        </p:txBody>
+      </p:sp>
+      <p:sp>
+        <p:nvSpPr>
+          <p:cNvPr id="18" name="TextBox 17"/>
+          <p:cNvSpPr txBox="1"/>
+          <p:nvPr/>
+        </p:nvSpPr>
+        <p:spPr>
+          <a:xfrm>
+            <a:off x="4846320" y="3182112"/>
+            <a:ext cx="2697480" cy="384048"/>
+          </a:xfrm>
+          <a:prstGeom prst="rect">
+            <a:avLst/>
+          </a:prstGeom>
+          <a:noFill/>
+        </p:spPr>
+        <p:txBody>
+          <a:bodyPr wrap="square" lIns="27432" rIns="27432" tIns="27432" bIns="27432" anchor="t">
+            <a:spAutoFit/>
+          </a:bodyPr>
+          <a:lstStyle/>
+          <a:p>
+            <a:pPr algn="l"/>
+            <a:r>
+              <a:rPr sz="2000" b="1" i="0">
+                <a:solidFill>
+                  <a:srgbClr val="102A43"/>
+                </a:solidFill>
+                <a:latin typeface="Aptos"/>
+              </a:rPr>
+              <a:t>Agent MCP</a:t>
+            </a:r>
+          </a:p>
+        </p:txBody>
+      </p:sp>
+      <p:sp>
+        <p:nvSpPr>
+          <p:cNvPr id="19" name="TextBox 18"/>
+          <p:cNvSpPr txBox="1"/>
+          <p:nvPr/>
+        </p:nvSpPr>
+        <p:spPr>
+          <a:xfrm>
+            <a:off x="4846320" y="3749039"/>
+            <a:ext cx="2697480" cy="713232"/>
+          </a:xfrm>
+          <a:prstGeom prst="rect">
+            <a:avLst/>
+          </a:prstGeom>
+          <a:noFill/>
+        </p:spPr>
+        <p:txBody>
+          <a:bodyPr wrap="square" lIns="27432" rIns="27432" tIns="27432" bIns="27432" anchor="t">
+            <a:spAutoFit/>
+          </a:bodyPr>
+          <a:lstStyle/>
+          <a:p>
+            <a:pPr algn="l"/>
+            <a:r>
+              <a:rPr sz="1400" b="0" i="0">
+                <a:solidFill>
+                  <a:srgbClr val="647487"/>
+                </a:solidFill>
+                <a:latin typeface="Aptos"/>
+              </a:rPr>
+              <a:t>Fără schemă inițială
+Explorare prin unelte</a:t>
+            </a:r>
+          </a:p>
+        </p:txBody>
+      </p:sp>
+      <p:sp>
+        <p:nvSpPr>
+          <p:cNvPr id="20" name="TextBox 19"/>
+          <p:cNvSpPr txBox="1"/>
+          <p:nvPr/>
+        </p:nvSpPr>
+        <p:spPr>
+          <a:xfrm>
+            <a:off x="4846320" y="4663440"/>
+            <a:ext cx="2697480" cy="274320"/>
+          </a:xfrm>
+          <a:prstGeom prst="rect">
+            <a:avLst/>
+          </a:prstGeom>
+          <a:noFill/>
+        </p:spPr>
+        <p:txBody>
+          <a:bodyPr wrap="square" lIns="27432" rIns="27432" tIns="27432" bIns="27432" anchor="t">
+            <a:spAutoFit/>
+          </a:bodyPr>
+          <a:lstStyle/>
+          <a:p>
+            <a:pPr algn="l"/>
+            <a:r>
+              <a:rPr sz="1300" b="1" i="0">
+                <a:solidFill>
+                  <a:srgbClr val="C1483A"/>
+                </a:solidFill>
+                <a:latin typeface="Aptos"/>
+              </a:rPr>
+              <a:t>→ SQL</a:t>
+            </a:r>
+          </a:p>
+        </p:txBody>
+      </p:sp>
+      <p:sp>
+        <p:nvSpPr>
+          <p:cNvPr id="21" name="Rounded Rectangle 20"/>
+          <p:cNvSpPr/>
+          <p:nvPr/>
+        </p:nvSpPr>
+        <p:spPr>
+          <a:xfrm>
+            <a:off x="8357615" y="2011680"/>
+            <a:ext cx="3346704" cy="3127248"/>
+          </a:xfrm>
+          <a:prstGeom prst="roundRect">
+            <a:avLst>
+              <a:gd name="adj" fmla="val 4093"/>
             </a:avLst>
           </a:prstGeom>
           <a:solidFill>
@@ -12478,96 +13619,24 @@
       </p:sp>
       <p:sp>
         <p:nvSpPr>
-          <p:cNvPr id="10" name="TextBox 9"/>
-          <p:cNvSpPr txBox="1"/>
-          <p:nvPr/>
-        </p:nvSpPr>
-        <p:spPr>
-          <a:xfrm>
-            <a:off x="9674352" y="1600200"/>
-            <a:ext cx="1508760" cy="457200"/>
-          </a:xfrm>
-          <a:prstGeom prst="rect">
-            <a:avLst/>
-          </a:prstGeom>
-          <a:noFill/>
-        </p:spPr>
-        <p:txBody>
-          <a:bodyPr wrap="square" lIns="27432" rIns="27432" tIns="27432" bIns="27432" anchor="t">
-            <a:spAutoFit/>
-          </a:bodyPr>
-          <a:lstStyle/>
-          <a:p>
-            <a:pPr algn="ctr"/>
-            <a:r>
-              <a:rPr sz="2500" b="1" i="0">
-                <a:solidFill>
-                  <a:srgbClr val="102A43"/>
-                </a:solidFill>
-                <a:latin typeface="Aptos"/>
-              </a:rPr>
-              <a:t>3</a:t>
-            </a:r>
-          </a:p>
-        </p:txBody>
-      </p:sp>
-      <p:sp>
-        <p:nvSpPr>
-          <p:cNvPr id="11" name="TextBox 10"/>
-          <p:cNvSpPr txBox="1"/>
-          <p:nvPr/>
-        </p:nvSpPr>
-        <p:spPr>
-          <a:xfrm>
-            <a:off x="9784080" y="2139696"/>
-            <a:ext cx="1289304" cy="265176"/>
-          </a:xfrm>
-          <a:prstGeom prst="rect">
-            <a:avLst/>
-          </a:prstGeom>
-          <a:noFill/>
-        </p:spPr>
-        <p:txBody>
-          <a:bodyPr wrap="square" lIns="27432" rIns="27432" tIns="27432" bIns="27432" anchor="t">
-            <a:spAutoFit/>
-          </a:bodyPr>
-          <a:lstStyle/>
-          <a:p>
-            <a:pPr algn="ctr"/>
-            <a:r>
-              <a:rPr sz="1050" b="1" i="0">
-                <a:solidFill>
-                  <a:srgbClr val="647487"/>
-                </a:solidFill>
-                <a:latin typeface="Aptos"/>
-              </a:rPr>
-              <a:t>baze de date</a:t>
-            </a:r>
-          </a:p>
-        </p:txBody>
-      </p:sp>
-      <p:sp>
-        <p:nvSpPr>
-          <p:cNvPr id="12" name="Rounded Rectangle 11"/>
+          <p:cNvPr id="22" name="Oval 21"/>
           <p:cNvSpPr/>
           <p:nvPr/>
         </p:nvSpPr>
         <p:spPr>
           <a:xfrm>
-            <a:off x="7918704" y="2916936"/>
-            <a:ext cx="1508760" cy="1188720"/>
-          </a:xfrm>
-          <a:prstGeom prst="roundRect">
-            <a:avLst>
-              <a:gd name="adj" fmla="val 10769"/>
-            </a:avLst>
+            <a:off x="8631936" y="2276856"/>
+            <a:ext cx="640080" cy="640080"/>
+          </a:xfrm>
+          <a:prstGeom prst="ellipse">
+            <a:avLst/>
           </a:prstGeom>
           <a:solidFill>
-            <a:srgbClr val="FFFFFF"/>
+            <a:srgbClr val="2E8B57"/>
           </a:solidFill>
           <a:ln w="12700">
             <a:solidFill>
-              <a:srgbClr val="D6DEE6"/>
+              <a:srgbClr val="2E8B57"/>
             </a:solidFill>
           </a:ln>
         </p:spPr>
@@ -12595,96 +13664,61 @@
       </p:sp>
       <p:sp>
         <p:nvSpPr>
-          <p:cNvPr id="13" name="TextBox 12"/>
-          <p:cNvSpPr txBox="1"/>
-          <p:nvPr/>
-        </p:nvSpPr>
-        <p:spPr>
-          <a:xfrm>
-            <a:off x="7918704" y="3090672"/>
-            <a:ext cx="1508760" cy="457200"/>
-          </a:xfrm>
-          <a:prstGeom prst="rect">
-            <a:avLst/>
-          </a:prstGeom>
-          <a:noFill/>
-        </p:spPr>
-        <p:txBody>
-          <a:bodyPr wrap="square" lIns="27432" rIns="27432" tIns="27432" bIns="27432" anchor="t">
+          <p:cNvPr id="23" name="TextBox 22"/>
+          <p:cNvSpPr txBox="1"/>
+          <p:nvPr/>
+        </p:nvSpPr>
+        <p:spPr>
+          <a:xfrm>
+            <a:off x="8631936" y="2276856"/>
+            <a:ext cx="640080" cy="640080"/>
+          </a:xfrm>
+          <a:prstGeom prst="rect">
+            <a:avLst/>
+          </a:prstGeom>
+          <a:noFill/>
+        </p:spPr>
+        <p:txBody>
+          <a:bodyPr wrap="square" lIns="27432" rIns="27432" tIns="27432" bIns="27432" anchor="ctr">
             <a:spAutoFit/>
           </a:bodyPr>
           <a:lstStyle/>
           <a:p>
             <a:pPr algn="ctr"/>
             <a:r>
-              <a:rPr sz="2500" b="1" i="0">
-                <a:solidFill>
-                  <a:srgbClr val="102A43"/>
-                </a:solidFill>
-                <a:latin typeface="Aptos"/>
-              </a:rPr>
-              <a:t>93</a:t>
-            </a:r>
-          </a:p>
-        </p:txBody>
-      </p:sp>
-      <p:sp>
-        <p:nvSpPr>
-          <p:cNvPr id="14" name="TextBox 13"/>
-          <p:cNvSpPr txBox="1"/>
-          <p:nvPr/>
-        </p:nvSpPr>
-        <p:spPr>
-          <a:xfrm>
-            <a:off x="8028431" y="3630168"/>
-            <a:ext cx="1289304" cy="265176"/>
-          </a:xfrm>
-          <a:prstGeom prst="rect">
-            <a:avLst/>
-          </a:prstGeom>
-          <a:noFill/>
-        </p:spPr>
-        <p:txBody>
-          <a:bodyPr wrap="square" lIns="27432" rIns="27432" tIns="27432" bIns="27432" anchor="t">
-            <a:spAutoFit/>
-          </a:bodyPr>
-          <a:lstStyle/>
-          <a:p>
-            <a:pPr algn="ctr"/>
-            <a:r>
-              <a:rPr sz="1050" b="1" i="0">
-                <a:solidFill>
-                  <a:srgbClr val="647487"/>
-                </a:solidFill>
-                <a:latin typeface="Aptos"/>
-              </a:rPr>
-              <a:t>întrebări proprii</a:t>
-            </a:r>
-          </a:p>
-        </p:txBody>
-      </p:sp>
-      <p:sp>
-        <p:nvSpPr>
-          <p:cNvPr id="15" name="Rounded Rectangle 14"/>
+              <a:rPr sz="2200" b="1" i="0">
+                <a:solidFill>
+                  <a:srgbClr val="FFFFFF"/>
+                </a:solidFill>
+                <a:latin typeface="Aptos"/>
+              </a:rPr>
+              <a:t>C</a:t>
+            </a:r>
+          </a:p>
+        </p:txBody>
+      </p:sp>
+      <p:sp>
+        <p:nvSpPr>
+          <p:cNvPr id="24" name="Rounded Rectangle 23"/>
           <p:cNvSpPr/>
           <p:nvPr/>
         </p:nvSpPr>
         <p:spPr>
           <a:xfrm>
-            <a:off x="9674352" y="2916936"/>
-            <a:ext cx="1508760" cy="1188720"/>
+            <a:off x="9409176" y="2377440"/>
+            <a:ext cx="1755648" cy="310896"/>
           </a:xfrm>
           <a:prstGeom prst="roundRect">
             <a:avLst>
-              <a:gd name="adj" fmla="val 10769"/>
+              <a:gd name="adj" fmla="val 50000"/>
             </a:avLst>
           </a:prstGeom>
           <a:solidFill>
-            <a:srgbClr val="FFFFFF"/>
+            <a:srgbClr val="E8F5EE"/>
           </a:solidFill>
           <a:ln w="12700">
             <a:solidFill>
-              <a:srgbClr val="D6DEE6"/>
+              <a:srgbClr val="E8F5EE"/>
             </a:solidFill>
           </a:ln>
         </p:spPr>
@@ -12712,49 +13746,155 @@
       </p:sp>
       <p:sp>
         <p:nvSpPr>
-          <p:cNvPr id="16" name="TextBox 15"/>
-          <p:cNvSpPr txBox="1"/>
-          <p:nvPr/>
-        </p:nvSpPr>
-        <p:spPr>
-          <a:xfrm>
-            <a:off x="9674352" y="3090672"/>
-            <a:ext cx="1508760" cy="457200"/>
-          </a:xfrm>
-          <a:prstGeom prst="rect">
-            <a:avLst/>
-          </a:prstGeom>
-          <a:noFill/>
-        </p:spPr>
-        <p:txBody>
-          <a:bodyPr wrap="square" lIns="27432" rIns="27432" tIns="27432" bIns="27432" anchor="t">
+          <p:cNvPr id="25" name="TextBox 24"/>
+          <p:cNvSpPr txBox="1"/>
+          <p:nvPr/>
+        </p:nvSpPr>
+        <p:spPr>
+          <a:xfrm>
+            <a:off x="9409176" y="2386584"/>
+            <a:ext cx="1755648" cy="256032"/>
+          </a:xfrm>
+          <a:prstGeom prst="rect">
+            <a:avLst/>
+          </a:prstGeom>
+          <a:noFill/>
+        </p:spPr>
+        <p:txBody>
+          <a:bodyPr wrap="square" lIns="27432" rIns="27432" tIns="27432" bIns="27432" anchor="ctr">
             <a:spAutoFit/>
           </a:bodyPr>
           <a:lstStyle/>
           <a:p>
             <a:pPr algn="ctr"/>
             <a:r>
-              <a:rPr sz="2500" b="1" i="0">
+              <a:rPr sz="1000" b="1" i="0">
+                <a:solidFill>
+                  <a:srgbClr val="2E8B57"/>
+                </a:solidFill>
+                <a:latin typeface="Aptos"/>
+              </a:rPr>
+              <a:t>REPER LOCAL</a:t>
+            </a:r>
+          </a:p>
+        </p:txBody>
+      </p:sp>
+      <p:sp>
+        <p:nvSpPr>
+          <p:cNvPr id="26" name="TextBox 25"/>
+          <p:cNvSpPr txBox="1"/>
+          <p:nvPr/>
+        </p:nvSpPr>
+        <p:spPr>
+          <a:xfrm>
+            <a:off x="8668511" y="3182112"/>
+            <a:ext cx="2697480" cy="384048"/>
+          </a:xfrm>
+          <a:prstGeom prst="rect">
+            <a:avLst/>
+          </a:prstGeom>
+          <a:noFill/>
+        </p:spPr>
+        <p:txBody>
+          <a:bodyPr wrap="square" lIns="27432" rIns="27432" tIns="27432" bIns="27432" anchor="t">
+            <a:spAutoFit/>
+          </a:bodyPr>
+          <a:lstStyle/>
+          <a:p>
+            <a:pPr algn="l"/>
+            <a:r>
+              <a:rPr sz="2000" b="1" i="0">
                 <a:solidFill>
                   <a:srgbClr val="102A43"/>
                 </a:solidFill>
                 <a:latin typeface="Aptos"/>
               </a:rPr>
-              <a:t>1.534</a:t>
-            </a:r>
-          </a:p>
-        </p:txBody>
-      </p:sp>
-      <p:sp>
-        <p:nvSpPr>
-          <p:cNvPr id="17" name="TextBox 16"/>
-          <p:cNvSpPr txBox="1"/>
-          <p:nvPr/>
-        </p:nvSpPr>
-        <p:spPr>
-          <a:xfrm>
-            <a:off x="9784080" y="3630168"/>
-            <a:ext cx="1289304" cy="265176"/>
+              <a:t>Model local</a:t>
+            </a:r>
+          </a:p>
+        </p:txBody>
+      </p:sp>
+      <p:sp>
+        <p:nvSpPr>
+          <p:cNvPr id="27" name="TextBox 26"/>
+          <p:cNvSpPr txBox="1"/>
+          <p:nvPr/>
+        </p:nvSpPr>
+        <p:spPr>
+          <a:xfrm>
+            <a:off x="8668511" y="3749039"/>
+            <a:ext cx="2697480" cy="713232"/>
+          </a:xfrm>
+          <a:prstGeom prst="rect">
+            <a:avLst/>
+          </a:prstGeom>
+          <a:noFill/>
+        </p:spPr>
+        <p:txBody>
+          <a:bodyPr wrap="square" lIns="27432" rIns="27432" tIns="27432" bIns="27432" anchor="t">
+            <a:spAutoFit/>
+          </a:bodyPr>
+          <a:lstStyle/>
+          <a:p>
+            <a:pPr algn="l"/>
+            <a:r>
+              <a:rPr sz="1400" b="0" i="0">
+                <a:solidFill>
+                  <a:srgbClr val="647487"/>
+                </a:solidFill>
+                <a:latin typeface="Aptos"/>
+              </a:rPr>
+              <a:t>Același prompt ca A
+Rulare pe GPU personal</a:t>
+            </a:r>
+          </a:p>
+        </p:txBody>
+      </p:sp>
+      <p:sp>
+        <p:nvSpPr>
+          <p:cNvPr id="28" name="TextBox 27"/>
+          <p:cNvSpPr txBox="1"/>
+          <p:nvPr/>
+        </p:nvSpPr>
+        <p:spPr>
+          <a:xfrm>
+            <a:off x="8668511" y="4663440"/>
+            <a:ext cx="2697480" cy="274320"/>
+          </a:xfrm>
+          <a:prstGeom prst="rect">
+            <a:avLst/>
+          </a:prstGeom>
+          <a:noFill/>
+        </p:spPr>
+        <p:txBody>
+          <a:bodyPr wrap="square" lIns="27432" rIns="27432" tIns="27432" bIns="27432" anchor="t">
+            <a:spAutoFit/>
+          </a:bodyPr>
+          <a:lstStyle/>
+          <a:p>
+            <a:pPr algn="l"/>
+            <a:r>
+              <a:rPr sz="1300" b="1" i="0">
+                <a:solidFill>
+                  <a:srgbClr val="2E8B57"/>
+                </a:solidFill>
+                <a:latin typeface="Aptos"/>
+              </a:rPr>
+              <a:t>→ SQL</a:t>
+            </a:r>
+          </a:p>
+        </p:txBody>
+      </p:sp>
+      <p:sp>
+        <p:nvSpPr>
+          <p:cNvPr id="29" name="TextBox 28"/>
+          <p:cNvSpPr txBox="1"/>
+          <p:nvPr/>
+        </p:nvSpPr>
+        <p:spPr>
+          <a:xfrm>
+            <a:off x="2084831" y="5715000"/>
+            <a:ext cx="8010144" cy="347472"/>
           </a:xfrm>
           <a:prstGeom prst="rect">
             <a:avLst/>
@@ -12769,138 +13909,20 @@
           <a:p>
             <a:pPr algn="ctr"/>
             <a:r>
-              <a:rPr sz="1050" b="1" i="0">
-                <a:solidFill>
-                  <a:srgbClr val="647487"/>
-                </a:solidFill>
-                <a:latin typeface="Aptos"/>
-              </a:rPr>
-              <a:t>întrebări BIRD-SQL</a:t>
-            </a:r>
-          </a:p>
-        </p:txBody>
-      </p:sp>
-      <p:sp>
-        <p:nvSpPr>
-          <p:cNvPr id="18" name="Rounded Rectangle 17"/>
-          <p:cNvSpPr/>
-          <p:nvPr/>
-        </p:nvSpPr>
-        <p:spPr>
-          <a:xfrm>
-            <a:off x="7918704" y="4663440"/>
-            <a:ext cx="3264408" cy="1024128"/>
-          </a:xfrm>
-          <a:prstGeom prst="roundRect">
-            <a:avLst>
-              <a:gd name="adj" fmla="val 12500"/>
-            </a:avLst>
-          </a:prstGeom>
-          <a:solidFill>
-            <a:srgbClr val="E8F2FA"/>
-          </a:solidFill>
-          <a:ln w="12700">
-            <a:solidFill>
-              <a:srgbClr val="E8F2FA"/>
-            </a:solidFill>
-          </a:ln>
-        </p:spPr>
-        <p:style>
-          <a:lnRef idx="1">
-            <a:schemeClr val="accent1"/>
-          </a:lnRef>
-          <a:fillRef idx="3">
-            <a:schemeClr val="accent1"/>
-          </a:fillRef>
-          <a:effectRef idx="2">
-            <a:schemeClr val="accent1"/>
-          </a:effectRef>
-          <a:fontRef idx="minor">
-            <a:schemeClr val="lt1"/>
-          </a:fontRef>
-        </p:style>
-        <p:txBody>
-          <a:bodyPr rtlCol="0" anchor="ctr"/>
-          <a:lstStyle/>
-          <a:p>
-            <a:pPr algn="ctr"/>
-          </a:p>
-        </p:txBody>
-      </p:sp>
-      <p:sp>
-        <p:nvSpPr>
-          <p:cNvPr id="19" name="TextBox 18"/>
-          <p:cNvSpPr txBox="1"/>
-          <p:nvPr/>
-        </p:nvSpPr>
-        <p:spPr>
-          <a:xfrm>
-            <a:off x="8165592" y="4901184"/>
-            <a:ext cx="2770632" cy="548640"/>
-          </a:xfrm>
-          <a:prstGeom prst="rect">
-            <a:avLst/>
-          </a:prstGeom>
-          <a:noFill/>
-        </p:spPr>
-        <p:txBody>
-          <a:bodyPr wrap="square" lIns="27432" rIns="27432" tIns="27432" bIns="27432" anchor="t">
-            <a:spAutoFit/>
-          </a:bodyPr>
-          <a:lstStyle/>
-          <a:p>
-            <a:pPr algn="ctr"/>
-            <a:r>
-              <a:rPr sz="1500" b="1" i="0">
-                <a:solidFill>
-                  <a:srgbClr val="1F6FB4"/>
-                </a:solidFill>
-                <a:latin typeface="Aptos"/>
-              </a:rPr>
-              <a:t>Nu comparăm textul SQL.
-Comparăm rezultatele obținute.</a:t>
-            </a:r>
-          </a:p>
-        </p:txBody>
-      </p:sp>
-      <p:sp>
-        <p:nvSpPr>
-          <p:cNvPr id="20" name="TextBox 19"/>
-          <p:cNvSpPr txBox="1"/>
-          <p:nvPr/>
-        </p:nvSpPr>
-        <p:spPr>
-          <a:xfrm>
-            <a:off x="621792" y="6519672"/>
-            <a:ext cx="9875520" cy="164592"/>
-          </a:xfrm>
-          <a:prstGeom prst="rect">
-            <a:avLst/>
-          </a:prstGeom>
-          <a:noFill/>
-        </p:spPr>
-        <p:txBody>
-          <a:bodyPr wrap="square" lIns="27432" rIns="27432" tIns="27432" bIns="27432" anchor="t">
-            <a:spAutoFit/>
-          </a:bodyPr>
-          <a:lstStyle/>
-          <a:p>
-            <a:pPr algn="l"/>
-            <a:r>
-              <a:rPr sz="850" b="0" i="0">
-                <a:solidFill>
-                  <a:srgbClr val="647487"/>
-                </a:solidFill>
-                <a:latin typeface="Aptos"/>
-              </a:rPr>
-              <a:t>Baze: car_rental, AdventureWorks și BIRD-SQL dev</a:t>
-            </a:r>
-          </a:p>
-        </p:txBody>
-      </p:sp>
-      <p:sp>
-        <p:nvSpPr>
-          <p:cNvPr id="21" name="TextBox 20"/>
+              <a:rPr sz="1700" b="1" i="0">
+                <a:solidFill>
+                  <a:srgbClr val="102A43"/>
+                </a:solidFill>
+                <a:latin typeface="Aptos"/>
+              </a:rPr>
+              <a:t>Între configurațiile comparate se modifică o singură variabilă.</a:t>
+            </a:r>
+          </a:p>
+        </p:txBody>
+      </p:sp>
+      <p:sp>
+        <p:nvSpPr>
+          <p:cNvPr id="30" name="TextBox 29"/>
           <p:cNvSpPr txBox="1"/>
           <p:nvPr/>
         </p:nvSpPr>
@@ -12989,7 +14011,7 @@
                 </a:solidFill>
                 <a:latin typeface="Aptos"/>
               </a:rPr>
-              <a:t>REZULTATUL PRINCIPAL</a:t>
+              <a:t>METODĂ</a:t>
             </a:r>
           </a:p>
         </p:txBody>
@@ -13024,14 +14046,61 @@
                 </a:solidFill>
                 <a:latin typeface="Aptos"/>
               </a:rPr>
-              <a:t>Mai multă autonomie nu a însemnat mai multă acuratețe</a:t>
-            </a:r>
+              <a:t>Corectitudinea se măsoară prin execuție</a:t>
+            </a:r>
+          </a:p>
+        </p:txBody>
+      </p:sp>
+      <p:sp>
+        <p:nvSpPr>
+          <p:cNvPr id="4" name="Rounded Rectangle 3"/>
+          <p:cNvSpPr/>
+          <p:nvPr/>
+        </p:nvSpPr>
+        <p:spPr>
+          <a:xfrm>
+            <a:off x="640080" y="1280160"/>
+            <a:ext cx="6949440" cy="4526280"/>
+          </a:xfrm>
+          <a:prstGeom prst="roundRect">
+            <a:avLst>
+              <a:gd name="adj" fmla="val 2828"/>
+            </a:avLst>
+          </a:prstGeom>
+          <a:solidFill>
+            <a:srgbClr val="FFFFFF"/>
+          </a:solidFill>
+          <a:ln w="12700">
+            <a:solidFill>
+              <a:srgbClr val="D6DEE6"/>
+            </a:solidFill>
+          </a:ln>
+        </p:spPr>
+        <p:style>
+          <a:lnRef idx="1">
+            <a:schemeClr val="accent1"/>
+          </a:lnRef>
+          <a:fillRef idx="3">
+            <a:schemeClr val="accent1"/>
+          </a:fillRef>
+          <a:effectRef idx="2">
+            <a:schemeClr val="accent1"/>
+          </a:effectRef>
+          <a:fontRef idx="minor">
+            <a:schemeClr val="lt1"/>
+          </a:fontRef>
+        </p:style>
+        <p:txBody>
+          <a:bodyPr rtlCol="0" anchor="ctr"/>
+          <a:lstStyle/>
+          <a:p>
+            <a:pPr algn="ctr"/>
           </a:p>
         </p:txBody>
       </p:sp>
       <p:pic>
         <p:nvPicPr>
-          <p:cNvPr id="4" name="Picture 3" descr="fig_accuracy_arms.png"/>
+          <p:cNvPr id="5" name="Picture 4" descr="fig_harness.png"/>
           <p:cNvPicPr>
             <a:picLocks noChangeAspect="1"/>
           </p:cNvPicPr>
@@ -13045,8 +14114,8 @@
         </p:blipFill>
         <p:spPr>
           <a:xfrm>
-            <a:off x="582841" y="1517904"/>
-            <a:ext cx="7621700" cy="4754880"/>
+            <a:off x="1098566" y="1408176"/>
+            <a:ext cx="6032467" cy="4270248"/>
           </a:xfrm>
           <a:prstGeom prst="rect">
             <a:avLst/>
@@ -13055,26 +14124,26 @@
       </p:pic>
       <p:sp>
         <p:nvSpPr>
-          <p:cNvPr id="5" name="Rounded Rectangle 4"/>
+          <p:cNvPr id="6" name="Rounded Rectangle 5"/>
           <p:cNvSpPr/>
           <p:nvPr/>
         </p:nvSpPr>
         <p:spPr>
           <a:xfrm>
-            <a:off x="8485632" y="1517904"/>
-            <a:ext cx="3044952" cy="4480560"/>
+            <a:off x="7918704" y="1426464"/>
+            <a:ext cx="1508760" cy="1188720"/>
           </a:xfrm>
           <a:prstGeom prst="roundRect">
             <a:avLst>
-              <a:gd name="adj" fmla="val 4204"/>
+              <a:gd name="adj" fmla="val 10769"/>
             </a:avLst>
           </a:prstGeom>
           <a:solidFill>
-            <a:srgbClr val="102A43"/>
+            <a:srgbClr val="FFFFFF"/>
           </a:solidFill>
           <a:ln w="12700">
             <a:solidFill>
-              <a:srgbClr val="102A43"/>
+              <a:srgbClr val="D6DEE6"/>
             </a:solidFill>
           </a:ln>
         </p:spPr>
@@ -13102,252 +14171,511 @@
       </p:sp>
       <p:sp>
         <p:nvSpPr>
-          <p:cNvPr id="6" name="TextBox 5"/>
-          <p:cNvSpPr txBox="1"/>
-          <p:nvPr/>
-        </p:nvSpPr>
-        <p:spPr>
-          <a:xfrm>
-            <a:off x="8814816" y="1847088"/>
-            <a:ext cx="2331720" cy="502920"/>
-          </a:xfrm>
-          <a:prstGeom prst="rect">
-            <a:avLst/>
-          </a:prstGeom>
-          <a:noFill/>
-        </p:spPr>
-        <p:txBody>
-          <a:bodyPr wrap="square" lIns="27432" rIns="27432" tIns="27432" bIns="27432" anchor="t">
-            <a:spAutoFit/>
-          </a:bodyPr>
-          <a:lstStyle/>
-          <a:p>
-            <a:pPr algn="l"/>
-            <a:r>
-              <a:rPr sz="2600" b="1" i="0">
+          <p:cNvPr id="7" name="TextBox 6"/>
+          <p:cNvSpPr txBox="1"/>
+          <p:nvPr/>
+        </p:nvSpPr>
+        <p:spPr>
+          <a:xfrm>
+            <a:off x="7918704" y="1600200"/>
+            <a:ext cx="1508760" cy="457200"/>
+          </a:xfrm>
+          <a:prstGeom prst="rect">
+            <a:avLst/>
+          </a:prstGeom>
+          <a:noFill/>
+        </p:spPr>
+        <p:txBody>
+          <a:bodyPr wrap="square" lIns="27432" rIns="27432" tIns="27432" bIns="27432" anchor="t">
+            <a:spAutoFit/>
+          </a:bodyPr>
+          <a:lstStyle/>
+          <a:p>
+            <a:pPr algn="ctr"/>
+            <a:r>
+              <a:rPr sz="2500" b="1" i="0">
+                <a:solidFill>
+                  <a:srgbClr val="102A43"/>
+                </a:solidFill>
+                <a:latin typeface="Aptos"/>
+              </a:rPr>
+              <a:t>18</a:t>
+            </a:r>
+          </a:p>
+        </p:txBody>
+      </p:sp>
+      <p:sp>
+        <p:nvSpPr>
+          <p:cNvPr id="8" name="TextBox 7"/>
+          <p:cNvSpPr txBox="1"/>
+          <p:nvPr/>
+        </p:nvSpPr>
+        <p:spPr>
+          <a:xfrm>
+            <a:off x="8028431" y="2139696"/>
+            <a:ext cx="1289304" cy="265176"/>
+          </a:xfrm>
+          <a:prstGeom prst="rect">
+            <a:avLst/>
+          </a:prstGeom>
+          <a:noFill/>
+        </p:spPr>
+        <p:txBody>
+          <a:bodyPr wrap="square" lIns="27432" rIns="27432" tIns="27432" bIns="27432" anchor="t">
+            <a:spAutoFit/>
+          </a:bodyPr>
+          <a:lstStyle/>
+          <a:p>
+            <a:pPr algn="ctr"/>
+            <a:r>
+              <a:rPr sz="1050" b="1" i="0">
+                <a:solidFill>
+                  <a:srgbClr val="647487"/>
+                </a:solidFill>
+                <a:latin typeface="Aptos"/>
+              </a:rPr>
+              <a:t>sisteme</a:t>
+            </a:r>
+          </a:p>
+        </p:txBody>
+      </p:sp>
+      <p:sp>
+        <p:nvSpPr>
+          <p:cNvPr id="9" name="Rounded Rectangle 8"/>
+          <p:cNvSpPr/>
+          <p:nvPr/>
+        </p:nvSpPr>
+        <p:spPr>
+          <a:xfrm>
+            <a:off x="9674352" y="1426464"/>
+            <a:ext cx="1508760" cy="1188720"/>
+          </a:xfrm>
+          <a:prstGeom prst="roundRect">
+            <a:avLst>
+              <a:gd name="adj" fmla="val 10769"/>
+            </a:avLst>
+          </a:prstGeom>
+          <a:solidFill>
+            <a:srgbClr val="FFFFFF"/>
+          </a:solidFill>
+          <a:ln w="12700">
+            <a:solidFill>
+              <a:srgbClr val="D6DEE6"/>
+            </a:solidFill>
+          </a:ln>
+        </p:spPr>
+        <p:style>
+          <a:lnRef idx="1">
+            <a:schemeClr val="accent1"/>
+          </a:lnRef>
+          <a:fillRef idx="3">
+            <a:schemeClr val="accent1"/>
+          </a:fillRef>
+          <a:effectRef idx="2">
+            <a:schemeClr val="accent1"/>
+          </a:effectRef>
+          <a:fontRef idx="minor">
+            <a:schemeClr val="lt1"/>
+          </a:fontRef>
+        </p:style>
+        <p:txBody>
+          <a:bodyPr rtlCol="0" anchor="ctr"/>
+          <a:lstStyle/>
+          <a:p>
+            <a:pPr algn="ctr"/>
+          </a:p>
+        </p:txBody>
+      </p:sp>
+      <p:sp>
+        <p:nvSpPr>
+          <p:cNvPr id="10" name="TextBox 9"/>
+          <p:cNvSpPr txBox="1"/>
+          <p:nvPr/>
+        </p:nvSpPr>
+        <p:spPr>
+          <a:xfrm>
+            <a:off x="9674352" y="1600200"/>
+            <a:ext cx="1508760" cy="457200"/>
+          </a:xfrm>
+          <a:prstGeom prst="rect">
+            <a:avLst/>
+          </a:prstGeom>
+          <a:noFill/>
+        </p:spPr>
+        <p:txBody>
+          <a:bodyPr wrap="square" lIns="27432" rIns="27432" tIns="27432" bIns="27432" anchor="t">
+            <a:spAutoFit/>
+          </a:bodyPr>
+          <a:lstStyle/>
+          <a:p>
+            <a:pPr algn="ctr"/>
+            <a:r>
+              <a:rPr sz="2500" b="1" i="0">
+                <a:solidFill>
+                  <a:srgbClr val="102A43"/>
+                </a:solidFill>
+                <a:latin typeface="Aptos"/>
+              </a:rPr>
+              <a:t>3</a:t>
+            </a:r>
+          </a:p>
+        </p:txBody>
+      </p:sp>
+      <p:sp>
+        <p:nvSpPr>
+          <p:cNvPr id="11" name="TextBox 10"/>
+          <p:cNvSpPr txBox="1"/>
+          <p:nvPr/>
+        </p:nvSpPr>
+        <p:spPr>
+          <a:xfrm>
+            <a:off x="9784080" y="2139696"/>
+            <a:ext cx="1289304" cy="265176"/>
+          </a:xfrm>
+          <a:prstGeom prst="rect">
+            <a:avLst/>
+          </a:prstGeom>
+          <a:noFill/>
+        </p:spPr>
+        <p:txBody>
+          <a:bodyPr wrap="square" lIns="27432" rIns="27432" tIns="27432" bIns="27432" anchor="t">
+            <a:spAutoFit/>
+          </a:bodyPr>
+          <a:lstStyle/>
+          <a:p>
+            <a:pPr algn="ctr"/>
+            <a:r>
+              <a:rPr sz="1050" b="1" i="0">
+                <a:solidFill>
+                  <a:srgbClr val="647487"/>
+                </a:solidFill>
+                <a:latin typeface="Aptos"/>
+              </a:rPr>
+              <a:t>baze de date</a:t>
+            </a:r>
+          </a:p>
+        </p:txBody>
+      </p:sp>
+      <p:sp>
+        <p:nvSpPr>
+          <p:cNvPr id="12" name="Rounded Rectangle 11"/>
+          <p:cNvSpPr/>
+          <p:nvPr/>
+        </p:nvSpPr>
+        <p:spPr>
+          <a:xfrm>
+            <a:off x="7918704" y="2916936"/>
+            <a:ext cx="1508760" cy="1188720"/>
+          </a:xfrm>
+          <a:prstGeom prst="roundRect">
+            <a:avLst>
+              <a:gd name="adj" fmla="val 10769"/>
+            </a:avLst>
+          </a:prstGeom>
+          <a:solidFill>
+            <a:srgbClr val="FFFFFF"/>
+          </a:solidFill>
+          <a:ln w="12700">
+            <a:solidFill>
+              <a:srgbClr val="D6DEE6"/>
+            </a:solidFill>
+          </a:ln>
+        </p:spPr>
+        <p:style>
+          <a:lnRef idx="1">
+            <a:schemeClr val="accent1"/>
+          </a:lnRef>
+          <a:fillRef idx="3">
+            <a:schemeClr val="accent1"/>
+          </a:fillRef>
+          <a:effectRef idx="2">
+            <a:schemeClr val="accent1"/>
+          </a:effectRef>
+          <a:fontRef idx="minor">
+            <a:schemeClr val="lt1"/>
+          </a:fontRef>
+        </p:style>
+        <p:txBody>
+          <a:bodyPr rtlCol="0" anchor="ctr"/>
+          <a:lstStyle/>
+          <a:p>
+            <a:pPr algn="ctr"/>
+          </a:p>
+        </p:txBody>
+      </p:sp>
+      <p:sp>
+        <p:nvSpPr>
+          <p:cNvPr id="13" name="TextBox 12"/>
+          <p:cNvSpPr txBox="1"/>
+          <p:nvPr/>
+        </p:nvSpPr>
+        <p:spPr>
+          <a:xfrm>
+            <a:off x="7918704" y="3090672"/>
+            <a:ext cx="1508760" cy="457200"/>
+          </a:xfrm>
+          <a:prstGeom prst="rect">
+            <a:avLst/>
+          </a:prstGeom>
+          <a:noFill/>
+        </p:spPr>
+        <p:txBody>
+          <a:bodyPr wrap="square" lIns="27432" rIns="27432" tIns="27432" bIns="27432" anchor="t">
+            <a:spAutoFit/>
+          </a:bodyPr>
+          <a:lstStyle/>
+          <a:p>
+            <a:pPr algn="ctr"/>
+            <a:r>
+              <a:rPr sz="2500" b="1" i="0">
+                <a:solidFill>
+                  <a:srgbClr val="102A43"/>
+                </a:solidFill>
+                <a:latin typeface="Aptos"/>
+              </a:rPr>
+              <a:t>93</a:t>
+            </a:r>
+          </a:p>
+        </p:txBody>
+      </p:sp>
+      <p:sp>
+        <p:nvSpPr>
+          <p:cNvPr id="14" name="TextBox 13"/>
+          <p:cNvSpPr txBox="1"/>
+          <p:nvPr/>
+        </p:nvSpPr>
+        <p:spPr>
+          <a:xfrm>
+            <a:off x="8028431" y="3630168"/>
+            <a:ext cx="1289304" cy="265176"/>
+          </a:xfrm>
+          <a:prstGeom prst="rect">
+            <a:avLst/>
+          </a:prstGeom>
+          <a:noFill/>
+        </p:spPr>
+        <p:txBody>
+          <a:bodyPr wrap="square" lIns="27432" rIns="27432" tIns="27432" bIns="27432" anchor="t">
+            <a:spAutoFit/>
+          </a:bodyPr>
+          <a:lstStyle/>
+          <a:p>
+            <a:pPr algn="ctr"/>
+            <a:r>
+              <a:rPr sz="1050" b="1" i="0">
+                <a:solidFill>
+                  <a:srgbClr val="647487"/>
+                </a:solidFill>
+                <a:latin typeface="Aptos"/>
+              </a:rPr>
+              <a:t>întrebări proprii</a:t>
+            </a:r>
+          </a:p>
+        </p:txBody>
+      </p:sp>
+      <p:sp>
+        <p:nvSpPr>
+          <p:cNvPr id="15" name="Rounded Rectangle 14"/>
+          <p:cNvSpPr/>
+          <p:nvPr/>
+        </p:nvSpPr>
+        <p:spPr>
+          <a:xfrm>
+            <a:off x="9674352" y="2916936"/>
+            <a:ext cx="1508760" cy="1188720"/>
+          </a:xfrm>
+          <a:prstGeom prst="roundRect">
+            <a:avLst>
+              <a:gd name="adj" fmla="val 10769"/>
+            </a:avLst>
+          </a:prstGeom>
+          <a:solidFill>
+            <a:srgbClr val="FFFFFF"/>
+          </a:solidFill>
+          <a:ln w="12700">
+            <a:solidFill>
+              <a:srgbClr val="D6DEE6"/>
+            </a:solidFill>
+          </a:ln>
+        </p:spPr>
+        <p:style>
+          <a:lnRef idx="1">
+            <a:schemeClr val="accent1"/>
+          </a:lnRef>
+          <a:fillRef idx="3">
+            <a:schemeClr val="accent1"/>
+          </a:fillRef>
+          <a:effectRef idx="2">
+            <a:schemeClr val="accent1"/>
+          </a:effectRef>
+          <a:fontRef idx="minor">
+            <a:schemeClr val="lt1"/>
+          </a:fontRef>
+        </p:style>
+        <p:txBody>
+          <a:bodyPr rtlCol="0" anchor="ctr"/>
+          <a:lstStyle/>
+          <a:p>
+            <a:pPr algn="ctr"/>
+          </a:p>
+        </p:txBody>
+      </p:sp>
+      <p:sp>
+        <p:nvSpPr>
+          <p:cNvPr id="16" name="TextBox 15"/>
+          <p:cNvSpPr txBox="1"/>
+          <p:nvPr/>
+        </p:nvSpPr>
+        <p:spPr>
+          <a:xfrm>
+            <a:off x="9674352" y="3090672"/>
+            <a:ext cx="1508760" cy="457200"/>
+          </a:xfrm>
+          <a:prstGeom prst="rect">
+            <a:avLst/>
+          </a:prstGeom>
+          <a:noFill/>
+        </p:spPr>
+        <p:txBody>
+          <a:bodyPr wrap="square" lIns="27432" rIns="27432" tIns="27432" bIns="27432" anchor="t">
+            <a:spAutoFit/>
+          </a:bodyPr>
+          <a:lstStyle/>
+          <a:p>
+            <a:pPr algn="ctr"/>
+            <a:r>
+              <a:rPr sz="2500" b="1" i="0">
+                <a:solidFill>
+                  <a:srgbClr val="102A43"/>
+                </a:solidFill>
+                <a:latin typeface="Aptos"/>
+              </a:rPr>
+              <a:t>1.534</a:t>
+            </a:r>
+          </a:p>
+        </p:txBody>
+      </p:sp>
+      <p:sp>
+        <p:nvSpPr>
+          <p:cNvPr id="17" name="TextBox 16"/>
+          <p:cNvSpPr txBox="1"/>
+          <p:nvPr/>
+        </p:nvSpPr>
+        <p:spPr>
+          <a:xfrm>
+            <a:off x="9784080" y="3630168"/>
+            <a:ext cx="1289304" cy="265176"/>
+          </a:xfrm>
+          <a:prstGeom prst="rect">
+            <a:avLst/>
+          </a:prstGeom>
+          <a:noFill/>
+        </p:spPr>
+        <p:txBody>
+          <a:bodyPr wrap="square" lIns="27432" rIns="27432" tIns="27432" bIns="27432" anchor="t">
+            <a:spAutoFit/>
+          </a:bodyPr>
+          <a:lstStyle/>
+          <a:p>
+            <a:pPr algn="ctr"/>
+            <a:r>
+              <a:rPr sz="1050" b="1" i="0">
+                <a:solidFill>
+                  <a:srgbClr val="647487"/>
+                </a:solidFill>
+                <a:latin typeface="Aptos"/>
+              </a:rPr>
+              <a:t>întrebări BIRD-SQL</a:t>
+            </a:r>
+          </a:p>
+        </p:txBody>
+      </p:sp>
+      <p:sp>
+        <p:nvSpPr>
+          <p:cNvPr id="18" name="Rounded Rectangle 17"/>
+          <p:cNvSpPr/>
+          <p:nvPr/>
+        </p:nvSpPr>
+        <p:spPr>
+          <a:xfrm>
+            <a:off x="7918704" y="4663440"/>
+            <a:ext cx="3264408" cy="1024128"/>
+          </a:xfrm>
+          <a:prstGeom prst="roundRect">
+            <a:avLst>
+              <a:gd name="adj" fmla="val 12500"/>
+            </a:avLst>
+          </a:prstGeom>
+          <a:solidFill>
+            <a:srgbClr val="E8F2FA"/>
+          </a:solidFill>
+          <a:ln w="12700">
+            <a:solidFill>
+              <a:srgbClr val="E8F2FA"/>
+            </a:solidFill>
+          </a:ln>
+        </p:spPr>
+        <p:style>
+          <a:lnRef idx="1">
+            <a:schemeClr val="accent1"/>
+          </a:lnRef>
+          <a:fillRef idx="3">
+            <a:schemeClr val="accent1"/>
+          </a:fillRef>
+          <a:effectRef idx="2">
+            <a:schemeClr val="accent1"/>
+          </a:effectRef>
+          <a:fontRef idx="minor">
+            <a:schemeClr val="lt1"/>
+          </a:fontRef>
+        </p:style>
+        <p:txBody>
+          <a:bodyPr rtlCol="0" anchor="ctr"/>
+          <a:lstStyle/>
+          <a:p>
+            <a:pPr algn="ctr"/>
+          </a:p>
+        </p:txBody>
+      </p:sp>
+      <p:sp>
+        <p:nvSpPr>
+          <p:cNvPr id="19" name="TextBox 18"/>
+          <p:cNvSpPr txBox="1"/>
+          <p:nvPr/>
+        </p:nvSpPr>
+        <p:spPr>
+          <a:xfrm>
+            <a:off x="8165592" y="4901184"/>
+            <a:ext cx="2770632" cy="548640"/>
+          </a:xfrm>
+          <a:prstGeom prst="rect">
+            <a:avLst/>
+          </a:prstGeom>
+          <a:noFill/>
+        </p:spPr>
+        <p:txBody>
+          <a:bodyPr wrap="square" lIns="27432" rIns="27432" tIns="27432" bIns="27432" anchor="t">
+            <a:spAutoFit/>
+          </a:bodyPr>
+          <a:lstStyle/>
+          <a:p>
+            <a:pPr algn="ctr"/>
+            <a:r>
+              <a:rPr sz="1500" b="1" i="0">
                 <a:solidFill>
                   <a:srgbClr val="1F6FB4"/>
                 </a:solidFill>
                 <a:latin typeface="Aptos"/>
               </a:rPr>
-              <a:t>100%</a:t>
-            </a:r>
-          </a:p>
-        </p:txBody>
-      </p:sp>
-      <p:sp>
-        <p:nvSpPr>
-          <p:cNvPr id="7" name="TextBox 6"/>
-          <p:cNvSpPr txBox="1"/>
-          <p:nvPr/>
-        </p:nvSpPr>
-        <p:spPr>
-          <a:xfrm>
-            <a:off x="8833104" y="2350008"/>
-            <a:ext cx="2231136" cy="228600"/>
-          </a:xfrm>
-          <a:prstGeom prst="rect">
-            <a:avLst/>
-          </a:prstGeom>
-          <a:noFill/>
-        </p:spPr>
-        <p:txBody>
-          <a:bodyPr wrap="square" lIns="27432" rIns="27432" tIns="27432" bIns="27432" anchor="t">
-            <a:spAutoFit/>
-          </a:bodyPr>
-          <a:lstStyle/>
-          <a:p>
-            <a:pPr algn="l"/>
-            <a:r>
-              <a:rPr sz="1150" b="0" i="0">
-                <a:solidFill>
-                  <a:srgbClr val="C8D7E4"/>
-                </a:solidFill>
-                <a:latin typeface="Aptos"/>
-              </a:rPr>
-              <a:t>cel mai bun apel unic</a:t>
-            </a:r>
-          </a:p>
-        </p:txBody>
-      </p:sp>
-      <p:sp>
-        <p:nvSpPr>
-          <p:cNvPr id="8" name="TextBox 7"/>
-          <p:cNvSpPr txBox="1"/>
-          <p:nvPr/>
-        </p:nvSpPr>
-        <p:spPr>
-          <a:xfrm>
-            <a:off x="8814816" y="2990088"/>
-            <a:ext cx="2331720" cy="502920"/>
-          </a:xfrm>
-          <a:prstGeom prst="rect">
-            <a:avLst/>
-          </a:prstGeom>
-          <a:noFill/>
-        </p:spPr>
-        <p:txBody>
-          <a:bodyPr wrap="square" lIns="27432" rIns="27432" tIns="27432" bIns="27432" anchor="t">
-            <a:spAutoFit/>
-          </a:bodyPr>
-          <a:lstStyle/>
-          <a:p>
-            <a:pPr algn="l"/>
-            <a:r>
-              <a:rPr sz="2600" b="1" i="0">
-                <a:solidFill>
-                  <a:srgbClr val="C1483A"/>
-                </a:solidFill>
-                <a:latin typeface="Aptos"/>
-              </a:rPr>
-              <a:t>95,5%</a:t>
-            </a:r>
-          </a:p>
-        </p:txBody>
-      </p:sp>
-      <p:sp>
-        <p:nvSpPr>
-          <p:cNvPr id="9" name="TextBox 8"/>
-          <p:cNvSpPr txBox="1"/>
-          <p:nvPr/>
-        </p:nvSpPr>
-        <p:spPr>
-          <a:xfrm>
-            <a:off x="8833104" y="3493008"/>
-            <a:ext cx="2231136" cy="228600"/>
-          </a:xfrm>
-          <a:prstGeom prst="rect">
-            <a:avLst/>
-          </a:prstGeom>
-          <a:noFill/>
-        </p:spPr>
-        <p:txBody>
-          <a:bodyPr wrap="square" lIns="27432" rIns="27432" tIns="27432" bIns="27432" anchor="t">
-            <a:spAutoFit/>
-          </a:bodyPr>
-          <a:lstStyle/>
-          <a:p>
-            <a:pPr algn="l"/>
-            <a:r>
-              <a:rPr sz="1150" b="0" i="0">
-                <a:solidFill>
-                  <a:srgbClr val="C8D7E4"/>
-                </a:solidFill>
-                <a:latin typeface="Aptos"/>
-              </a:rPr>
-              <a:t>cel mai bun agent</a:t>
-            </a:r>
-          </a:p>
-        </p:txBody>
-      </p:sp>
-      <p:sp>
-        <p:nvSpPr>
-          <p:cNvPr id="10" name="TextBox 9"/>
-          <p:cNvSpPr txBox="1"/>
-          <p:nvPr/>
-        </p:nvSpPr>
-        <p:spPr>
-          <a:xfrm>
-            <a:off x="8814816" y="4133087"/>
-            <a:ext cx="2331720" cy="502920"/>
-          </a:xfrm>
-          <a:prstGeom prst="rect">
-            <a:avLst/>
-          </a:prstGeom>
-          <a:noFill/>
-        </p:spPr>
-        <p:txBody>
-          <a:bodyPr wrap="square" lIns="27432" rIns="27432" tIns="27432" bIns="27432" anchor="t">
-            <a:spAutoFit/>
-          </a:bodyPr>
-          <a:lstStyle/>
-          <a:p>
-            <a:pPr algn="l"/>
-            <a:r>
-              <a:rPr sz="2600" b="1" i="0">
-                <a:solidFill>
-                  <a:srgbClr val="2E8B57"/>
-                </a:solidFill>
-                <a:latin typeface="Aptos"/>
-              </a:rPr>
-              <a:t>93,2%</a:t>
-            </a:r>
-          </a:p>
-        </p:txBody>
-      </p:sp>
-      <p:sp>
-        <p:nvSpPr>
-          <p:cNvPr id="11" name="TextBox 10"/>
-          <p:cNvSpPr txBox="1"/>
-          <p:nvPr/>
-        </p:nvSpPr>
-        <p:spPr>
-          <a:xfrm>
-            <a:off x="8833104" y="4636007"/>
-            <a:ext cx="2231136" cy="228600"/>
-          </a:xfrm>
-          <a:prstGeom prst="rect">
-            <a:avLst/>
-          </a:prstGeom>
-          <a:noFill/>
-        </p:spPr>
-        <p:txBody>
-          <a:bodyPr wrap="square" lIns="27432" rIns="27432" tIns="27432" bIns="27432" anchor="t">
-            <a:spAutoFit/>
-          </a:bodyPr>
-          <a:lstStyle/>
-          <a:p>
-            <a:pPr algn="l"/>
-            <a:r>
-              <a:rPr sz="1150" b="0" i="0">
-                <a:solidFill>
-                  <a:srgbClr val="C8D7E4"/>
-                </a:solidFill>
-                <a:latin typeface="Aptos"/>
-              </a:rPr>
-              <a:t>cel mai bun model local</a:t>
-            </a:r>
-          </a:p>
-        </p:txBody>
-      </p:sp>
-      <p:sp>
-        <p:nvSpPr>
-          <p:cNvPr id="12" name="TextBox 11"/>
-          <p:cNvSpPr txBox="1"/>
-          <p:nvPr/>
-        </p:nvSpPr>
-        <p:spPr>
-          <a:xfrm>
-            <a:off x="8814816" y="5285232"/>
-            <a:ext cx="2267712" cy="493776"/>
-          </a:xfrm>
-          <a:prstGeom prst="rect">
-            <a:avLst/>
-          </a:prstGeom>
-          <a:noFill/>
-        </p:spPr>
-        <p:txBody>
-          <a:bodyPr wrap="square" lIns="27432" rIns="27432" tIns="27432" bIns="27432" anchor="t">
-            <a:spAutoFit/>
-          </a:bodyPr>
-          <a:lstStyle/>
-          <a:p>
-            <a:pPr algn="l"/>
-            <a:r>
-              <a:rPr sz="1300" b="1" i="0">
-                <a:solidFill>
-                  <a:srgbClr val="FFFFFF"/>
-                </a:solidFill>
-                <a:latin typeface="Aptos"/>
-              </a:rPr>
-              <a:t>Toate primele patru poziții folosesc cea mai simplă configurație.</a:t>
-            </a:r>
-          </a:p>
-        </p:txBody>
-      </p:sp>
-      <p:sp>
-        <p:nvSpPr>
-          <p:cNvPr id="13" name="TextBox 12"/>
+              <a:t>Nu comparăm textul SQL.
+Comparăm rezultatele obținute.</a:t>
+            </a:r>
+          </a:p>
+        </p:txBody>
+      </p:sp>
+      <p:sp>
+        <p:nvSpPr>
+          <p:cNvPr id="20" name="TextBox 19"/>
           <p:cNvSpPr txBox="1"/>
           <p:nvPr/>
         </p:nvSpPr>
@@ -13375,14 +14703,14 @@
                 </a:solidFill>
                 <a:latin typeface="Aptos"/>
               </a:rPr>
-              <a:t>Acuratețe de execuție pe car_rental, 44 de întrebări punctate</a:t>
-            </a:r>
-          </a:p>
-        </p:txBody>
-      </p:sp>
-      <p:sp>
-        <p:nvSpPr>
-          <p:cNvPr id="14" name="TextBox 13"/>
+              <a:t>Baze: car_rental, AdventureWorks și BIRD-SQL dev</a:t>
+            </a:r>
+          </a:p>
+        </p:txBody>
+      </p:sp>
+      <p:sp>
+        <p:nvSpPr>
+          <p:cNvPr id="21" name="TextBox 20"/>
           <p:cNvSpPr txBox="1"/>
           <p:nvPr/>
         </p:nvSpPr>
@@ -13471,7 +14799,7 @@
                 </a:solidFill>
                 <a:latin typeface="Aptos"/>
               </a:rPr>
-              <a:t>COST VS. ACURATEȚE</a:t>
+              <a:t>DATELE DE EVALUARE</a:t>
             </a:r>
           </a:p>
         </p:txBody>
@@ -13506,35 +14834,46 @@
                 </a:solidFill>
                 <a:latin typeface="Aptos"/>
               </a:rPr>
-              <a:t>Explorarea agentică are un cost structural</a:t>
-            </a:r>
-          </a:p>
-        </p:txBody>
-      </p:sp>
-      <p:pic>
-        <p:nvPicPr>
-          <p:cNvPr id="4" name="Picture 3" descr="fig_cost_accuracy.png"/>
-          <p:cNvPicPr>
-            <a:picLocks noChangeAspect="1"/>
-          </p:cNvPicPr>
-          <p:nvPr/>
-        </p:nvPicPr>
-        <p:blipFill>
-          <a:blip r:embed="rId2"/>
-          <a:stretch>
-            <a:fillRect/>
-          </a:stretch>
-        </p:blipFill>
-        <p:spPr>
-          <a:xfrm>
-            <a:off x="566928" y="1513388"/>
-            <a:ext cx="8046720" cy="4517023"/>
-          </a:xfrm>
-          <a:prstGeom prst="rect">
-            <a:avLst/>
-          </a:prstGeom>
-        </p:spPr>
-      </p:pic>
+              <a:t>Trei seturi, două feluri de dificultate</a:t>
+            </a:r>
+          </a:p>
+        </p:txBody>
+      </p:sp>
+      <p:sp>
+        <p:nvSpPr>
+          <p:cNvPr id="4" name="TextBox 3"/>
+          <p:cNvSpPr txBox="1"/>
+          <p:nvPr/>
+        </p:nvSpPr>
+        <p:spPr>
+          <a:xfrm>
+            <a:off x="658368" y="1335024"/>
+            <a:ext cx="8778240" cy="274320"/>
+          </a:xfrm>
+          <a:prstGeom prst="rect">
+            <a:avLst/>
+          </a:prstGeom>
+          <a:noFill/>
+        </p:spPr>
+        <p:txBody>
+          <a:bodyPr wrap="square" lIns="27432" rIns="27432" tIns="27432" bIns="27432" anchor="t">
+            <a:spAutoFit/>
+          </a:bodyPr>
+          <a:lstStyle/>
+          <a:p>
+            <a:pPr algn="l"/>
+            <a:r>
+              <a:rPr sz="1400" b="1" i="0">
+                <a:solidFill>
+                  <a:srgbClr val="647487"/>
+                </a:solidFill>
+                <a:latin typeface="Aptos"/>
+              </a:rPr>
+              <a:t>Aceeași configurație A, același prompt. Se schimbă doar baza de date.</a:t>
+            </a:r>
+          </a:p>
+        </p:txBody>
+      </p:sp>
       <p:sp>
         <p:nvSpPr>
           <p:cNvPr id="5" name="Rounded Rectangle 4"/>
@@ -13543,12 +14882,698 @@
         </p:nvSpPr>
         <p:spPr>
           <a:xfrm>
-            <a:off x="8814816" y="1399032"/>
-            <a:ext cx="2615184" cy="1938528"/>
+            <a:off x="658368" y="1700784"/>
+            <a:ext cx="3529584" cy="3602736"/>
           </a:xfrm>
           <a:prstGeom prst="roundRect">
             <a:avLst>
-              <a:gd name="adj" fmla="val 6603"/>
+              <a:gd name="adj" fmla="val 3626"/>
+            </a:avLst>
+          </a:prstGeom>
+          <a:solidFill>
+            <a:srgbClr val="FFFFFF"/>
+          </a:solidFill>
+          <a:ln w="12700">
+            <a:solidFill>
+              <a:srgbClr val="D6DEE6"/>
+            </a:solidFill>
+          </a:ln>
+        </p:spPr>
+        <p:style>
+          <a:lnRef idx="1">
+            <a:schemeClr val="accent1"/>
+          </a:lnRef>
+          <a:fillRef idx="3">
+            <a:schemeClr val="accent1"/>
+          </a:fillRef>
+          <a:effectRef idx="2">
+            <a:schemeClr val="accent1"/>
+          </a:effectRef>
+          <a:fontRef idx="minor">
+            <a:schemeClr val="lt1"/>
+          </a:fontRef>
+        </p:style>
+        <p:txBody>
+          <a:bodyPr rtlCol="0" anchor="ctr"/>
+          <a:lstStyle/>
+          <a:p>
+            <a:pPr algn="ctr"/>
+          </a:p>
+        </p:txBody>
+      </p:sp>
+      <p:sp>
+        <p:nvSpPr>
+          <p:cNvPr id="6" name="Rectangle 5"/>
+          <p:cNvSpPr/>
+          <p:nvPr/>
+        </p:nvSpPr>
+        <p:spPr>
+          <a:xfrm>
+            <a:off x="658368" y="1828800"/>
+            <a:ext cx="73152" cy="3346704"/>
+          </a:xfrm>
+          <a:prstGeom prst="rect">
+            <a:avLst/>
+          </a:prstGeom>
+          <a:solidFill>
+            <a:srgbClr val="1F6FB4"/>
+          </a:solidFill>
+          <a:ln w="12700">
+            <a:solidFill>
+              <a:srgbClr val="1F6FB4"/>
+            </a:solidFill>
+          </a:ln>
+        </p:spPr>
+        <p:style>
+          <a:lnRef idx="1">
+            <a:schemeClr val="accent1"/>
+          </a:lnRef>
+          <a:fillRef idx="3">
+            <a:schemeClr val="accent1"/>
+          </a:fillRef>
+          <a:effectRef idx="2">
+            <a:schemeClr val="accent1"/>
+          </a:effectRef>
+          <a:fontRef idx="minor">
+            <a:schemeClr val="lt1"/>
+          </a:fontRef>
+        </p:style>
+        <p:txBody>
+          <a:bodyPr rtlCol="0" anchor="ctr"/>
+          <a:lstStyle/>
+          <a:p>
+            <a:pPr algn="ctr"/>
+          </a:p>
+        </p:txBody>
+      </p:sp>
+      <p:sp>
+        <p:nvSpPr>
+          <p:cNvPr id="7" name="TextBox 6"/>
+          <p:cNvSpPr txBox="1"/>
+          <p:nvPr/>
+        </p:nvSpPr>
+        <p:spPr>
+          <a:xfrm>
+            <a:off x="950976" y="1865376"/>
+            <a:ext cx="3017520" cy="274320"/>
+          </a:xfrm>
+          <a:prstGeom prst="rect">
+            <a:avLst/>
+          </a:prstGeom>
+          <a:noFill/>
+        </p:spPr>
+        <p:txBody>
+          <a:bodyPr wrap="square" lIns="27432" rIns="27432" tIns="27432" bIns="27432" anchor="t">
+            <a:spAutoFit/>
+          </a:bodyPr>
+          <a:lstStyle/>
+          <a:p>
+            <a:pPr algn="l"/>
+            <a:r>
+              <a:rPr sz="1500" b="1" i="0">
+                <a:solidFill>
+                  <a:srgbClr val="102A43"/>
+                </a:solidFill>
+                <a:latin typeface="Consolas"/>
+              </a:rPr>
+              <a:t>car_rental</a:t>
+            </a:r>
+          </a:p>
+        </p:txBody>
+      </p:sp>
+      <p:sp>
+        <p:nvSpPr>
+          <p:cNvPr id="8" name="TextBox 7"/>
+          <p:cNvSpPr txBox="1"/>
+          <p:nvPr/>
+        </p:nvSpPr>
+        <p:spPr>
+          <a:xfrm>
+            <a:off x="950976" y="2176272"/>
+            <a:ext cx="3017520" cy="219456"/>
+          </a:xfrm>
+          <a:prstGeom prst="rect">
+            <a:avLst/>
+          </a:prstGeom>
+          <a:noFill/>
+        </p:spPr>
+        <p:txBody>
+          <a:bodyPr wrap="square" lIns="27432" rIns="27432" tIns="27432" bIns="27432" anchor="t">
+            <a:spAutoFit/>
+          </a:bodyPr>
+          <a:lstStyle/>
+          <a:p>
+            <a:pPr algn="l"/>
+            <a:r>
+              <a:rPr sz="1050" b="1" i="0">
+                <a:solidFill>
+                  <a:srgbClr val="1F6FB4"/>
+                </a:solidFill>
+                <a:latin typeface="Aptos"/>
+              </a:rPr>
+              <a:t>generată de mine</a:t>
+            </a:r>
+          </a:p>
+        </p:txBody>
+      </p:sp>
+      <p:sp>
+        <p:nvSpPr>
+          <p:cNvPr id="9" name="TextBox 8"/>
+          <p:cNvSpPr txBox="1"/>
+          <p:nvPr/>
+        </p:nvSpPr>
+        <p:spPr>
+          <a:xfrm>
+            <a:off x="950976" y="2468880"/>
+            <a:ext cx="3072384" cy="219456"/>
+          </a:xfrm>
+          <a:prstGeom prst="rect">
+            <a:avLst/>
+          </a:prstGeom>
+          <a:noFill/>
+        </p:spPr>
+        <p:txBody>
+          <a:bodyPr wrap="square" lIns="27432" rIns="27432" tIns="27432" bIns="27432" anchor="t">
+            <a:spAutoFit/>
+          </a:bodyPr>
+          <a:lstStyle/>
+          <a:p>
+            <a:pPr algn="l"/>
+            <a:r>
+              <a:rPr sz="1100" b="0" i="0">
+                <a:solidFill>
+                  <a:srgbClr val="17212B"/>
+                </a:solidFill>
+                <a:latin typeface="Aptos"/>
+              </a:rPr>
+              <a:t>9 tabele · 8.026 rânduri</a:t>
+            </a:r>
+          </a:p>
+        </p:txBody>
+      </p:sp>
+      <p:sp>
+        <p:nvSpPr>
+          <p:cNvPr id="10" name="TextBox 9"/>
+          <p:cNvSpPr txBox="1"/>
+          <p:nvPr/>
+        </p:nvSpPr>
+        <p:spPr>
+          <a:xfrm>
+            <a:off x="950976" y="2706624"/>
+            <a:ext cx="3072384" cy="219456"/>
+          </a:xfrm>
+          <a:prstGeom prst="rect">
+            <a:avLst/>
+          </a:prstGeom>
+          <a:noFill/>
+        </p:spPr>
+        <p:txBody>
+          <a:bodyPr wrap="square" lIns="27432" rIns="27432" tIns="27432" bIns="27432" anchor="t">
+            <a:spAutoFit/>
+          </a:bodyPr>
+          <a:lstStyle/>
+          <a:p>
+            <a:pPr algn="l"/>
+            <a:r>
+              <a:rPr sz="1100" b="0" i="0">
+                <a:solidFill>
+                  <a:srgbClr val="17212B"/>
+                </a:solidFill>
+                <a:latin typeface="Aptos"/>
+              </a:rPr>
+              <a:t>51 de întrebări · autor propriu</a:t>
+            </a:r>
+          </a:p>
+        </p:txBody>
+      </p:sp>
+      <p:sp>
+        <p:nvSpPr>
+          <p:cNvPr id="11" name="TextBox 10"/>
+          <p:cNvSpPr txBox="1"/>
+          <p:nvPr/>
+        </p:nvSpPr>
+        <p:spPr>
+          <a:xfrm>
+            <a:off x="950976" y="3035808"/>
+            <a:ext cx="3017520" cy="182880"/>
+          </a:xfrm>
+          <a:prstGeom prst="rect">
+            <a:avLst/>
+          </a:prstGeom>
+          <a:noFill/>
+        </p:spPr>
+        <p:txBody>
+          <a:bodyPr wrap="square" lIns="27432" rIns="27432" tIns="27432" bIns="27432" anchor="t">
+            <a:spAutoFit/>
+          </a:bodyPr>
+          <a:lstStyle/>
+          <a:p>
+            <a:pPr algn="l"/>
+            <a:r>
+              <a:rPr sz="850" b="1" i="0">
+                <a:solidFill>
+                  <a:srgbClr val="647487"/>
+                </a:solidFill>
+                <a:latin typeface="Aptos"/>
+              </a:rPr>
+              <a:t>ÎNTREBARE DIFICILĂ DIN SET</a:t>
+            </a:r>
+          </a:p>
+        </p:txBody>
+      </p:sp>
+      <p:sp>
+        <p:nvSpPr>
+          <p:cNvPr id="12" name="Rounded Rectangle 11"/>
+          <p:cNvSpPr/>
+          <p:nvPr/>
+        </p:nvSpPr>
+        <p:spPr>
+          <a:xfrm>
+            <a:off x="932688" y="3255264"/>
+            <a:ext cx="3108960" cy="1463040"/>
+          </a:xfrm>
+          <a:prstGeom prst="roundRect">
+            <a:avLst>
+              <a:gd name="adj" fmla="val 8750"/>
+            </a:avLst>
+          </a:prstGeom>
+          <a:solidFill>
+            <a:srgbClr val="E8F2FA"/>
+          </a:solidFill>
+          <a:ln w="12700">
+            <a:solidFill>
+              <a:srgbClr val="E8F2FA"/>
+            </a:solidFill>
+          </a:ln>
+        </p:spPr>
+        <p:style>
+          <a:lnRef idx="1">
+            <a:schemeClr val="accent1"/>
+          </a:lnRef>
+          <a:fillRef idx="3">
+            <a:schemeClr val="accent1"/>
+          </a:fillRef>
+          <a:effectRef idx="2">
+            <a:schemeClr val="accent1"/>
+          </a:effectRef>
+          <a:fontRef idx="minor">
+            <a:schemeClr val="lt1"/>
+          </a:fontRef>
+        </p:style>
+        <p:txBody>
+          <a:bodyPr rtlCol="0" anchor="ctr"/>
+          <a:lstStyle/>
+          <a:p>
+            <a:pPr algn="ctr"/>
+          </a:p>
+        </p:txBody>
+      </p:sp>
+      <p:sp>
+        <p:nvSpPr>
+          <p:cNvPr id="13" name="TextBox 12"/>
+          <p:cNvSpPr txBox="1"/>
+          <p:nvPr/>
+        </p:nvSpPr>
+        <p:spPr>
+          <a:xfrm>
+            <a:off x="1060704" y="3346704"/>
+            <a:ext cx="2852928" cy="1280160"/>
+          </a:xfrm>
+          <a:prstGeom prst="rect">
+            <a:avLst/>
+          </a:prstGeom>
+          <a:noFill/>
+        </p:spPr>
+        <p:txBody>
+          <a:bodyPr wrap="square" lIns="27432" rIns="27432" tIns="27432" bIns="27432" anchor="t">
+            <a:spAutoFit/>
+          </a:bodyPr>
+          <a:lstStyle/>
+          <a:p>
+            <a:pPr algn="l"/>
+            <a:r>
+              <a:rPr sz="950" b="0" i="1">
+                <a:solidFill>
+                  <a:srgbClr val="17212B"/>
+                </a:solidFill>
+                <a:latin typeface="Aptos"/>
+              </a:rPr>
+              <a:t>„What is the longest run of consecutive calendar days on which at least one reservation was picked up at the Downtown Hub branch?”</a:t>
+            </a:r>
+          </a:p>
+        </p:txBody>
+      </p:sp>
+      <p:sp>
+        <p:nvSpPr>
+          <p:cNvPr id="14" name="TextBox 13"/>
+          <p:cNvSpPr txBox="1"/>
+          <p:nvPr/>
+        </p:nvSpPr>
+        <p:spPr>
+          <a:xfrm>
+            <a:off x="950976" y="4754880"/>
+            <a:ext cx="3017520" cy="438912"/>
+          </a:xfrm>
+          <a:prstGeom prst="rect">
+            <a:avLst/>
+          </a:prstGeom>
+          <a:noFill/>
+        </p:spPr>
+        <p:txBody>
+          <a:bodyPr wrap="square" lIns="27432" rIns="27432" tIns="27432" bIns="27432" anchor="t">
+            <a:spAutoFit/>
+          </a:bodyPr>
+          <a:lstStyle/>
+          <a:p>
+            <a:pPr algn="l"/>
+            <a:r>
+              <a:rPr sz="2400" b="1" i="0">
+                <a:solidFill>
+                  <a:srgbClr val="1F6FB4"/>
+                </a:solidFill>
+                <a:latin typeface="Aptos"/>
+              </a:rPr>
+              <a:t>100 %</a:t>
+            </a:r>
+          </a:p>
+        </p:txBody>
+      </p:sp>
+      <p:sp>
+        <p:nvSpPr>
+          <p:cNvPr id="15" name="TextBox 14"/>
+          <p:cNvSpPr txBox="1"/>
+          <p:nvPr/>
+        </p:nvSpPr>
+        <p:spPr>
+          <a:xfrm>
+            <a:off x="950976" y="5102352"/>
+            <a:ext cx="3017520" cy="182880"/>
+          </a:xfrm>
+          <a:prstGeom prst="rect">
+            <a:avLst/>
+          </a:prstGeom>
+          <a:noFill/>
+        </p:spPr>
+        <p:txBody>
+          <a:bodyPr wrap="square" lIns="27432" rIns="27432" tIns="27432" bIns="27432" anchor="t">
+            <a:spAutoFit/>
+          </a:bodyPr>
+          <a:lstStyle/>
+          <a:p>
+            <a:pPr algn="l"/>
+            <a:r>
+              <a:rPr sz="900" b="0" i="0">
+                <a:solidFill>
+                  <a:srgbClr val="647487"/>
+                </a:solidFill>
+                <a:latin typeface="Aptos"/>
+              </a:rPr>
+              <a:t>acuratețe de execuție</a:t>
+            </a:r>
+          </a:p>
+        </p:txBody>
+      </p:sp>
+      <p:sp>
+        <p:nvSpPr>
+          <p:cNvPr id="16" name="Rounded Rectangle 15"/>
+          <p:cNvSpPr/>
+          <p:nvPr/>
+        </p:nvSpPr>
+        <p:spPr>
+          <a:xfrm>
+            <a:off x="4370831" y="1700784"/>
+            <a:ext cx="3529584" cy="3602736"/>
+          </a:xfrm>
+          <a:prstGeom prst="roundRect">
+            <a:avLst>
+              <a:gd name="adj" fmla="val 3626"/>
+            </a:avLst>
+          </a:prstGeom>
+          <a:solidFill>
+            <a:srgbClr val="FFFFFF"/>
+          </a:solidFill>
+          <a:ln w="12700">
+            <a:solidFill>
+              <a:srgbClr val="D6DEE6"/>
+            </a:solidFill>
+          </a:ln>
+        </p:spPr>
+        <p:style>
+          <a:lnRef idx="1">
+            <a:schemeClr val="accent1"/>
+          </a:lnRef>
+          <a:fillRef idx="3">
+            <a:schemeClr val="accent1"/>
+          </a:fillRef>
+          <a:effectRef idx="2">
+            <a:schemeClr val="accent1"/>
+          </a:effectRef>
+          <a:fontRef idx="minor">
+            <a:schemeClr val="lt1"/>
+          </a:fontRef>
+        </p:style>
+        <p:txBody>
+          <a:bodyPr rtlCol="0" anchor="ctr"/>
+          <a:lstStyle/>
+          <a:p>
+            <a:pPr algn="ctr"/>
+          </a:p>
+        </p:txBody>
+      </p:sp>
+      <p:sp>
+        <p:nvSpPr>
+          <p:cNvPr id="17" name="Rectangle 16"/>
+          <p:cNvSpPr/>
+          <p:nvPr/>
+        </p:nvSpPr>
+        <p:spPr>
+          <a:xfrm>
+            <a:off x="4370831" y="1828800"/>
+            <a:ext cx="73152" cy="3346704"/>
+          </a:xfrm>
+          <a:prstGeom prst="rect">
+            <a:avLst/>
+          </a:prstGeom>
+          <a:solidFill>
+            <a:srgbClr val="C1483A"/>
+          </a:solidFill>
+          <a:ln w="12700">
+            <a:solidFill>
+              <a:srgbClr val="C1483A"/>
+            </a:solidFill>
+          </a:ln>
+        </p:spPr>
+        <p:style>
+          <a:lnRef idx="1">
+            <a:schemeClr val="accent1"/>
+          </a:lnRef>
+          <a:fillRef idx="3">
+            <a:schemeClr val="accent1"/>
+          </a:fillRef>
+          <a:effectRef idx="2">
+            <a:schemeClr val="accent1"/>
+          </a:effectRef>
+          <a:fontRef idx="minor">
+            <a:schemeClr val="lt1"/>
+          </a:fontRef>
+        </p:style>
+        <p:txBody>
+          <a:bodyPr rtlCol="0" anchor="ctr"/>
+          <a:lstStyle/>
+          <a:p>
+            <a:pPr algn="ctr"/>
+          </a:p>
+        </p:txBody>
+      </p:sp>
+      <p:sp>
+        <p:nvSpPr>
+          <p:cNvPr id="18" name="TextBox 17"/>
+          <p:cNvSpPr txBox="1"/>
+          <p:nvPr/>
+        </p:nvSpPr>
+        <p:spPr>
+          <a:xfrm>
+            <a:off x="4663440" y="1865376"/>
+            <a:ext cx="3017520" cy="274320"/>
+          </a:xfrm>
+          <a:prstGeom prst="rect">
+            <a:avLst/>
+          </a:prstGeom>
+          <a:noFill/>
+        </p:spPr>
+        <p:txBody>
+          <a:bodyPr wrap="square" lIns="27432" rIns="27432" tIns="27432" bIns="27432" anchor="t">
+            <a:spAutoFit/>
+          </a:bodyPr>
+          <a:lstStyle/>
+          <a:p>
+            <a:pPr algn="l"/>
+            <a:r>
+              <a:rPr sz="1500" b="1" i="0">
+                <a:solidFill>
+                  <a:srgbClr val="102A43"/>
+                </a:solidFill>
+                <a:latin typeface="Consolas"/>
+              </a:rPr>
+              <a:t>adventureworks</a:t>
+            </a:r>
+          </a:p>
+        </p:txBody>
+      </p:sp>
+      <p:sp>
+        <p:nvSpPr>
+          <p:cNvPr id="19" name="TextBox 18"/>
+          <p:cNvSpPr txBox="1"/>
+          <p:nvPr/>
+        </p:nvSpPr>
+        <p:spPr>
+          <a:xfrm>
+            <a:off x="4663440" y="2176272"/>
+            <a:ext cx="3017520" cy="219456"/>
+          </a:xfrm>
+          <a:prstGeom prst="rect">
+            <a:avLst/>
+          </a:prstGeom>
+          <a:noFill/>
+        </p:spPr>
+        <p:txBody>
+          <a:bodyPr wrap="square" lIns="27432" rIns="27432" tIns="27432" bIns="27432" anchor="t">
+            <a:spAutoFit/>
+          </a:bodyPr>
+          <a:lstStyle/>
+          <a:p>
+            <a:pPr algn="l"/>
+            <a:r>
+              <a:rPr sz="1050" b="1" i="0">
+                <a:solidFill>
+                  <a:srgbClr val="C1483A"/>
+                </a:solidFill>
+                <a:latin typeface="Aptos"/>
+              </a:rPr>
+              <a:t>OLTP public, Microsoft</a:t>
+            </a:r>
+          </a:p>
+        </p:txBody>
+      </p:sp>
+      <p:sp>
+        <p:nvSpPr>
+          <p:cNvPr id="20" name="TextBox 19"/>
+          <p:cNvSpPr txBox="1"/>
+          <p:nvPr/>
+        </p:nvSpPr>
+        <p:spPr>
+          <a:xfrm>
+            <a:off x="4663440" y="2468880"/>
+            <a:ext cx="3072384" cy="219456"/>
+          </a:xfrm>
+          <a:prstGeom prst="rect">
+            <a:avLst/>
+          </a:prstGeom>
+          <a:noFill/>
+        </p:spPr>
+        <p:txBody>
+          <a:bodyPr wrap="square" lIns="27432" rIns="27432" tIns="27432" bIns="27432" anchor="t">
+            <a:spAutoFit/>
+          </a:bodyPr>
+          <a:lstStyle/>
+          <a:p>
+            <a:pPr algn="l"/>
+            <a:r>
+              <a:rPr sz="1100" b="0" i="0">
+                <a:solidFill>
+                  <a:srgbClr val="17212B"/>
+                </a:solidFill>
+                <a:latin typeface="Aptos"/>
+              </a:rPr>
+              <a:t>68 tabele · ≈761.000 rânduri</a:t>
+            </a:r>
+          </a:p>
+        </p:txBody>
+      </p:sp>
+      <p:sp>
+        <p:nvSpPr>
+          <p:cNvPr id="21" name="TextBox 20"/>
+          <p:cNvSpPr txBox="1"/>
+          <p:nvPr/>
+        </p:nvSpPr>
+        <p:spPr>
+          <a:xfrm>
+            <a:off x="4663440" y="2706624"/>
+            <a:ext cx="3072384" cy="219456"/>
+          </a:xfrm>
+          <a:prstGeom prst="rect">
+            <a:avLst/>
+          </a:prstGeom>
+          <a:noFill/>
+        </p:spPr>
+        <p:txBody>
+          <a:bodyPr wrap="square" lIns="27432" rIns="27432" tIns="27432" bIns="27432" anchor="t">
+            <a:spAutoFit/>
+          </a:bodyPr>
+          <a:lstStyle/>
+          <a:p>
+            <a:pPr algn="l"/>
+            <a:r>
+              <a:rPr sz="1100" b="0" i="0">
+                <a:solidFill>
+                  <a:srgbClr val="17212B"/>
+                </a:solidFill>
+                <a:latin typeface="Aptos"/>
+              </a:rPr>
+              <a:t>56 de întrebări · autor propriu</a:t>
+            </a:r>
+          </a:p>
+        </p:txBody>
+      </p:sp>
+      <p:sp>
+        <p:nvSpPr>
+          <p:cNvPr id="22" name="TextBox 21"/>
+          <p:cNvSpPr txBox="1"/>
+          <p:nvPr/>
+        </p:nvSpPr>
+        <p:spPr>
+          <a:xfrm>
+            <a:off x="4663440" y="3035808"/>
+            <a:ext cx="3017520" cy="182880"/>
+          </a:xfrm>
+          <a:prstGeom prst="rect">
+            <a:avLst/>
+          </a:prstGeom>
+          <a:noFill/>
+        </p:spPr>
+        <p:txBody>
+          <a:bodyPr wrap="square" lIns="27432" rIns="27432" tIns="27432" bIns="27432" anchor="t">
+            <a:spAutoFit/>
+          </a:bodyPr>
+          <a:lstStyle/>
+          <a:p>
+            <a:pPr algn="l"/>
+            <a:r>
+              <a:rPr sz="850" b="1" i="0">
+                <a:solidFill>
+                  <a:srgbClr val="647487"/>
+                </a:solidFill>
+                <a:latin typeface="Aptos"/>
+              </a:rPr>
+              <a:t>ÎNTREBARE DIFICILĂ DIN SET</a:t>
+            </a:r>
+          </a:p>
+        </p:txBody>
+      </p:sp>
+      <p:sp>
+        <p:nvSpPr>
+          <p:cNvPr id="23" name="Rounded Rectangle 22"/>
+          <p:cNvSpPr/>
+          <p:nvPr/>
+        </p:nvSpPr>
+        <p:spPr>
+          <a:xfrm>
+            <a:off x="4645151" y="3255264"/>
+            <a:ext cx="3108960" cy="1463040"/>
+          </a:xfrm>
+          <a:prstGeom prst="roundRect">
+            <a:avLst>
+              <a:gd name="adj" fmla="val 8750"/>
             </a:avLst>
           </a:prstGeom>
           <a:solidFill>
@@ -13584,88 +15609,123 @@
       </p:sp>
       <p:sp>
         <p:nvSpPr>
-          <p:cNvPr id="6" name="TextBox 5"/>
-          <p:cNvSpPr txBox="1"/>
-          <p:nvPr/>
-        </p:nvSpPr>
-        <p:spPr>
-          <a:xfrm>
-            <a:off x="8814816" y="1764792"/>
-            <a:ext cx="2615184" cy="576072"/>
-          </a:xfrm>
-          <a:prstGeom prst="rect">
-            <a:avLst/>
-          </a:prstGeom>
-          <a:noFill/>
-        </p:spPr>
-        <p:txBody>
-          <a:bodyPr wrap="square" lIns="27432" rIns="27432" tIns="27432" bIns="27432" anchor="t">
-            <a:spAutoFit/>
-          </a:bodyPr>
-          <a:lstStyle/>
-          <a:p>
-            <a:pPr algn="ctr"/>
-            <a:r>
-              <a:rPr sz="3100" b="1" i="0">
+          <p:cNvPr id="24" name="TextBox 23"/>
+          <p:cNvSpPr txBox="1"/>
+          <p:nvPr/>
+        </p:nvSpPr>
+        <p:spPr>
+          <a:xfrm>
+            <a:off x="4773168" y="3346704"/>
+            <a:ext cx="2852928" cy="1280160"/>
+          </a:xfrm>
+          <a:prstGeom prst="rect">
+            <a:avLst/>
+          </a:prstGeom>
+          <a:noFill/>
+        </p:spPr>
+        <p:txBody>
+          <a:bodyPr wrap="square" lIns="27432" rIns="27432" tIns="27432" bIns="27432" anchor="t">
+            <a:spAutoFit/>
+          </a:bodyPr>
+          <a:lstStyle/>
+          <a:p>
+            <a:pPr algn="l"/>
+            <a:r>
+              <a:rPr sz="950" b="0" i="1">
+                <a:solidFill>
+                  <a:srgbClr val="17212B"/>
+                </a:solidFill>
+                <a:latin typeface="Aptos"/>
+              </a:rPr>
+              <a:t>„For each product category, what is the value-weighted average discount rate on its sales order lines — the sum of unitpricediscount × unitprice × quantity, divided by the sum of unitprice × quantity?”</a:t>
+            </a:r>
+          </a:p>
+        </p:txBody>
+      </p:sp>
+      <p:sp>
+        <p:nvSpPr>
+          <p:cNvPr id="25" name="TextBox 24"/>
+          <p:cNvSpPr txBox="1"/>
+          <p:nvPr/>
+        </p:nvSpPr>
+        <p:spPr>
+          <a:xfrm>
+            <a:off x="4663440" y="4754880"/>
+            <a:ext cx="3017520" cy="438912"/>
+          </a:xfrm>
+          <a:prstGeom prst="rect">
+            <a:avLst/>
+          </a:prstGeom>
+          <a:noFill/>
+        </p:spPr>
+        <p:txBody>
+          <a:bodyPr wrap="square" lIns="27432" rIns="27432" tIns="27432" bIns="27432" anchor="t">
+            <a:spAutoFit/>
+          </a:bodyPr>
+          <a:lstStyle/>
+          <a:p>
+            <a:pPr algn="l"/>
+            <a:r>
+              <a:rPr sz="2400" b="1" i="0">
                 <a:solidFill>
                   <a:srgbClr val="C1483A"/>
                 </a:solidFill>
                 <a:latin typeface="Aptos"/>
               </a:rPr>
-              <a:t>9–63×</a:t>
-            </a:r>
-          </a:p>
-        </p:txBody>
-      </p:sp>
-      <p:sp>
-        <p:nvSpPr>
-          <p:cNvPr id="7" name="TextBox 6"/>
-          <p:cNvSpPr txBox="1"/>
-          <p:nvPr/>
-        </p:nvSpPr>
-        <p:spPr>
-          <a:xfrm>
-            <a:off x="9052560" y="2468880"/>
-            <a:ext cx="2139696" cy="329184"/>
-          </a:xfrm>
-          <a:prstGeom prst="rect">
-            <a:avLst/>
-          </a:prstGeom>
-          <a:noFill/>
-        </p:spPr>
-        <p:txBody>
-          <a:bodyPr wrap="square" lIns="27432" rIns="27432" tIns="27432" bIns="27432" anchor="t">
-            <a:spAutoFit/>
-          </a:bodyPr>
-          <a:lstStyle/>
-          <a:p>
-            <a:pPr algn="ctr"/>
-            <a:r>
-              <a:rPr sz="1200" b="1" i="0">
-                <a:solidFill>
-                  <a:srgbClr val="C1483A"/>
-                </a:solidFill>
-                <a:latin typeface="Aptos"/>
-              </a:rPr>
-              <a:t>mai scump / 100 întrebări</a:t>
-            </a:r>
-          </a:p>
-        </p:txBody>
-      </p:sp>
-      <p:sp>
-        <p:nvSpPr>
-          <p:cNvPr id="8" name="Rounded Rectangle 7"/>
+              <a:t>100 %</a:t>
+            </a:r>
+          </a:p>
+        </p:txBody>
+      </p:sp>
+      <p:sp>
+        <p:nvSpPr>
+          <p:cNvPr id="26" name="TextBox 25"/>
+          <p:cNvSpPr txBox="1"/>
+          <p:nvPr/>
+        </p:nvSpPr>
+        <p:spPr>
+          <a:xfrm>
+            <a:off x="4663440" y="5102352"/>
+            <a:ext cx="3017520" cy="182880"/>
+          </a:xfrm>
+          <a:prstGeom prst="rect">
+            <a:avLst/>
+          </a:prstGeom>
+          <a:noFill/>
+        </p:spPr>
+        <p:txBody>
+          <a:bodyPr wrap="square" lIns="27432" rIns="27432" tIns="27432" bIns="27432" anchor="t">
+            <a:spAutoFit/>
+          </a:bodyPr>
+          <a:lstStyle/>
+          <a:p>
+            <a:pPr algn="l"/>
+            <a:r>
+              <a:rPr sz="900" b="0" i="0">
+                <a:solidFill>
+                  <a:srgbClr val="647487"/>
+                </a:solidFill>
+                <a:latin typeface="Aptos"/>
+              </a:rPr>
+              <a:t>acuratețe de execuție</a:t>
+            </a:r>
+          </a:p>
+        </p:txBody>
+      </p:sp>
+      <p:sp>
+        <p:nvSpPr>
+          <p:cNvPr id="27" name="Rounded Rectangle 26"/>
           <p:cNvSpPr/>
           <p:nvPr/>
         </p:nvSpPr>
         <p:spPr>
           <a:xfrm>
-            <a:off x="8814816" y="3703320"/>
-            <a:ext cx="2615184" cy="1773936"/>
+            <a:off x="8083296" y="1700784"/>
+            <a:ext cx="3529584" cy="3602736"/>
           </a:xfrm>
           <a:prstGeom prst="roundRect">
             <a:avLst>
-              <a:gd name="adj" fmla="val 7216"/>
+              <a:gd name="adj" fmla="val 3626"/>
             </a:avLst>
           </a:prstGeom>
           <a:solidFill>
@@ -13701,17 +15761,426 @@
       </p:sp>
       <p:sp>
         <p:nvSpPr>
-          <p:cNvPr id="9" name="Rectangle 8"/>
+          <p:cNvPr id="28" name="Rectangle 27"/>
           <p:cNvSpPr/>
           <p:nvPr/>
         </p:nvSpPr>
         <p:spPr>
           <a:xfrm>
-            <a:off x="8814816" y="3831335"/>
-            <a:ext cx="73152" cy="1517904"/>
-          </a:xfrm>
-          <a:prstGeom prst="rect">
-            <a:avLst/>
+            <a:off x="8083296" y="1828800"/>
+            <a:ext cx="73152" cy="3346704"/>
+          </a:xfrm>
+          <a:prstGeom prst="rect">
+            <a:avLst/>
+          </a:prstGeom>
+          <a:solidFill>
+            <a:srgbClr val="2E8B57"/>
+          </a:solidFill>
+          <a:ln w="12700">
+            <a:solidFill>
+              <a:srgbClr val="2E8B57"/>
+            </a:solidFill>
+          </a:ln>
+        </p:spPr>
+        <p:style>
+          <a:lnRef idx="1">
+            <a:schemeClr val="accent1"/>
+          </a:lnRef>
+          <a:fillRef idx="3">
+            <a:schemeClr val="accent1"/>
+          </a:fillRef>
+          <a:effectRef idx="2">
+            <a:schemeClr val="accent1"/>
+          </a:effectRef>
+          <a:fontRef idx="minor">
+            <a:schemeClr val="lt1"/>
+          </a:fontRef>
+        </p:style>
+        <p:txBody>
+          <a:bodyPr rtlCol="0" anchor="ctr"/>
+          <a:lstStyle/>
+          <a:p>
+            <a:pPr algn="ctr"/>
+          </a:p>
+        </p:txBody>
+      </p:sp>
+      <p:sp>
+        <p:nvSpPr>
+          <p:cNvPr id="29" name="TextBox 28"/>
+          <p:cNvSpPr txBox="1"/>
+          <p:nvPr/>
+        </p:nvSpPr>
+        <p:spPr>
+          <a:xfrm>
+            <a:off x="8375904" y="1865376"/>
+            <a:ext cx="3017520" cy="274320"/>
+          </a:xfrm>
+          <a:prstGeom prst="rect">
+            <a:avLst/>
+          </a:prstGeom>
+          <a:noFill/>
+        </p:spPr>
+        <p:txBody>
+          <a:bodyPr wrap="square" lIns="27432" rIns="27432" tIns="27432" bIns="27432" anchor="t">
+            <a:spAutoFit/>
+          </a:bodyPr>
+          <a:lstStyle/>
+          <a:p>
+            <a:pPr algn="l"/>
+            <a:r>
+              <a:rPr sz="1500" b="1" i="0">
+                <a:solidFill>
+                  <a:srgbClr val="102A43"/>
+                </a:solidFill>
+                <a:latin typeface="Consolas"/>
+              </a:rPr>
+              <a:t>BIRD-SQL dev</a:t>
+            </a:r>
+          </a:p>
+        </p:txBody>
+      </p:sp>
+      <p:sp>
+        <p:nvSpPr>
+          <p:cNvPr id="30" name="TextBox 29"/>
+          <p:cNvSpPr txBox="1"/>
+          <p:nvPr/>
+        </p:nvSpPr>
+        <p:spPr>
+          <a:xfrm>
+            <a:off x="8375904" y="2176272"/>
+            <a:ext cx="3017520" cy="219456"/>
+          </a:xfrm>
+          <a:prstGeom prst="rect">
+            <a:avLst/>
+          </a:prstGeom>
+          <a:noFill/>
+        </p:spPr>
+        <p:txBody>
+          <a:bodyPr wrap="square" lIns="27432" rIns="27432" tIns="27432" bIns="27432" anchor="t">
+            <a:spAutoFit/>
+          </a:bodyPr>
+          <a:lstStyle/>
+          <a:p>
+            <a:pPr algn="l"/>
+            <a:r>
+              <a:rPr sz="1050" b="1" i="0">
+                <a:solidFill>
+                  <a:srgbClr val="2E8B57"/>
+                </a:solidFill>
+                <a:latin typeface="Aptos"/>
+              </a:rPr>
+              <a:t>11 baze, autor extern</a:t>
+            </a:r>
+          </a:p>
+        </p:txBody>
+      </p:sp>
+      <p:sp>
+        <p:nvSpPr>
+          <p:cNvPr id="31" name="TextBox 30"/>
+          <p:cNvSpPr txBox="1"/>
+          <p:nvPr/>
+        </p:nvSpPr>
+        <p:spPr>
+          <a:xfrm>
+            <a:off x="8375904" y="2468880"/>
+            <a:ext cx="3072384" cy="219456"/>
+          </a:xfrm>
+          <a:prstGeom prst="rect">
+            <a:avLst/>
+          </a:prstGeom>
+          <a:noFill/>
+        </p:spPr>
+        <p:txBody>
+          <a:bodyPr wrap="square" lIns="27432" rIns="27432" tIns="27432" bIns="27432" anchor="t">
+            <a:spAutoFit/>
+          </a:bodyPr>
+          <a:lstStyle/>
+          <a:p>
+            <a:pPr algn="l"/>
+            <a:r>
+              <a:rPr sz="1100" b="0" i="0">
+                <a:solidFill>
+                  <a:srgbClr val="17212B"/>
+                </a:solidFill>
+                <a:latin typeface="Aptos"/>
+              </a:rPr>
+              <a:t>75 tabele · 3.932.735 rânduri</a:t>
+            </a:r>
+          </a:p>
+        </p:txBody>
+      </p:sp>
+      <p:sp>
+        <p:nvSpPr>
+          <p:cNvPr id="32" name="TextBox 31"/>
+          <p:cNvSpPr txBox="1"/>
+          <p:nvPr/>
+        </p:nvSpPr>
+        <p:spPr>
+          <a:xfrm>
+            <a:off x="8375904" y="2706624"/>
+            <a:ext cx="3072384" cy="219456"/>
+          </a:xfrm>
+          <a:prstGeom prst="rect">
+            <a:avLst/>
+          </a:prstGeom>
+          <a:noFill/>
+        </p:spPr>
+        <p:txBody>
+          <a:bodyPr wrap="square" lIns="27432" rIns="27432" tIns="27432" bIns="27432" anchor="t">
+            <a:spAutoFit/>
+          </a:bodyPr>
+          <a:lstStyle/>
+          <a:p>
+            <a:pPr algn="l"/>
+            <a:r>
+              <a:rPr sz="1100" b="0" i="0">
+                <a:solidFill>
+                  <a:srgbClr val="17212B"/>
+                </a:solidFill>
+                <a:latin typeface="Aptos"/>
+              </a:rPr>
+              <a:t>1.534 de întrebări · autor extern</a:t>
+            </a:r>
+          </a:p>
+        </p:txBody>
+      </p:sp>
+      <p:sp>
+        <p:nvSpPr>
+          <p:cNvPr id="33" name="TextBox 32"/>
+          <p:cNvSpPr txBox="1"/>
+          <p:nvPr/>
+        </p:nvSpPr>
+        <p:spPr>
+          <a:xfrm>
+            <a:off x="8375904" y="3035808"/>
+            <a:ext cx="3017520" cy="182880"/>
+          </a:xfrm>
+          <a:prstGeom prst="rect">
+            <a:avLst/>
+          </a:prstGeom>
+          <a:noFill/>
+        </p:spPr>
+        <p:txBody>
+          <a:bodyPr wrap="square" lIns="27432" rIns="27432" tIns="27432" bIns="27432" anchor="t">
+            <a:spAutoFit/>
+          </a:bodyPr>
+          <a:lstStyle/>
+          <a:p>
+            <a:pPr algn="l"/>
+            <a:r>
+              <a:rPr sz="850" b="1" i="0">
+                <a:solidFill>
+                  <a:srgbClr val="647487"/>
+                </a:solidFill>
+                <a:latin typeface="Aptos"/>
+              </a:rPr>
+              <a:t>ÎNTREBARE DIFICILĂ DIN SET</a:t>
+            </a:r>
+          </a:p>
+        </p:txBody>
+      </p:sp>
+      <p:sp>
+        <p:nvSpPr>
+          <p:cNvPr id="34" name="Rounded Rectangle 33"/>
+          <p:cNvSpPr/>
+          <p:nvPr/>
+        </p:nvSpPr>
+        <p:spPr>
+          <a:xfrm>
+            <a:off x="8357616" y="3255264"/>
+            <a:ext cx="3108960" cy="1463040"/>
+          </a:xfrm>
+          <a:prstGeom prst="roundRect">
+            <a:avLst>
+              <a:gd name="adj" fmla="val 8750"/>
+            </a:avLst>
+          </a:prstGeom>
+          <a:solidFill>
+            <a:srgbClr val="E8F5EE"/>
+          </a:solidFill>
+          <a:ln w="12700">
+            <a:solidFill>
+              <a:srgbClr val="E8F5EE"/>
+            </a:solidFill>
+          </a:ln>
+        </p:spPr>
+        <p:style>
+          <a:lnRef idx="1">
+            <a:schemeClr val="accent1"/>
+          </a:lnRef>
+          <a:fillRef idx="3">
+            <a:schemeClr val="accent1"/>
+          </a:fillRef>
+          <a:effectRef idx="2">
+            <a:schemeClr val="accent1"/>
+          </a:effectRef>
+          <a:fontRef idx="minor">
+            <a:schemeClr val="lt1"/>
+          </a:fontRef>
+        </p:style>
+        <p:txBody>
+          <a:bodyPr rtlCol="0" anchor="ctr"/>
+          <a:lstStyle/>
+          <a:p>
+            <a:pPr algn="ctr"/>
+          </a:p>
+        </p:txBody>
+      </p:sp>
+      <p:sp>
+        <p:nvSpPr>
+          <p:cNvPr id="35" name="TextBox 34"/>
+          <p:cNvSpPr txBox="1"/>
+          <p:nvPr/>
+        </p:nvSpPr>
+        <p:spPr>
+          <a:xfrm>
+            <a:off x="8485632" y="3346704"/>
+            <a:ext cx="2852928" cy="786384"/>
+          </a:xfrm>
+          <a:prstGeom prst="rect">
+            <a:avLst/>
+          </a:prstGeom>
+          <a:noFill/>
+        </p:spPr>
+        <p:txBody>
+          <a:bodyPr wrap="square" lIns="27432" rIns="27432" tIns="27432" bIns="27432" anchor="t">
+            <a:spAutoFit/>
+          </a:bodyPr>
+          <a:lstStyle/>
+          <a:p>
+            <a:pPr algn="l"/>
+            <a:r>
+              <a:rPr sz="950" b="0" i="1">
+                <a:solidFill>
+                  <a:srgbClr val="17212B"/>
+                </a:solidFill>
+                <a:latin typeface="Aptos"/>
+              </a:rPr>
+              <a:t>„List out the account numbers of female clients who are oldest and has lowest average salary, calculate the gap between this lowest average salary with the highest average salary?”</a:t>
+            </a:r>
+          </a:p>
+        </p:txBody>
+      </p:sp>
+      <p:sp>
+        <p:nvSpPr>
+          <p:cNvPr id="36" name="TextBox 35"/>
+          <p:cNvSpPr txBox="1"/>
+          <p:nvPr/>
+        </p:nvSpPr>
+        <p:spPr>
+          <a:xfrm>
+            <a:off x="8485632" y="4133087"/>
+            <a:ext cx="2852928" cy="548640"/>
+          </a:xfrm>
+          <a:prstGeom prst="rect">
+            <a:avLst/>
+          </a:prstGeom>
+          <a:noFill/>
+        </p:spPr>
+        <p:txBody>
+          <a:bodyPr wrap="square" lIns="27432" rIns="27432" tIns="27432" bIns="27432" anchor="t">
+            <a:spAutoFit/>
+          </a:bodyPr>
+          <a:lstStyle/>
+          <a:p>
+            <a:pPr algn="l"/>
+            <a:r>
+              <a:rPr sz="850" b="1" i="0">
+                <a:solidFill>
+                  <a:srgbClr val="2E8B57"/>
+                </a:solidFill>
+                <a:latin typeface="Aptos"/>
+              </a:rPr>
+              <a:t>+ dicționar extern: A11 refers to average salary; if person A's birthdate &gt; B's birthdate, person B is order than person A.</a:t>
+            </a:r>
+          </a:p>
+        </p:txBody>
+      </p:sp>
+      <p:sp>
+        <p:nvSpPr>
+          <p:cNvPr id="37" name="TextBox 36"/>
+          <p:cNvSpPr txBox="1"/>
+          <p:nvPr/>
+        </p:nvSpPr>
+        <p:spPr>
+          <a:xfrm>
+            <a:off x="8375904" y="4754880"/>
+            <a:ext cx="3017520" cy="438912"/>
+          </a:xfrm>
+          <a:prstGeom prst="rect">
+            <a:avLst/>
+          </a:prstGeom>
+          <a:noFill/>
+        </p:spPr>
+        <p:txBody>
+          <a:bodyPr wrap="square" lIns="27432" rIns="27432" tIns="27432" bIns="27432" anchor="t">
+            <a:spAutoFit/>
+          </a:bodyPr>
+          <a:lstStyle/>
+          <a:p>
+            <a:pPr algn="l"/>
+            <a:r>
+              <a:rPr sz="2400" b="1" i="0">
+                <a:solidFill>
+                  <a:srgbClr val="2E8B57"/>
+                </a:solidFill>
+                <a:latin typeface="Aptos"/>
+              </a:rPr>
+              <a:t>63,6 %</a:t>
+            </a:r>
+          </a:p>
+        </p:txBody>
+      </p:sp>
+      <p:sp>
+        <p:nvSpPr>
+          <p:cNvPr id="38" name="TextBox 37"/>
+          <p:cNvSpPr txBox="1"/>
+          <p:nvPr/>
+        </p:nvSpPr>
+        <p:spPr>
+          <a:xfrm>
+            <a:off x="8375904" y="5102352"/>
+            <a:ext cx="3017520" cy="182880"/>
+          </a:xfrm>
+          <a:prstGeom prst="rect">
+            <a:avLst/>
+          </a:prstGeom>
+          <a:noFill/>
+        </p:spPr>
+        <p:txBody>
+          <a:bodyPr wrap="square" lIns="27432" rIns="27432" tIns="27432" bIns="27432" anchor="t">
+            <a:spAutoFit/>
+          </a:bodyPr>
+          <a:lstStyle/>
+          <a:p>
+            <a:pPr algn="l"/>
+            <a:r>
+              <a:rPr sz="900" b="0" i="0">
+                <a:solidFill>
+                  <a:srgbClr val="647487"/>
+                </a:solidFill>
+                <a:latin typeface="Aptos"/>
+              </a:rPr>
+              <a:t>acuratețe de execuție</a:t>
+            </a:r>
+          </a:p>
+        </p:txBody>
+      </p:sp>
+      <p:sp>
+        <p:nvSpPr>
+          <p:cNvPr id="39" name="Rounded Rectangle 38"/>
+          <p:cNvSpPr/>
+          <p:nvPr/>
+        </p:nvSpPr>
+        <p:spPr>
+          <a:xfrm>
+            <a:off x="658368" y="5449824"/>
+            <a:ext cx="10917936" cy="914400"/>
+          </a:xfrm>
+          <a:prstGeom prst="roundRect">
+            <a:avLst>
+              <a:gd name="adj" fmla="val 14000"/>
+            </a:avLst>
           </a:prstGeom>
           <a:solidFill>
             <a:srgbClr val="102A43"/>
@@ -13746,14 +16215,14 @@
       </p:sp>
       <p:sp>
         <p:nvSpPr>
-          <p:cNvPr id="10" name="TextBox 9"/>
-          <p:cNvSpPr txBox="1"/>
-          <p:nvPr/>
-        </p:nvSpPr>
-        <p:spPr>
-          <a:xfrm>
-            <a:off x="9134856" y="3904487"/>
-            <a:ext cx="2148840" cy="548640"/>
+          <p:cNvPr id="40" name="TextBox 39"/>
+          <p:cNvSpPr txBox="1"/>
+          <p:nvPr/>
+        </p:nvSpPr>
+        <p:spPr>
+          <a:xfrm>
+            <a:off x="950976" y="5541264"/>
+            <a:ext cx="10332720" cy="292608"/>
           </a:xfrm>
           <a:prstGeom prst="rect">
             <a:avLst/>
@@ -13768,27 +16237,45 @@
           <a:p>
             <a:pPr algn="l"/>
             <a:r>
-              <a:rPr sz="1800" b="1" i="0">
-                <a:solidFill>
-                  <a:srgbClr val="102A43"/>
-                </a:solidFill>
-                <a:latin typeface="Aptos"/>
-              </a:rPr>
-              <a:t>De ce?</a:t>
-            </a:r>
-          </a:p>
-        </p:txBody>
-      </p:sp>
-      <p:sp>
-        <p:nvSpPr>
-          <p:cNvPr id="11" name="TextBox 10"/>
-          <p:cNvSpPr txBox="1"/>
-          <p:nvPr/>
-        </p:nvSpPr>
-        <p:spPr>
-          <a:xfrm>
-            <a:off x="9134856" y="4507992"/>
-            <a:ext cx="2020824" cy="813815"/>
+              <a:rPr sz="1400" b="1" i="0">
+                <a:solidFill>
+                  <a:srgbClr val="FFFFFF"/>
+                </a:solidFill>
+                <a:latin typeface="Aptos"/>
+              </a:rPr>
+              <a:t>Primele două sunt grele la SQL. A treia e grea la </a:t>
+            </a:r>
+            <a:r>
+              <a:rPr sz="1400" b="1" i="0">
+                <a:solidFill>
+                  <a:srgbClr val="E1A83B"/>
+                </a:solidFill>
+                <a:latin typeface="Aptos"/>
+              </a:rPr>
+              <a:t>date</a:t>
+            </a:r>
+            <a:r>
+              <a:rPr sz="1400" b="1" i="0">
+                <a:solidFill>
+                  <a:srgbClr val="FFFFFF"/>
+                </a:solidFill>
+                <a:latin typeface="Aptos"/>
+              </a:rPr>
+              <a:t>.</a:t>
+            </a:r>
+          </a:p>
+        </p:txBody>
+      </p:sp>
+      <p:sp>
+        <p:nvSpPr>
+          <p:cNvPr id="41" name="TextBox 40"/>
+          <p:cNvSpPr txBox="1"/>
+          <p:nvPr/>
+        </p:nvSpPr>
+        <p:spPr>
+          <a:xfrm>
+            <a:off x="950976" y="5870448"/>
+            <a:ext cx="10332720" cy="438912"/>
           </a:xfrm>
           <a:prstGeom prst="rect">
             <a:avLst/>
@@ -13803,20 +16290,29 @@
           <a:p>
             <a:pPr algn="l"/>
             <a:r>
-              <a:rPr sz="1250" b="0" i="0">
-                <a:solidFill>
-                  <a:srgbClr val="647487"/>
-                </a:solidFill>
-                <a:latin typeface="Aptos"/>
-              </a:rPr>
-              <a:t>La fiecare pas, agentul retrimite contextul acumulat și promptul propriu.</a:t>
-            </a:r>
-          </a:p>
-        </p:txBody>
-      </p:sp>
-      <p:sp>
-        <p:nvSpPr>
-          <p:cNvPr id="12" name="TextBox 11"/>
+              <a:rPr sz="1100" b="0" i="0">
+                <a:solidFill>
+                  <a:srgbClr val="E1A83B"/>
+                </a:solidFill>
+                <a:latin typeface="Consolas"/>
+              </a:rPr>
+              <a:t>A11</a:t>
+            </a:r>
+            <a:r>
+              <a:rPr sz="1100" b="0" i="0">
+                <a:solidFill>
+                  <a:srgbClr val="9FB4C6"/>
+                </a:solidFill>
+                <a:latin typeface="Aptos"/>
+              </a:rPr>
+              <a:t> nu se poate ghici din schemă, iar „north Bohemia” nu se potrivește cu „North Bohemia”. Volumul nu explică scorul: 61 de puncte dispersie între cele 11 baze BIRD, față de 8 puncte între modele.</a:t>
+            </a:r>
+          </a:p>
+        </p:txBody>
+      </p:sp>
+      <p:sp>
+        <p:nvSpPr>
+          <p:cNvPr id="42" name="TextBox 41"/>
           <p:cNvSpPr txBox="1"/>
           <p:nvPr/>
         </p:nvSpPr>
@@ -13844,14 +16340,14 @@
                 </a:solidFill>
                 <a:latin typeface="Aptos"/>
               </a:rPr>
-              <a:t>Costuri măsurate; axa costului este logaritmică</a:t>
-            </a:r>
-          </a:p>
-        </p:txBody>
-      </p:sp>
-      <p:sp>
-        <p:nvSpPr>
-          <p:cNvPr id="13" name="TextBox 12"/>
+              <a:t>car_rental și AdventureWorks: gemini-3.7-flash. BIRD-SQL dev: aceeași rulare, DDL brut</a:t>
+            </a:r>
+          </a:p>
+        </p:txBody>
+      </p:sp>
+      <p:sp>
+        <p:nvSpPr>
+          <p:cNvPr id="43" name="TextBox 42"/>
           <p:cNvSpPr txBox="1"/>
           <p:nvPr/>
         </p:nvSpPr>

--- a/docs/presentation/Sistem_text_to_SQL_Dodita_Alexandru.pptx
+++ b/docs/presentation/Sistem_text_to_SQL_Dodita_Alexandru.pptx
@@ -12184,7 +12184,7 @@
                 <a:latin typeface="Aptos"/>
               </a:rPr>
               <a:t>Sistemul funcționează.
-Dar este construit cum trebuie?</a:t>
+Este însă arhitectura potrivită?</a:t>
             </a:r>
           </a:p>
         </p:txBody>
@@ -12198,7 +12198,7 @@
         <p:spPr>
           <a:xfrm>
             <a:off x="658368" y="2157984"/>
-            <a:ext cx="4846320" cy="1005840"/>
+            <a:ext cx="4846320" cy="1371600"/>
           </a:xfrm>
           <a:prstGeom prst="rect">
             <a:avLst/>
@@ -12213,13 +12213,13 @@
           <a:p>
             <a:pPr algn="l"/>
             <a:r>
-              <a:rPr sz="1600" b="0" i="0">
+              <a:rPr sz="1700" b="0" i="0">
                 <a:solidFill>
                   <a:srgbClr val="B8CAD8"/>
                 </a:solidFill>
                 <a:latin typeface="Aptos"/>
               </a:rPr>
-              <a:t>Tot ce am arătat până aici este o alegere de proiectare, nu un rezultat măsurat. Restul lucrării verifică fiecare alegere pe rând.</a:t>
+              <a:t>Arhitectura prezentată până aici constituie o alegere de proiectare, nu un rezultat măsurat. Fiecare decizie este verificată experimental în continuare.</a:t>
             </a:r>
           </a:p>
         </p:txBody>
@@ -12232,12 +12232,12 @@
         </p:nvSpPr>
         <p:spPr>
           <a:xfrm>
-            <a:off x="658368" y="3310128"/>
-            <a:ext cx="4937760" cy="658368"/>
+            <a:off x="6172200" y="1645920"/>
+            <a:ext cx="5358384" cy="932688"/>
           </a:xfrm>
           <a:prstGeom prst="roundRect">
             <a:avLst>
-              <a:gd name="adj" fmla="val 19444"/>
+              <a:gd name="adj" fmla="val 13725"/>
             </a:avLst>
           </a:prstGeom>
           <a:solidFill>
@@ -12279,8 +12279,8 @@
         </p:nvSpPr>
         <p:spPr>
           <a:xfrm>
-            <a:off x="932688" y="3310128"/>
-            <a:ext cx="4480560" cy="658368"/>
+            <a:off x="6492240" y="1645920"/>
+            <a:ext cx="502920" cy="932688"/>
           </a:xfrm>
           <a:prstGeom prst="rect">
             <a:avLst/>
@@ -12295,26 +12295,61 @@
           <a:p>
             <a:pPr algn="l"/>
             <a:r>
-              <a:rPr sz="1400" b="1" i="0">
-                <a:solidFill>
-                  <a:srgbClr val="E1A83B"/>
-                </a:solidFill>
-                <a:latin typeface="Aptos"/>
-              </a:rPr>
-              <a:t>Capitolul 4 — evaluarea experimentală</a:t>
-            </a:r>
-          </a:p>
-        </p:txBody>
-      </p:sp>
-      <p:sp>
-        <p:nvSpPr>
-          <p:cNvPr id="7" name="Rounded Rectangle 6"/>
+              <a:rPr sz="1500" b="1" i="0">
+                <a:solidFill>
+                  <a:srgbClr val="1F6FB4"/>
+                </a:solidFill>
+                <a:latin typeface="Aptos"/>
+              </a:rPr>
+              <a:t>01</a:t>
+            </a:r>
+          </a:p>
+        </p:txBody>
+      </p:sp>
+      <p:sp>
+        <p:nvSpPr>
+          <p:cNvPr id="7" name="TextBox 6"/>
+          <p:cNvSpPr txBox="1"/>
+          <p:nvPr/>
+        </p:nvSpPr>
+        <p:spPr>
+          <a:xfrm>
+            <a:off x="7059168" y="1645920"/>
+            <a:ext cx="4224528" cy="932688"/>
+          </a:xfrm>
+          <a:prstGeom prst="rect">
+            <a:avLst/>
+          </a:prstGeom>
+          <a:noFill/>
+        </p:spPr>
+        <p:txBody>
+          <a:bodyPr wrap="square" lIns="27432" rIns="27432" tIns="27432" bIns="27432" anchor="ctr">
+            <a:spAutoFit/>
+          </a:bodyPr>
+          <a:lstStyle/>
+          <a:p>
+            <a:pPr algn="l"/>
+            <a:r>
+              <a:rPr sz="1600" b="1" i="0">
+                <a:solidFill>
+                  <a:srgbClr val="FFFFFF"/>
+                </a:solidFill>
+                <a:latin typeface="Aptos"/>
+              </a:rPr>
+              <a:t>Cum ar trebui generat SQL-ul?</a:t>
+            </a:r>
+          </a:p>
+        </p:txBody>
+      </p:sp>
+      <p:sp>
+        <p:nvSpPr>
+          <p:cNvPr id="8" name="Rounded Rectangle 7"/>
           <p:cNvSpPr/>
           <p:nvPr/>
         </p:nvSpPr>
         <p:spPr>
           <a:xfrm>
-            <a:off x="6172200" y="1481328"/>
+            <a:off x="6172200" y="2779776"/>
             <a:ext cx="5358384" cy="932688"/>
           </a:xfrm>
           <a:prstGeom prst="roundRect">
@@ -12355,13 +12390,13 @@
       </p:sp>
       <p:sp>
         <p:nvSpPr>
-          <p:cNvPr id="8" name="TextBox 7"/>
-          <p:cNvSpPr txBox="1"/>
-          <p:nvPr/>
-        </p:nvSpPr>
-        <p:spPr>
-          <a:xfrm>
-            <a:off x="6492240" y="1481328"/>
+          <p:cNvPr id="9" name="TextBox 8"/>
+          <p:cNvSpPr txBox="1"/>
+          <p:nvPr/>
+        </p:nvSpPr>
+        <p:spPr>
+          <a:xfrm>
+            <a:off x="6492240" y="2779776"/>
             <a:ext cx="502920" cy="932688"/>
           </a:xfrm>
           <a:prstGeom prst="rect">
@@ -12379,25 +12414,25 @@
             <a:r>
               <a:rPr sz="1500" b="1" i="0">
                 <a:solidFill>
-                  <a:srgbClr val="1F6FB4"/>
-                </a:solidFill>
-                <a:latin typeface="Aptos"/>
-              </a:rPr>
-              <a:t>01</a:t>
-            </a:r>
-          </a:p>
-        </p:txBody>
-      </p:sp>
-      <p:sp>
-        <p:nvSpPr>
-          <p:cNvPr id="9" name="TextBox 8"/>
-          <p:cNvSpPr txBox="1"/>
-          <p:nvPr/>
-        </p:nvSpPr>
-        <p:spPr>
-          <a:xfrm>
-            <a:off x="7059168" y="1481328"/>
-            <a:ext cx="4206240" cy="932688"/>
+                  <a:srgbClr val="C1483A"/>
+                </a:solidFill>
+                <a:latin typeface="Aptos"/>
+              </a:rPr>
+              <a:t>02</a:t>
+            </a:r>
+          </a:p>
+        </p:txBody>
+      </p:sp>
+      <p:sp>
+        <p:nvSpPr>
+          <p:cNvPr id="10" name="TextBox 9"/>
+          <p:cNvSpPr txBox="1"/>
+          <p:nvPr/>
+        </p:nvSpPr>
+        <p:spPr>
+          <a:xfrm>
+            <a:off x="7059168" y="2779776"/>
+            <a:ext cx="4224528" cy="932688"/>
           </a:xfrm>
           <a:prstGeom prst="rect">
             <a:avLst/>
@@ -12418,20 +12453,20 @@
                 </a:solidFill>
                 <a:latin typeface="Aptos"/>
               </a:rPr>
-              <a:t>Cum ar trebui generat SQL-ul?</a:t>
-            </a:r>
-          </a:p>
-        </p:txBody>
-      </p:sp>
-      <p:sp>
-        <p:nvSpPr>
-          <p:cNvPr id="10" name="Rounded Rectangle 9"/>
+              <a:t>Cât costă fiecare variantă?</a:t>
+            </a:r>
+          </a:p>
+        </p:txBody>
+      </p:sp>
+      <p:sp>
+        <p:nvSpPr>
+          <p:cNvPr id="11" name="Rounded Rectangle 10"/>
           <p:cNvSpPr/>
           <p:nvPr/>
         </p:nvSpPr>
         <p:spPr>
           <a:xfrm>
-            <a:off x="6172200" y="2651760"/>
+            <a:off x="6172200" y="3913632"/>
             <a:ext cx="5358384" cy="932688"/>
           </a:xfrm>
           <a:prstGeom prst="roundRect">
@@ -12472,13 +12507,13 @@
       </p:sp>
       <p:sp>
         <p:nvSpPr>
-          <p:cNvPr id="11" name="TextBox 10"/>
-          <p:cNvSpPr txBox="1"/>
-          <p:nvPr/>
-        </p:nvSpPr>
-        <p:spPr>
-          <a:xfrm>
-            <a:off x="6492240" y="2651760"/>
+          <p:cNvPr id="12" name="TextBox 11"/>
+          <p:cNvSpPr txBox="1"/>
+          <p:nvPr/>
+        </p:nvSpPr>
+        <p:spPr>
+          <a:xfrm>
+            <a:off x="6492240" y="3913632"/>
             <a:ext cx="502920" cy="932688"/>
           </a:xfrm>
           <a:prstGeom prst="rect">
@@ -12496,25 +12531,25 @@
             <a:r>
               <a:rPr sz="1500" b="1" i="0">
                 <a:solidFill>
-                  <a:srgbClr val="C1483A"/>
-                </a:solidFill>
-                <a:latin typeface="Aptos"/>
-              </a:rPr>
-              <a:t>02</a:t>
-            </a:r>
-          </a:p>
-        </p:txBody>
-      </p:sp>
-      <p:sp>
-        <p:nvSpPr>
-          <p:cNvPr id="12" name="TextBox 11"/>
-          <p:cNvSpPr txBox="1"/>
-          <p:nvPr/>
-        </p:nvSpPr>
-        <p:spPr>
-          <a:xfrm>
-            <a:off x="7059168" y="2651760"/>
-            <a:ext cx="4206240" cy="932688"/>
+                  <a:srgbClr val="2E8B57"/>
+                </a:solidFill>
+                <a:latin typeface="Aptos"/>
+              </a:rPr>
+              <a:t>03</a:t>
+            </a:r>
+          </a:p>
+        </p:txBody>
+      </p:sp>
+      <p:sp>
+        <p:nvSpPr>
+          <p:cNvPr id="13" name="TextBox 12"/>
+          <p:cNvSpPr txBox="1"/>
+          <p:nvPr/>
+        </p:nvSpPr>
+        <p:spPr>
+          <a:xfrm>
+            <a:off x="7059168" y="3913632"/>
+            <a:ext cx="4224528" cy="932688"/>
           </a:xfrm>
           <a:prstGeom prst="rect">
             <a:avLst/>
@@ -12535,20 +12570,20 @@
                 </a:solidFill>
                 <a:latin typeface="Aptos"/>
               </a:rPr>
-              <a:t>Cât costă fiecare variantă?</a:t>
-            </a:r>
-          </a:p>
-        </p:txBody>
-      </p:sp>
-      <p:sp>
-        <p:nvSpPr>
-          <p:cNvPr id="13" name="Rounded Rectangle 12"/>
+              <a:t>Pe ce date se poate măsura credibil?</a:t>
+            </a:r>
+          </a:p>
+        </p:txBody>
+      </p:sp>
+      <p:sp>
+        <p:nvSpPr>
+          <p:cNvPr id="14" name="Rounded Rectangle 13"/>
           <p:cNvSpPr/>
           <p:nvPr/>
         </p:nvSpPr>
         <p:spPr>
           <a:xfrm>
-            <a:off x="6172200" y="3822191"/>
+            <a:off x="6172200" y="5047488"/>
             <a:ext cx="5358384" cy="932688"/>
           </a:xfrm>
           <a:prstGeom prst="roundRect">
@@ -12589,13 +12624,13 @@
       </p:sp>
       <p:sp>
         <p:nvSpPr>
-          <p:cNvPr id="14" name="TextBox 13"/>
-          <p:cNvSpPr txBox="1"/>
-          <p:nvPr/>
-        </p:nvSpPr>
-        <p:spPr>
-          <a:xfrm>
-            <a:off x="6492240" y="3822191"/>
+          <p:cNvPr id="15" name="TextBox 14"/>
+          <p:cNvSpPr txBox="1"/>
+          <p:nvPr/>
+        </p:nvSpPr>
+        <p:spPr>
+          <a:xfrm>
+            <a:off x="6492240" y="5047488"/>
             <a:ext cx="502920" cy="932688"/>
           </a:xfrm>
           <a:prstGeom prst="rect">
@@ -12613,25 +12648,25 @@
             <a:r>
               <a:rPr sz="1500" b="1" i="0">
                 <a:solidFill>
-                  <a:srgbClr val="2E8B57"/>
-                </a:solidFill>
-                <a:latin typeface="Aptos"/>
-              </a:rPr>
-              <a:t>03</a:t>
-            </a:r>
-          </a:p>
-        </p:txBody>
-      </p:sp>
-      <p:sp>
-        <p:nvSpPr>
-          <p:cNvPr id="15" name="TextBox 14"/>
-          <p:cNvSpPr txBox="1"/>
-          <p:nvPr/>
-        </p:nvSpPr>
-        <p:spPr>
-          <a:xfrm>
-            <a:off x="7059168" y="3822191"/>
-            <a:ext cx="4206240" cy="932688"/>
+                  <a:srgbClr val="E1A83B"/>
+                </a:solidFill>
+                <a:latin typeface="Aptos"/>
+              </a:rPr>
+              <a:t>04</a:t>
+            </a:r>
+          </a:p>
+        </p:txBody>
+      </p:sp>
+      <p:sp>
+        <p:nvSpPr>
+          <p:cNvPr id="16" name="TextBox 15"/>
+          <p:cNvSpPr txBox="1"/>
+          <p:nvPr/>
+        </p:nvSpPr>
+        <p:spPr>
+          <a:xfrm>
+            <a:off x="7059168" y="5047488"/>
+            <a:ext cx="4224528" cy="932688"/>
           </a:xfrm>
           <a:prstGeom prst="rect">
             <a:avLst/>
@@ -12652,131 +12687,14 @@
                 </a:solidFill>
                 <a:latin typeface="Aptos"/>
               </a:rPr>
-              <a:t>Pe ce date se poate măsura credibil?</a:t>
-            </a:r>
-          </a:p>
-        </p:txBody>
-      </p:sp>
-      <p:sp>
-        <p:nvSpPr>
-          <p:cNvPr id="16" name="Rounded Rectangle 15"/>
-          <p:cNvSpPr/>
-          <p:nvPr/>
-        </p:nvSpPr>
-        <p:spPr>
-          <a:xfrm>
-            <a:off x="6172200" y="4992624"/>
-            <a:ext cx="5358384" cy="932688"/>
-          </a:xfrm>
-          <a:prstGeom prst="roundRect">
-            <a:avLst>
-              <a:gd name="adj" fmla="val 13725"/>
-            </a:avLst>
-          </a:prstGeom>
-          <a:solidFill>
-            <a:srgbClr val="173F5F"/>
-          </a:solidFill>
-          <a:ln w="12700">
-            <a:solidFill>
-              <a:srgbClr val="35556F"/>
-            </a:solidFill>
-          </a:ln>
-        </p:spPr>
-        <p:style>
-          <a:lnRef idx="1">
-            <a:schemeClr val="accent1"/>
-          </a:lnRef>
-          <a:fillRef idx="3">
-            <a:schemeClr val="accent1"/>
-          </a:fillRef>
-          <a:effectRef idx="2">
-            <a:schemeClr val="accent1"/>
-          </a:effectRef>
-          <a:fontRef idx="minor">
-            <a:schemeClr val="lt1"/>
-          </a:fontRef>
-        </p:style>
-        <p:txBody>
-          <a:bodyPr rtlCol="0" anchor="ctr"/>
-          <a:lstStyle/>
-          <a:p>
-            <a:pPr algn="ctr"/>
+              <a:t>Cum se tratează întrebările ambigue?</a:t>
+            </a:r>
           </a:p>
         </p:txBody>
       </p:sp>
       <p:sp>
         <p:nvSpPr>
           <p:cNvPr id="17" name="TextBox 16"/>
-          <p:cNvSpPr txBox="1"/>
-          <p:nvPr/>
-        </p:nvSpPr>
-        <p:spPr>
-          <a:xfrm>
-            <a:off x="6492240" y="4992624"/>
-            <a:ext cx="502920" cy="932688"/>
-          </a:xfrm>
-          <a:prstGeom prst="rect">
-            <a:avLst/>
-          </a:prstGeom>
-          <a:noFill/>
-        </p:spPr>
-        <p:txBody>
-          <a:bodyPr wrap="square" lIns="27432" rIns="27432" tIns="27432" bIns="27432" anchor="ctr">
-            <a:spAutoFit/>
-          </a:bodyPr>
-          <a:lstStyle/>
-          <a:p>
-            <a:pPr algn="l"/>
-            <a:r>
-              <a:rPr sz="1500" b="1" i="0">
-                <a:solidFill>
-                  <a:srgbClr val="E1A83B"/>
-                </a:solidFill>
-                <a:latin typeface="Aptos"/>
-              </a:rPr>
-              <a:t>04</a:t>
-            </a:r>
-          </a:p>
-        </p:txBody>
-      </p:sp>
-      <p:sp>
-        <p:nvSpPr>
-          <p:cNvPr id="18" name="TextBox 17"/>
-          <p:cNvSpPr txBox="1"/>
-          <p:nvPr/>
-        </p:nvSpPr>
-        <p:spPr>
-          <a:xfrm>
-            <a:off x="7059168" y="4992624"/>
-            <a:ext cx="4206240" cy="932688"/>
-          </a:xfrm>
-          <a:prstGeom prst="rect">
-            <a:avLst/>
-          </a:prstGeom>
-          <a:noFill/>
-        </p:spPr>
-        <p:txBody>
-          <a:bodyPr wrap="square" lIns="27432" rIns="27432" tIns="27432" bIns="27432" anchor="ctr">
-            <a:spAutoFit/>
-          </a:bodyPr>
-          <a:lstStyle/>
-          <a:p>
-            <a:pPr algn="l"/>
-            <a:r>
-              <a:rPr sz="1600" b="1" i="0">
-                <a:solidFill>
-                  <a:srgbClr val="FFFFFF"/>
-                </a:solidFill>
-                <a:latin typeface="Aptos"/>
-              </a:rPr>
-              <a:t>Ce face sistemul când întrebarea e ambiguă?</a:t>
-            </a:r>
-          </a:p>
-        </p:txBody>
-      </p:sp>
-      <p:sp>
-        <p:nvSpPr>
-          <p:cNvPr id="19" name="TextBox 18"/>
           <p:cNvSpPr txBox="1"/>
           <p:nvPr/>
         </p:nvSpPr>
@@ -14834,7 +14752,7 @@
                 </a:solidFill>
                 <a:latin typeface="Aptos"/>
               </a:rPr>
-              <a:t>Trei seturi, două feluri de dificultate</a:t>
+              <a:t>Trei seturi, două tipuri de dificultate</a:t>
             </a:r>
           </a:p>
         </p:txBody>
@@ -15031,7 +14949,7 @@
                 </a:solidFill>
                 <a:latin typeface="Aptos"/>
               </a:rPr>
-              <a:t>generată de mine</a:t>
+              <a:t>elaborată de autor</a:t>
             </a:r>
           </a:p>
         </p:txBody>
@@ -16243,7 +16161,7 @@
                 </a:solidFill>
                 <a:latin typeface="Aptos"/>
               </a:rPr>
-              <a:t>Primele două sunt grele la SQL. A treia e grea la </a:t>
+              <a:t>În primele două seturi dificultatea este </a:t>
             </a:r>
             <a:r>
               <a:rPr sz="1400" b="1" i="0">
@@ -16252,7 +16170,25 @@
                 </a:solidFill>
                 <a:latin typeface="Aptos"/>
               </a:rPr>
-              <a:t>date</a:t>
+              <a:t>sintactică</a:t>
+            </a:r>
+            <a:r>
+              <a:rPr sz="1400" b="1" i="0">
+                <a:solidFill>
+                  <a:srgbClr val="FFFFFF"/>
+                </a:solidFill>
+                <a:latin typeface="Aptos"/>
+              </a:rPr>
+              <a:t>; în al treilea este </a:t>
+            </a:r>
+            <a:r>
+              <a:rPr sz="1400" b="1" i="0">
+                <a:solidFill>
+                  <a:srgbClr val="E1A83B"/>
+                </a:solidFill>
+                <a:latin typeface="Aptos"/>
+              </a:rPr>
+              <a:t>semantică</a:t>
             </a:r>
             <a:r>
               <a:rPr sz="1400" b="1" i="0">
@@ -16292,6 +16228,15 @@
             <a:r>
               <a:rPr sz="1100" b="0" i="0">
                 <a:solidFill>
+                  <a:srgbClr val="9FB4C6"/>
+                </a:solidFill>
+                <a:latin typeface="Aptos"/>
+              </a:rPr>
+              <a:t>Coloana </a:t>
+            </a:r>
+            <a:r>
+              <a:rPr sz="1100" b="0" i="0">
+                <a:solidFill>
                   <a:srgbClr val="E1A83B"/>
                 </a:solidFill>
                 <a:latin typeface="Consolas"/>
@@ -16305,7 +16250,7 @@
                 </a:solidFill>
                 <a:latin typeface="Aptos"/>
               </a:rPr>
-              <a:t> nu se poate ghici din schemă, iar „north Bohemia” nu se potrivește cu „North Bohemia”. Volumul nu explică scorul: 61 de puncte dispersie între cele 11 baze BIRD, față de 8 puncte între modele.</a:t>
+              <a:t> nu poate fi dedusă din schemă, iar valoarea „north Bohemia” nu corespunde formei „North Bohemia”. Volumul nu explică diferența de scor: dispersia este de 61 de puncte între cele 11 baze BIRD, față de 8 puncte între modele.</a:t>
             </a:r>
           </a:p>
         </p:txBody>
